--- a/artifacts/rajasthan-ifms-crisis/IFMS-Rajasthan-Investigation.pptx
+++ b/artifacts/rajasthan-ifms-crisis/IFMS-Rajasthan-Investigation.pptx
@@ -21,6 +21,7 @@
     <p:sldId id="269" r:id="rId20"/>
     <p:sldId id="270" r:id="rId21"/>
     <p:sldId id="271" r:id="rId22"/>
+    <p:sldId id="272" r:id="rId23"/>
   </p:sldIdLst>
   <p:sldSz cx="12188952" cy="6858000" type="screen4x3"/>
   <p:notesSz cx="6858000" cy="9144000"/>
@@ -3968,7 +3969,7 @@
                   <a:srgbClr val="64788C"/>
                 </a:solidFill>
               </a:rPr>
-              <a:t>10 / 15</a:t>
+              <a:t>10 / 16</a:t>
             </a:r>
           </a:p>
         </p:txBody>
@@ -4418,7 +4419,7 @@
                   <a:srgbClr val="64788C"/>
                 </a:solidFill>
               </a:rPr>
-              <a:t>11 / 15</a:t>
+              <a:t>11 / 16</a:t>
             </a:r>
           </a:p>
         </p:txBody>
@@ -4868,7 +4869,7 @@
                   <a:srgbClr val="64788C"/>
                 </a:solidFill>
               </a:rPr>
-              <a:t>12 / 15</a:t>
+              <a:t>12 / 16</a:t>
             </a:r>
           </a:p>
         </p:txBody>
@@ -5318,7 +5319,7 @@
                   <a:srgbClr val="64788C"/>
                 </a:solidFill>
               </a:rPr>
-              <a:t>13 / 15</a:t>
+              <a:t>13 / 16</a:t>
             </a:r>
           </a:p>
         </p:txBody>
@@ -5507,7 +5508,7 @@
                   <a:srgbClr val="FFFFFF"/>
                 </a:solidFill>
               </a:rPr>
-              <a:t>Ch.9</a:t>
+              <a:t>Ch.8B</a:t>
             </a:r>
           </a:p>
         </p:txBody>
@@ -5541,7 +5542,7 @@
                   <a:srgbClr val="FFFFFF"/>
                 </a:solidFill>
               </a:rPr>
-              <a:t>सात तत्काल माँगें</a:t>
+              <a:t>~200 रद्द अनुबंध — वसूली शून्य: नामित ठेकेदार बेखौफ</a:t>
             </a:r>
           </a:p>
         </p:txBody>
@@ -5575,7 +5576,7 @@
                   <a:srgbClr val="A0C8DC"/>
                 </a:solidFill>
               </a:rPr>
-              <a:t>Seven Immediate Demands</a:t>
+              <a:t>~200 Rescinded Contracts — Zero Recovery: Named Defaulters Walk Free</a:t>
             </a:r>
           </a:p>
         </p:txBody>
@@ -5652,10 +5653,12 @@
                   <a:srgbClr val="DCE1E6"/>
                 </a:solidFill>
               </a:rPr>
-              <a:t>1. Statutory Delegation Order (Gazette Notification)। 2. नागरिक पारदर्शिता। 3.
-DSC अधिकारी के पास — operator के नहीं। 4. अनिवार्य Training। 5. Portal bugs
-deadline के साथ fix हों। 6. 24×7 Dedicated Helpline। 7. Independent Monitoring
-Committee।</a:t>
+              <a:t>~200 contracts rescinded — Risk and Cost tenders floated — लेकिन recovery
+monitor नहीं होती। तीन नामित मामले: (1) भैरवजी Bridge, बाँसवाड़ा — rescinded,
+वसूली शून्य। (2) Kotada Road, उदयपुर — rescinded, differential cost unrecovered।
+(3) Gannon Dunkerlay — established company, contract rescinded, department
+entitlement unexercised, company walked free। Rescission एक कागज़ी खतरा बन गया —
+असली financial liability नहीं। ठेकेदार के लिए contract तोड़ने का कोई दाम नहीं।</a:t>
             </a:r>
           </a:p>
         </p:txBody>
@@ -5689,10 +5692,16 @@
                   <a:srgbClr val="AAB9C3"/>
                 </a:solidFill>
               </a:rPr>
-              <a:t>1. Statutory Delegation Order (Gazette Notification). 2. Citizen Transparency.
-3. DSC must stay with officer — not at computer centre. 4. Mandatory
-comprehensive training. 5. Portal bugs fixed with deadline. 6. 24x7 dedicated
-helpline. 7. Independent Monitoring Committee.</a:t>
+              <a:t>Approximately 200 contracts have been rescinded for incomplete execution in
+Rajasthan PWD. Risk-and-cost tenders were invited. But there is no regular
+monitoring of recovery against defaulters. Three named examples: (1) Bhairavji
+Bridge, Banswara — rescinded, risk-and-cost tender floated, zero recovery from
+contractor. (2) Kotada Road, Udaipur — rescinded, differential cost unrecovered.
+(3) Gannon Dunkerlay &amp; Company — established firm, contract rescinded,
+substantial department entitlement unexercised, company walked free. Pattern:
+rescission is a paper threat, not a real financial liability. Mandatory reforms:
+centralised risk-and-cost recovery register in IFMS, mandatory blacklisting
+until full recovery, named-case CAG audit and ACB investigation.</a:t>
             </a:r>
           </a:p>
         </p:txBody>
@@ -5769,7 +5778,7 @@
                   <a:srgbClr val="64788C"/>
                 </a:solidFill>
               </a:rPr>
-              <a:t>14 / 15</a:t>
+              <a:t>14 / 16</a:t>
             </a:r>
           </a:p>
         </p:txBody>
@@ -5958,7 +5967,7 @@
                   <a:srgbClr val="FFFFFF"/>
                 </a:solidFill>
               </a:rPr>
-              <a:t>Ch.10</a:t>
+              <a:t>Ch.9</a:t>
             </a:r>
           </a:p>
         </p:txBody>
@@ -5992,7 +6001,7 @@
                   <a:srgbClr val="FFFFFF"/>
                 </a:solidFill>
               </a:rPr>
-              <a:t>चौथे स्तंभ से आह्वान — 10 मीडिया माँगें</a:t>
+              <a:t>सात तत्काल माँगें</a:t>
             </a:r>
           </a:p>
         </p:txBody>
@@ -6026,7 +6035,7 @@
                   <a:srgbClr val="A0C8DC"/>
                 </a:solidFill>
               </a:rPr>
-              <a:t>Call to the Fourth Estate — 10 Media Demands</a:t>
+              <a:t>Seven Immediate Demands</a:t>
             </a:r>
           </a:p>
         </p:txBody>
@@ -6103,9 +6112,10 @@
                   <a:srgbClr val="DCE1E6"/>
                 </a:solidFill>
               </a:rPr>
-              <a:t>1.Delegation RTI 2.AS/FS Backdating CAG Audit 3.IP Login Audit→ACB 4.XEN Login
-Sting 5.DSC Location Check 6.Live Helpline Test 7.Morphed Photo Expose 8.Public
-Audit माँग 9.One Operator Three Roles Expose 10.Public Monitoring अनिवार्य।</a:t>
+              <a:t>1. Statutory Delegation Order (Gazette Notification)। 2. नागरिक पारदर्शिता। 3.
+DSC अधिकारी के पास — operator के नहीं। 4. अनिवार्य Training। 5. Portal bugs
+deadline के साथ fix हों। 6. 24×7 Dedicated Helpline। 7. Independent Monitoring
+Committee।</a:t>
             </a:r>
           </a:p>
         </p:txBody>
@@ -6139,10 +6149,10 @@
                   <a:srgbClr val="AAB9C3"/>
                 </a:solidFill>
               </a:rPr>
-              <a:t>1.RTI on delegation circular 2.AS/FS backdating CAG audit 3.IP Login Audit→ACB
-4.XEN Login sting 5.DSC location check 6.Live helpline call test 7.Morphed photo
-expose 8.Public audit demand 9.One operator three roles expose 10.Public
-monitoring mandate.</a:t>
+              <a:t>1. Statutory Delegation Order (Gazette Notification). 2. Citizen Transparency.
+3. DSC must stay with officer — not at computer centre. 4. Mandatory
+comprehensive training. 5. Portal bugs fixed with deadline. 6. 24x7 dedicated
+helpline. 7. Independent Monitoring Committee.</a:t>
             </a:r>
           </a:p>
         </p:txBody>
@@ -6219,7 +6229,7 @@
                   <a:srgbClr val="64788C"/>
                 </a:solidFill>
               </a:rPr>
-              <a:t>15 / 15</a:t>
+              <a:t>15 / 16</a:t>
             </a:r>
           </a:p>
         </p:txBody>
@@ -6233,6 +6243,456 @@
 </file>
 
 <file path=ppt/slides/slide16.xml><?xml version="1.0" encoding="utf-8"?>
+<p:sld xmlns:a="http://schemas.openxmlformats.org/drawingml/2006/main" xmlns:p="http://schemas.openxmlformats.org/presentationml/2006/main" xmlns:r="http://schemas.openxmlformats.org/officeDocument/2006/relationships">
+  <p:cSld>
+    <p:bg>
+      <p:bgPr>
+        <a:solidFill>
+          <a:srgbClr val="0F2A3E"/>
+        </a:solidFill>
+        <a:effectLst/>
+      </p:bgPr>
+    </p:bg>
+    <p:spTree>
+      <p:nvGrpSpPr>
+        <p:cNvPr id="1" name=""/>
+        <p:cNvGrpSpPr/>
+        <p:nvPr/>
+      </p:nvGrpSpPr>
+      <p:grpSpPr/>
+      <p:sp>
+        <p:nvSpPr>
+          <p:cNvPr id="2" name="Rectangle 1"/>
+          <p:cNvSpPr/>
+          <p:nvPr/>
+        </p:nvSpPr>
+        <p:spPr>
+          <a:xfrm>
+            <a:off x="0" y="0"/>
+            <a:ext cx="12188952" cy="64008"/>
+          </a:xfrm>
+          <a:prstGeom prst="rect">
+            <a:avLst/>
+          </a:prstGeom>
+          <a:solidFill>
+            <a:srgbClr val="0D9488"/>
+          </a:solidFill>
+          <a:ln>
+            <a:noFill/>
+          </a:ln>
+        </p:spPr>
+        <p:style>
+          <a:lnRef idx="1">
+            <a:schemeClr val="accent1"/>
+          </a:lnRef>
+          <a:fillRef idx="3">
+            <a:schemeClr val="accent1"/>
+          </a:fillRef>
+          <a:effectRef idx="2">
+            <a:schemeClr val="accent1"/>
+          </a:effectRef>
+          <a:fontRef idx="minor">
+            <a:schemeClr val="lt1"/>
+          </a:fontRef>
+        </p:style>
+        <p:txBody>
+          <a:bodyPr rtlCol="0" anchor="ctr"/>
+          <a:lstStyle/>
+          <a:p>
+            <a:pPr algn="ctr"/>
+          </a:p>
+        </p:txBody>
+      </p:sp>
+      <p:sp>
+        <p:nvSpPr>
+          <p:cNvPr id="3" name="Rectangle 2"/>
+          <p:cNvSpPr/>
+          <p:nvPr/>
+        </p:nvSpPr>
+        <p:spPr>
+          <a:xfrm>
+            <a:off x="0" y="6793992"/>
+            <a:ext cx="12188952" cy="64008"/>
+          </a:xfrm>
+          <a:prstGeom prst="rect">
+            <a:avLst/>
+          </a:prstGeom>
+          <a:solidFill>
+            <a:srgbClr val="0D9488"/>
+          </a:solidFill>
+          <a:ln>
+            <a:noFill/>
+          </a:ln>
+        </p:spPr>
+        <p:style>
+          <a:lnRef idx="1">
+            <a:schemeClr val="accent1"/>
+          </a:lnRef>
+          <a:fillRef idx="3">
+            <a:schemeClr val="accent1"/>
+          </a:fillRef>
+          <a:effectRef idx="2">
+            <a:schemeClr val="accent1"/>
+          </a:effectRef>
+          <a:fontRef idx="minor">
+            <a:schemeClr val="lt1"/>
+          </a:fontRef>
+        </p:style>
+        <p:txBody>
+          <a:bodyPr rtlCol="0" anchor="ctr"/>
+          <a:lstStyle/>
+          <a:p>
+            <a:pPr algn="ctr"/>
+          </a:p>
+        </p:txBody>
+      </p:sp>
+      <p:sp>
+        <p:nvSpPr>
+          <p:cNvPr id="4" name="Rectangle 3"/>
+          <p:cNvSpPr/>
+          <p:nvPr/>
+        </p:nvSpPr>
+        <p:spPr>
+          <a:xfrm>
+            <a:off x="274320" y="164592"/>
+            <a:ext cx="1005840" cy="411480"/>
+          </a:xfrm>
+          <a:prstGeom prst="rect">
+            <a:avLst/>
+          </a:prstGeom>
+          <a:solidFill>
+            <a:srgbClr val="0D9488"/>
+          </a:solidFill>
+          <a:ln>
+            <a:noFill/>
+          </a:ln>
+        </p:spPr>
+        <p:style>
+          <a:lnRef idx="1">
+            <a:schemeClr val="accent1"/>
+          </a:lnRef>
+          <a:fillRef idx="3">
+            <a:schemeClr val="accent1"/>
+          </a:fillRef>
+          <a:effectRef idx="2">
+            <a:schemeClr val="accent1"/>
+          </a:effectRef>
+          <a:fontRef idx="minor">
+            <a:schemeClr val="lt1"/>
+          </a:fontRef>
+        </p:style>
+        <p:txBody>
+          <a:bodyPr rtlCol="0" anchor="ctr"/>
+          <a:lstStyle/>
+          <a:p>
+            <a:pPr algn="ctr"/>
+          </a:p>
+        </p:txBody>
+      </p:sp>
+      <p:sp>
+        <p:nvSpPr>
+          <p:cNvPr id="5" name="TextBox 4"/>
+          <p:cNvSpPr txBox="1"/>
+          <p:nvPr/>
+        </p:nvSpPr>
+        <p:spPr>
+          <a:xfrm>
+            <a:off x="274320" y="164592"/>
+            <a:ext cx="1005840" cy="411480"/>
+          </a:xfrm>
+          <a:prstGeom prst="rect">
+            <a:avLst/>
+          </a:prstGeom>
+          <a:noFill/>
+        </p:spPr>
+        <p:txBody>
+          <a:bodyPr wrap="square">
+            <a:spAutoFit/>
+          </a:bodyPr>
+          <a:lstStyle/>
+          <a:p>
+            <a:pPr algn="ctr"/>
+            <a:r>
+              <a:rPr sz="1100" b="1" i="0">
+                <a:solidFill>
+                  <a:srgbClr val="FFFFFF"/>
+                </a:solidFill>
+              </a:rPr>
+              <a:t>Ch.10</a:t>
+            </a:r>
+          </a:p>
+        </p:txBody>
+      </p:sp>
+      <p:sp>
+        <p:nvSpPr>
+          <p:cNvPr id="6" name="TextBox 5"/>
+          <p:cNvSpPr txBox="1"/>
+          <p:nvPr/>
+        </p:nvSpPr>
+        <p:spPr>
+          <a:xfrm>
+            <a:off x="1417320" y="137160"/>
+            <a:ext cx="10424160" cy="548640"/>
+          </a:xfrm>
+          <a:prstGeom prst="rect">
+            <a:avLst/>
+          </a:prstGeom>
+          <a:noFill/>
+        </p:spPr>
+        <p:txBody>
+          <a:bodyPr wrap="square">
+            <a:spAutoFit/>
+          </a:bodyPr>
+          <a:lstStyle/>
+          <a:p>
+            <a:pPr algn="l"/>
+            <a:r>
+              <a:rPr sz="1800" b="1" i="0">
+                <a:solidFill>
+                  <a:srgbClr val="FFFFFF"/>
+                </a:solidFill>
+              </a:rPr>
+              <a:t>चौथे स्तंभ से आह्वान — 10 मीडिया माँगें</a:t>
+            </a:r>
+          </a:p>
+        </p:txBody>
+      </p:sp>
+      <p:sp>
+        <p:nvSpPr>
+          <p:cNvPr id="7" name="TextBox 6"/>
+          <p:cNvSpPr txBox="1"/>
+          <p:nvPr/>
+        </p:nvSpPr>
+        <p:spPr>
+          <a:xfrm>
+            <a:off x="1417320" y="658368"/>
+            <a:ext cx="10424160" cy="411480"/>
+          </a:xfrm>
+          <a:prstGeom prst="rect">
+            <a:avLst/>
+          </a:prstGeom>
+          <a:noFill/>
+        </p:spPr>
+        <p:txBody>
+          <a:bodyPr wrap="square">
+            <a:spAutoFit/>
+          </a:bodyPr>
+          <a:lstStyle/>
+          <a:p>
+            <a:pPr algn="l"/>
+            <a:r>
+              <a:rPr sz="1200" b="1" i="0">
+                <a:solidFill>
+                  <a:srgbClr val="A0C8DC"/>
+                </a:solidFill>
+              </a:rPr>
+              <a:t>Call to the Fourth Estate — 10 Media Demands</a:t>
+            </a:r>
+          </a:p>
+        </p:txBody>
+      </p:sp>
+      <p:sp>
+        <p:nvSpPr>
+          <p:cNvPr id="8" name="Rectangle 7"/>
+          <p:cNvSpPr/>
+          <p:nvPr/>
+        </p:nvSpPr>
+        <p:spPr>
+          <a:xfrm>
+            <a:off x="274320" y="1170432"/>
+            <a:ext cx="11640312" cy="27432"/>
+          </a:xfrm>
+          <a:prstGeom prst="rect">
+            <a:avLst/>
+          </a:prstGeom>
+          <a:solidFill>
+            <a:srgbClr val="0D9488"/>
+          </a:solidFill>
+          <a:ln>
+            <a:noFill/>
+          </a:ln>
+        </p:spPr>
+        <p:style>
+          <a:lnRef idx="1">
+            <a:schemeClr val="accent1"/>
+          </a:lnRef>
+          <a:fillRef idx="3">
+            <a:schemeClr val="accent1"/>
+          </a:fillRef>
+          <a:effectRef idx="2">
+            <a:schemeClr val="accent1"/>
+          </a:effectRef>
+          <a:fontRef idx="minor">
+            <a:schemeClr val="lt1"/>
+          </a:fontRef>
+        </p:style>
+        <p:txBody>
+          <a:bodyPr rtlCol="0" anchor="ctr"/>
+          <a:lstStyle/>
+          <a:p>
+            <a:pPr algn="ctr"/>
+          </a:p>
+        </p:txBody>
+      </p:sp>
+      <p:sp>
+        <p:nvSpPr>
+          <p:cNvPr id="9" name="TextBox 8"/>
+          <p:cNvSpPr txBox="1"/>
+          <p:nvPr/>
+        </p:nvSpPr>
+        <p:spPr>
+          <a:xfrm>
+            <a:off x="274320" y="1280160"/>
+            <a:ext cx="5669280" cy="5029200"/>
+          </a:xfrm>
+          <a:prstGeom prst="rect">
+            <a:avLst/>
+          </a:prstGeom>
+          <a:noFill/>
+        </p:spPr>
+        <p:txBody>
+          <a:bodyPr wrap="square">
+            <a:spAutoFit/>
+          </a:bodyPr>
+          <a:lstStyle/>
+          <a:p>
+            <a:pPr algn="l"/>
+            <a:r>
+              <a:rPr sz="1100" b="0" i="0">
+                <a:solidFill>
+                  <a:srgbClr val="DCE1E6"/>
+                </a:solidFill>
+              </a:rPr>
+              <a:t>1.Delegation RTI 2.AS/FS Backdating CAG Audit 3.IP Login Audit→ACB 4.XEN Login
+Sting 5.DSC Location Check 6.Live Helpline Test 7.Morphed Photo Expose 8.Public
+Audit माँग 9.One Operator Three Roles Expose 10.Public Monitoring अनिवार्य।</a:t>
+            </a:r>
+          </a:p>
+        </p:txBody>
+      </p:sp>
+      <p:sp>
+        <p:nvSpPr>
+          <p:cNvPr id="10" name="TextBox 9"/>
+          <p:cNvSpPr txBox="1"/>
+          <p:nvPr/>
+        </p:nvSpPr>
+        <p:spPr>
+          <a:xfrm>
+            <a:off x="6217920" y="1280160"/>
+            <a:ext cx="5669280" cy="5029200"/>
+          </a:xfrm>
+          <a:prstGeom prst="rect">
+            <a:avLst/>
+          </a:prstGeom>
+          <a:noFill/>
+        </p:spPr>
+        <p:txBody>
+          <a:bodyPr wrap="square">
+            <a:spAutoFit/>
+          </a:bodyPr>
+          <a:lstStyle/>
+          <a:p>
+            <a:pPr algn="l"/>
+            <a:r>
+              <a:rPr sz="1050" b="0" i="1">
+                <a:solidFill>
+                  <a:srgbClr val="AAB9C3"/>
+                </a:solidFill>
+              </a:rPr>
+              <a:t>1.RTI on delegation circular 2.AS/FS backdating CAG audit 3.IP Login Audit→ACB
+4.XEN Login sting 5.DSC location check 6.Live helpline call test 7.Morphed photo
+expose 8.Public audit demand 9.One operator three roles expose 10.Public
+monitoring mandate.</a:t>
+            </a:r>
+          </a:p>
+        </p:txBody>
+      </p:sp>
+      <p:sp>
+        <p:nvSpPr>
+          <p:cNvPr id="11" name="Rectangle 10"/>
+          <p:cNvSpPr/>
+          <p:nvPr/>
+        </p:nvSpPr>
+        <p:spPr>
+          <a:xfrm>
+            <a:off x="6035040" y="1280160"/>
+            <a:ext cx="27432" cy="5029200"/>
+          </a:xfrm>
+          <a:prstGeom prst="rect">
+            <a:avLst/>
+          </a:prstGeom>
+          <a:solidFill>
+            <a:srgbClr val="0D9488"/>
+          </a:solidFill>
+          <a:ln>
+            <a:noFill/>
+          </a:ln>
+        </p:spPr>
+        <p:style>
+          <a:lnRef idx="1">
+            <a:schemeClr val="accent1"/>
+          </a:lnRef>
+          <a:fillRef idx="3">
+            <a:schemeClr val="accent1"/>
+          </a:fillRef>
+          <a:effectRef idx="2">
+            <a:schemeClr val="accent1"/>
+          </a:effectRef>
+          <a:fontRef idx="minor">
+            <a:schemeClr val="lt1"/>
+          </a:fontRef>
+        </p:style>
+        <p:txBody>
+          <a:bodyPr rtlCol="0" anchor="ctr"/>
+          <a:lstStyle/>
+          <a:p>
+            <a:pPr algn="ctr"/>
+          </a:p>
+        </p:txBody>
+      </p:sp>
+      <p:sp>
+        <p:nvSpPr>
+          <p:cNvPr id="12" name="TextBox 11"/>
+          <p:cNvSpPr txBox="1"/>
+          <p:nvPr/>
+        </p:nvSpPr>
+        <p:spPr>
+          <a:xfrm>
+            <a:off x="10972800" y="6492240"/>
+            <a:ext cx="1097280" cy="274320"/>
+          </a:xfrm>
+          <a:prstGeom prst="rect">
+            <a:avLst/>
+          </a:prstGeom>
+          <a:noFill/>
+        </p:spPr>
+        <p:txBody>
+          <a:bodyPr wrap="square">
+            <a:spAutoFit/>
+          </a:bodyPr>
+          <a:lstStyle/>
+          <a:p>
+            <a:pPr algn="r"/>
+            <a:r>
+              <a:rPr sz="800" b="0" i="0">
+                <a:solidFill>
+                  <a:srgbClr val="64788C"/>
+                </a:solidFill>
+              </a:rPr>
+              <a:t>16 / 16</a:t>
+            </a:r>
+          </a:p>
+        </p:txBody>
+      </p:sp>
+    </p:spTree>
+  </p:cSld>
+  <p:clrMapOvr>
+    <a:masterClrMapping/>
+  </p:clrMapOvr>
+</p:sld>
+</file>
+
+<file path=ppt/slides/slide17.xml><?xml version="1.0" encoding="utf-8"?>
 <p:sld xmlns:a="http://schemas.openxmlformats.org/drawingml/2006/main" xmlns:p="http://schemas.openxmlformats.org/presentationml/2006/main" xmlns:r="http://schemas.openxmlformats.org/officeDocument/2006/relationships">
   <p:cSld>
     <p:bg>
@@ -8040,7 +8500,7 @@
                   <a:srgbClr val="64788C"/>
                 </a:solidFill>
               </a:rPr>
-              <a:t>3 / 15</a:t>
+              <a:t>3 / 16</a:t>
             </a:r>
           </a:p>
         </p:txBody>
@@ -8489,7 +8949,7 @@
                   <a:srgbClr val="64788C"/>
                 </a:solidFill>
               </a:rPr>
-              <a:t>4 / 15</a:t>
+              <a:t>4 / 16</a:t>
             </a:r>
           </a:p>
         </p:txBody>
@@ -8939,7 +9399,7 @@
                   <a:srgbClr val="64788C"/>
                 </a:solidFill>
               </a:rPr>
-              <a:t>5 / 15</a:t>
+              <a:t>5 / 16</a:t>
             </a:r>
           </a:p>
         </p:txBody>
@@ -9389,7 +9849,7 @@
                   <a:srgbClr val="64788C"/>
                 </a:solidFill>
               </a:rPr>
-              <a:t>6 / 15</a:t>
+              <a:t>6 / 16</a:t>
             </a:r>
           </a:p>
         </p:txBody>
@@ -9841,7 +10301,7 @@
                   <a:srgbClr val="64788C"/>
                 </a:solidFill>
               </a:rPr>
-              <a:t>7 / 15</a:t>
+              <a:t>7 / 16</a:t>
             </a:r>
           </a:p>
         </p:txBody>
@@ -10290,7 +10750,7 @@
                   <a:srgbClr val="64788C"/>
                 </a:solidFill>
               </a:rPr>
-              <a:t>8 / 15</a:t>
+              <a:t>8 / 16</a:t>
             </a:r>
           </a:p>
         </p:txBody>
@@ -10740,7 +11200,7 @@
                   <a:srgbClr val="64788C"/>
                 </a:solidFill>
               </a:rPr>
-              <a:t>9 / 15</a:t>
+              <a:t>9 / 16</a:t>
             </a:r>
           </a:p>
         </p:txBody>

--- a/artifacts/rajasthan-ifms-crisis/IFMS-Rajasthan-Investigation.pptx
+++ b/artifacts/rajasthan-ifms-crisis/IFMS-Rajasthan-Investigation.pptx
@@ -22,6 +22,7 @@
     <p:sldId id="270" r:id="rId21"/>
     <p:sldId id="271" r:id="rId22"/>
     <p:sldId id="272" r:id="rId23"/>
+    <p:sldId id="273" r:id="rId24"/>
   </p:sldIdLst>
   <p:sldSz cx="12188952" cy="6858000" type="screen4x3"/>
   <p:notesSz cx="6858000" cy="9144000"/>
@@ -3969,7 +3970,7 @@
                   <a:srgbClr val="64788C"/>
                 </a:solidFill>
               </a:rPr>
-              <a:t>10 / 16</a:t>
+              <a:t>10 / 17</a:t>
             </a:r>
           </a:p>
         </p:txBody>
@@ -4419,7 +4420,7 @@
                   <a:srgbClr val="64788C"/>
                 </a:solidFill>
               </a:rPr>
-              <a:t>11 / 16</a:t>
+              <a:t>11 / 17</a:t>
             </a:r>
           </a:p>
         </p:txBody>
@@ -4869,7 +4870,7 @@
                   <a:srgbClr val="64788C"/>
                 </a:solidFill>
               </a:rPr>
-              <a:t>12 / 16</a:t>
+              <a:t>12 / 17</a:t>
             </a:r>
           </a:p>
         </p:txBody>
@@ -5319,7 +5320,7 @@
                   <a:srgbClr val="64788C"/>
                 </a:solidFill>
               </a:rPr>
-              <a:t>13 / 16</a:t>
+              <a:t>13 / 17</a:t>
             </a:r>
           </a:p>
         </p:txBody>
@@ -5653,12 +5654,9 @@
                   <a:srgbClr val="DCE1E6"/>
                 </a:solidFill>
               </a:rPr>
-              <a:t>~200 contracts rescinded — Risk and Cost tenders floated — लेकिन recovery
-monitor नहीं होती। तीन नामित मामले: (1) भैरवजी Bridge, बाँसवाड़ा — rescinded,
-वसूली शून्य। (2) Kotada Road, उदयपुर — rescinded, differential cost unrecovered।
-(3) Gannon Dunkerlay — established company, contract rescinded, department
-entitlement unexercised, company walked free। Rescission एक कागज़ी खतरा बन गया —
-असली financial liability नहीं। ठेकेदार के लिए contract तोड़ने का कोई दाम नहीं।</a:t>
+              <a:t>~200 रद्द अनुबंध — Risk and Cost tenders — recovery monitoring शून्य। भैरवजी
+Bridge बाँसवाड़ा, Kotada Road उदयपुर, Gannon Dunkerlay — तीनों में वसूली शून्य।
+Rescission केवल कागज़ी खतरा। Blacklist enforce नहीं।</a:t>
             </a:r>
           </a:p>
         </p:txBody>
@@ -5692,16 +5690,11 @@
                   <a:srgbClr val="AAB9C3"/>
                 </a:solidFill>
               </a:rPr>
-              <a:t>Approximately 200 contracts have been rescinded for incomplete execution in
-Rajasthan PWD. Risk-and-cost tenders were invited. But there is no regular
-monitoring of recovery against defaulters. Three named examples: (1) Bhairavji
-Bridge, Banswara — rescinded, risk-and-cost tender floated, zero recovery from
-contractor. (2) Kotada Road, Udaipur — rescinded, differential cost unrecovered.
-(3) Gannon Dunkerlay &amp; Company — established firm, contract rescinded,
-substantial department entitlement unexercised, company walked free. Pattern:
-rescission is a paper threat, not a real financial liability. Mandatory reforms:
-centralised risk-and-cost recovery register in IFMS, mandatory blacklisting
-until full recovery, named-case CAG audit and ACB investigation.</a:t>
+              <a:t>Three named cases: Bhairavji Bridge Banswara (rescinded, nil recovery), Kotada
+Road Udaipur (rescinded, nil recovery), Gannon Dunkerlay &amp; Co (rescinded,
+substantial dues unexercised — company walked free). State-wide pattern: ~200
+rescissions, zero systematic recovery monitoring. Rescission is a paper threat.
+No blacklist enforced. Taxpayer pays twice.</a:t>
             </a:r>
           </a:p>
         </p:txBody>
@@ -5778,7 +5771,7 @@
                   <a:srgbClr val="64788C"/>
                 </a:solidFill>
               </a:rPr>
-              <a:t>14 / 16</a:t>
+              <a:t>14 / 17</a:t>
             </a:r>
           </a:p>
         </p:txBody>
@@ -5967,7 +5960,7 @@
                   <a:srgbClr val="FFFFFF"/>
                 </a:solidFill>
               </a:rPr>
-              <a:t>Ch.9</a:t>
+              <a:t>Ch.8C</a:t>
             </a:r>
           </a:p>
         </p:txBody>
@@ -6001,7 +5994,7 @@
                   <a:srgbClr val="FFFFFF"/>
                 </a:solidFill>
               </a:rPr>
-              <a:t>सात तत्काल माँगें</a:t>
+              <a:t>Recovery Portal क्यों नहीं? Legal Pursuit क्यों नहीं? — Impunity का Architecture</a:t>
             </a:r>
           </a:p>
         </p:txBody>
@@ -6035,7 +6028,7 @@
                   <a:srgbClr val="A0C8DC"/>
                 </a:solidFill>
               </a:rPr>
-              <a:t>Seven Immediate Demands</a:t>
+              <a:t>Why No Digitised Recovery Portal? Why No Legal Pursuit? — Architecture of Impunity</a:t>
             </a:r>
           </a:p>
         </p:txBody>
@@ -6112,10 +6105,14 @@
                   <a:srgbClr val="DCE1E6"/>
                 </a:solidFill>
               </a:rPr>
-              <a:t>1. Statutory Delegation Order (Gazette Notification)। 2. नागरिक पारदर्शिता। 3.
-DSC अधिकारी के पास — operator के नहीं। 4. अनिवार्य Training। 5. Portal bugs
-deadline के साथ fix हों। 6. 24×7 Dedicated Helpline। 7. Independent Monitoring
-Committee।</a:t>
+              <a:t>दो अनुत्तरित प्रश्न पूरे तंत्र को उघाड़ते हैं। प्रश्न 1: Digitised Recovery
+Portal क्यों नहीं? 15 वर्षों में नहीं बना — क्योंकि यह portal हर non-recovery को
+visible और attributable बना देता। प्रश्न 2: Legal pursuit और monitoring क्यों
+नहीं? Recovery करना department का legal obligation है। दो उत्तर: A) Gross
+Negligence — governance पतन। B) Complicity — जिस हाथ ने payments किए वही
+recovery रोक रहा है। पाँच-बिंदु framework: 90 दिन में Recovery Portal; 30 दिन
+में legal notice; Litigation Register; Limitation Period alerts; Same-officer
+overlap = automatic ACB referral।</a:t>
             </a:r>
           </a:p>
         </p:txBody>
@@ -6149,10 +6146,19 @@
                   <a:srgbClr val="AAB9C3"/>
                 </a:solidFill>
               </a:rPr>
-              <a:t>1. Statutory Delegation Order (Gazette Notification). 2. Citizen Transparency.
-3. DSC must stay with officer — not at computer centre. 4. Mandatory
-comprehensive training. 5. Portal bugs fixed with deadline. 6. 24x7 dedicated
-helpline. 7. Independent Monitoring Committee.</a:t>
+              <a:t>Two unanswered questions expose the system. Q1: Why no Digitised Recovery
+Portal? Government has e-Procurement, IFMS, PayManager, NIC capacity. A portal
+could be built in 90 days on IFMS infrastructure — showing every rescinded
+contract, recoverable amount, officer responsible, legal notice status,
+limitation period alerts, and public access. It does not exist because it would
+make every non-recovery visible and attributable to a named officer. Q2: Why no
+legal pursuit or monitoring? Recovery is a legal obligation — not optional. Two
+explanations: A) Gross Negligence — management systems absent. B) Complicity —
+the same officer who processed and paid the contract refuses to initiate
+recovery. That overlap should be automatic ACB referral. Five-point framework:
+Recovery Portal in 90 days; mandatory legal notice in 30 days of rescission;
+litigation register monthly updated; limitation period automatic alerts; same-
+officer overlap triggers ACB referral.</a:t>
             </a:r>
           </a:p>
         </p:txBody>
@@ -6229,7 +6235,7 @@
                   <a:srgbClr val="64788C"/>
                 </a:solidFill>
               </a:rPr>
-              <a:t>15 / 16</a:t>
+              <a:t>15 / 17</a:t>
             </a:r>
           </a:p>
         </p:txBody>
@@ -6418,7 +6424,7 @@
                   <a:srgbClr val="FFFFFF"/>
                 </a:solidFill>
               </a:rPr>
-              <a:t>Ch.10</a:t>
+              <a:t>Ch.9</a:t>
             </a:r>
           </a:p>
         </p:txBody>
@@ -6452,7 +6458,7 @@
                   <a:srgbClr val="FFFFFF"/>
                 </a:solidFill>
               </a:rPr>
-              <a:t>चौथे स्तंभ से आह्वान — 10 मीडिया माँगें</a:t>
+              <a:t>सात तत्काल माँगें</a:t>
             </a:r>
           </a:p>
         </p:txBody>
@@ -6486,7 +6492,7 @@
                   <a:srgbClr val="A0C8DC"/>
                 </a:solidFill>
               </a:rPr>
-              <a:t>Call to the Fourth Estate — 10 Media Demands</a:t>
+              <a:t>Seven Immediate Demands</a:t>
             </a:r>
           </a:p>
         </p:txBody>
@@ -6563,9 +6569,10 @@
                   <a:srgbClr val="DCE1E6"/>
                 </a:solidFill>
               </a:rPr>
-              <a:t>1.Delegation RTI 2.AS/FS Backdating CAG Audit 3.IP Login Audit→ACB 4.XEN Login
-Sting 5.DSC Location Check 6.Live Helpline Test 7.Morphed Photo Expose 8.Public
-Audit माँग 9.One Operator Three Roles Expose 10.Public Monitoring अनिवार्य।</a:t>
+              <a:t>1. Statutory Delegation Order (Gazette Notification)। 2. नागरिक पारदर्शिता। 3.
+DSC अधिकारी के पास — operator के नहीं। 4. अनिवार्य Training। 5. Portal bugs
+deadline के साथ fix हों। 6. 24×7 Dedicated Helpline। 7. Independent Monitoring
+Committee।</a:t>
             </a:r>
           </a:p>
         </p:txBody>
@@ -6599,10 +6606,10 @@
                   <a:srgbClr val="AAB9C3"/>
                 </a:solidFill>
               </a:rPr>
-              <a:t>1.RTI on delegation circular 2.AS/FS backdating CAG audit 3.IP Login Audit→ACB
-4.XEN Login sting 5.DSC location check 6.Live helpline call test 7.Morphed photo
-expose 8.Public audit demand 9.One operator three roles expose 10.Public
-monitoring mandate.</a:t>
+              <a:t>1. Statutory Delegation Order (Gazette Notification). 2. Citizen Transparency.
+3. DSC must stay with officer — not at computer centre. 4. Mandatory
+comprehensive training. 5. Portal bugs fixed with deadline. 6. 24x7 dedicated
+helpline. 7. Independent Monitoring Committee.</a:t>
             </a:r>
           </a:p>
         </p:txBody>
@@ -6679,7 +6686,7 @@
                   <a:srgbClr val="64788C"/>
                 </a:solidFill>
               </a:rPr>
-              <a:t>16 / 16</a:t>
+              <a:t>16 / 17</a:t>
             </a:r>
           </a:p>
         </p:txBody>
@@ -6693,6 +6700,456 @@
 </file>
 
 <file path=ppt/slides/slide17.xml><?xml version="1.0" encoding="utf-8"?>
+<p:sld xmlns:a="http://schemas.openxmlformats.org/drawingml/2006/main" xmlns:p="http://schemas.openxmlformats.org/presentationml/2006/main" xmlns:r="http://schemas.openxmlformats.org/officeDocument/2006/relationships">
+  <p:cSld>
+    <p:bg>
+      <p:bgPr>
+        <a:solidFill>
+          <a:srgbClr val="1C1814"/>
+        </a:solidFill>
+        <a:effectLst/>
+      </p:bgPr>
+    </p:bg>
+    <p:spTree>
+      <p:nvGrpSpPr>
+        <p:cNvPr id="1" name=""/>
+        <p:cNvGrpSpPr/>
+        <p:nvPr/>
+      </p:nvGrpSpPr>
+      <p:grpSpPr/>
+      <p:sp>
+        <p:nvSpPr>
+          <p:cNvPr id="2" name="Rectangle 1"/>
+          <p:cNvSpPr/>
+          <p:nvPr/>
+        </p:nvSpPr>
+        <p:spPr>
+          <a:xfrm>
+            <a:off x="0" y="0"/>
+            <a:ext cx="12188952" cy="64008"/>
+          </a:xfrm>
+          <a:prstGeom prst="rect">
+            <a:avLst/>
+          </a:prstGeom>
+          <a:solidFill>
+            <a:srgbClr val="0D9488"/>
+          </a:solidFill>
+          <a:ln>
+            <a:noFill/>
+          </a:ln>
+        </p:spPr>
+        <p:style>
+          <a:lnRef idx="1">
+            <a:schemeClr val="accent1"/>
+          </a:lnRef>
+          <a:fillRef idx="3">
+            <a:schemeClr val="accent1"/>
+          </a:fillRef>
+          <a:effectRef idx="2">
+            <a:schemeClr val="accent1"/>
+          </a:effectRef>
+          <a:fontRef idx="minor">
+            <a:schemeClr val="lt1"/>
+          </a:fontRef>
+        </p:style>
+        <p:txBody>
+          <a:bodyPr rtlCol="0" anchor="ctr"/>
+          <a:lstStyle/>
+          <a:p>
+            <a:pPr algn="ctr"/>
+          </a:p>
+        </p:txBody>
+      </p:sp>
+      <p:sp>
+        <p:nvSpPr>
+          <p:cNvPr id="3" name="Rectangle 2"/>
+          <p:cNvSpPr/>
+          <p:nvPr/>
+        </p:nvSpPr>
+        <p:spPr>
+          <a:xfrm>
+            <a:off x="0" y="6793992"/>
+            <a:ext cx="12188952" cy="64008"/>
+          </a:xfrm>
+          <a:prstGeom prst="rect">
+            <a:avLst/>
+          </a:prstGeom>
+          <a:solidFill>
+            <a:srgbClr val="0D9488"/>
+          </a:solidFill>
+          <a:ln>
+            <a:noFill/>
+          </a:ln>
+        </p:spPr>
+        <p:style>
+          <a:lnRef idx="1">
+            <a:schemeClr val="accent1"/>
+          </a:lnRef>
+          <a:fillRef idx="3">
+            <a:schemeClr val="accent1"/>
+          </a:fillRef>
+          <a:effectRef idx="2">
+            <a:schemeClr val="accent1"/>
+          </a:effectRef>
+          <a:fontRef idx="minor">
+            <a:schemeClr val="lt1"/>
+          </a:fontRef>
+        </p:style>
+        <p:txBody>
+          <a:bodyPr rtlCol="0" anchor="ctr"/>
+          <a:lstStyle/>
+          <a:p>
+            <a:pPr algn="ctr"/>
+          </a:p>
+        </p:txBody>
+      </p:sp>
+      <p:sp>
+        <p:nvSpPr>
+          <p:cNvPr id="4" name="Rectangle 3"/>
+          <p:cNvSpPr/>
+          <p:nvPr/>
+        </p:nvSpPr>
+        <p:spPr>
+          <a:xfrm>
+            <a:off x="274320" y="164592"/>
+            <a:ext cx="1005840" cy="411480"/>
+          </a:xfrm>
+          <a:prstGeom prst="rect">
+            <a:avLst/>
+          </a:prstGeom>
+          <a:solidFill>
+            <a:srgbClr val="0D9488"/>
+          </a:solidFill>
+          <a:ln>
+            <a:noFill/>
+          </a:ln>
+        </p:spPr>
+        <p:style>
+          <a:lnRef idx="1">
+            <a:schemeClr val="accent1"/>
+          </a:lnRef>
+          <a:fillRef idx="3">
+            <a:schemeClr val="accent1"/>
+          </a:fillRef>
+          <a:effectRef idx="2">
+            <a:schemeClr val="accent1"/>
+          </a:effectRef>
+          <a:fontRef idx="minor">
+            <a:schemeClr val="lt1"/>
+          </a:fontRef>
+        </p:style>
+        <p:txBody>
+          <a:bodyPr rtlCol="0" anchor="ctr"/>
+          <a:lstStyle/>
+          <a:p>
+            <a:pPr algn="ctr"/>
+          </a:p>
+        </p:txBody>
+      </p:sp>
+      <p:sp>
+        <p:nvSpPr>
+          <p:cNvPr id="5" name="TextBox 4"/>
+          <p:cNvSpPr txBox="1"/>
+          <p:nvPr/>
+        </p:nvSpPr>
+        <p:spPr>
+          <a:xfrm>
+            <a:off x="274320" y="164592"/>
+            <a:ext cx="1005840" cy="411480"/>
+          </a:xfrm>
+          <a:prstGeom prst="rect">
+            <a:avLst/>
+          </a:prstGeom>
+          <a:noFill/>
+        </p:spPr>
+        <p:txBody>
+          <a:bodyPr wrap="square">
+            <a:spAutoFit/>
+          </a:bodyPr>
+          <a:lstStyle/>
+          <a:p>
+            <a:pPr algn="ctr"/>
+            <a:r>
+              <a:rPr sz="1100" b="1" i="0">
+                <a:solidFill>
+                  <a:srgbClr val="FFFFFF"/>
+                </a:solidFill>
+              </a:rPr>
+              <a:t>Ch.10</a:t>
+            </a:r>
+          </a:p>
+        </p:txBody>
+      </p:sp>
+      <p:sp>
+        <p:nvSpPr>
+          <p:cNvPr id="6" name="TextBox 5"/>
+          <p:cNvSpPr txBox="1"/>
+          <p:nvPr/>
+        </p:nvSpPr>
+        <p:spPr>
+          <a:xfrm>
+            <a:off x="1417320" y="137160"/>
+            <a:ext cx="10424160" cy="548640"/>
+          </a:xfrm>
+          <a:prstGeom prst="rect">
+            <a:avLst/>
+          </a:prstGeom>
+          <a:noFill/>
+        </p:spPr>
+        <p:txBody>
+          <a:bodyPr wrap="square">
+            <a:spAutoFit/>
+          </a:bodyPr>
+          <a:lstStyle/>
+          <a:p>
+            <a:pPr algn="l"/>
+            <a:r>
+              <a:rPr sz="1800" b="1" i="0">
+                <a:solidFill>
+                  <a:srgbClr val="FFFFFF"/>
+                </a:solidFill>
+              </a:rPr>
+              <a:t>चौथे स्तंभ से आह्वान — 10 मीडिया माँगें</a:t>
+            </a:r>
+          </a:p>
+        </p:txBody>
+      </p:sp>
+      <p:sp>
+        <p:nvSpPr>
+          <p:cNvPr id="7" name="TextBox 6"/>
+          <p:cNvSpPr txBox="1"/>
+          <p:nvPr/>
+        </p:nvSpPr>
+        <p:spPr>
+          <a:xfrm>
+            <a:off x="1417320" y="658368"/>
+            <a:ext cx="10424160" cy="411480"/>
+          </a:xfrm>
+          <a:prstGeom prst="rect">
+            <a:avLst/>
+          </a:prstGeom>
+          <a:noFill/>
+        </p:spPr>
+        <p:txBody>
+          <a:bodyPr wrap="square">
+            <a:spAutoFit/>
+          </a:bodyPr>
+          <a:lstStyle/>
+          <a:p>
+            <a:pPr algn="l"/>
+            <a:r>
+              <a:rPr sz="1200" b="1" i="0">
+                <a:solidFill>
+                  <a:srgbClr val="A0C8DC"/>
+                </a:solidFill>
+              </a:rPr>
+              <a:t>Call to the Fourth Estate — 10 Media Demands</a:t>
+            </a:r>
+          </a:p>
+        </p:txBody>
+      </p:sp>
+      <p:sp>
+        <p:nvSpPr>
+          <p:cNvPr id="8" name="Rectangle 7"/>
+          <p:cNvSpPr/>
+          <p:nvPr/>
+        </p:nvSpPr>
+        <p:spPr>
+          <a:xfrm>
+            <a:off x="274320" y="1170432"/>
+            <a:ext cx="11640312" cy="27432"/>
+          </a:xfrm>
+          <a:prstGeom prst="rect">
+            <a:avLst/>
+          </a:prstGeom>
+          <a:solidFill>
+            <a:srgbClr val="0D9488"/>
+          </a:solidFill>
+          <a:ln>
+            <a:noFill/>
+          </a:ln>
+        </p:spPr>
+        <p:style>
+          <a:lnRef idx="1">
+            <a:schemeClr val="accent1"/>
+          </a:lnRef>
+          <a:fillRef idx="3">
+            <a:schemeClr val="accent1"/>
+          </a:fillRef>
+          <a:effectRef idx="2">
+            <a:schemeClr val="accent1"/>
+          </a:effectRef>
+          <a:fontRef idx="minor">
+            <a:schemeClr val="lt1"/>
+          </a:fontRef>
+        </p:style>
+        <p:txBody>
+          <a:bodyPr rtlCol="0" anchor="ctr"/>
+          <a:lstStyle/>
+          <a:p>
+            <a:pPr algn="ctr"/>
+          </a:p>
+        </p:txBody>
+      </p:sp>
+      <p:sp>
+        <p:nvSpPr>
+          <p:cNvPr id="9" name="TextBox 8"/>
+          <p:cNvSpPr txBox="1"/>
+          <p:nvPr/>
+        </p:nvSpPr>
+        <p:spPr>
+          <a:xfrm>
+            <a:off x="274320" y="1280160"/>
+            <a:ext cx="5669280" cy="5029200"/>
+          </a:xfrm>
+          <a:prstGeom prst="rect">
+            <a:avLst/>
+          </a:prstGeom>
+          <a:noFill/>
+        </p:spPr>
+        <p:txBody>
+          <a:bodyPr wrap="square">
+            <a:spAutoFit/>
+          </a:bodyPr>
+          <a:lstStyle/>
+          <a:p>
+            <a:pPr algn="l"/>
+            <a:r>
+              <a:rPr sz="1100" b="0" i="0">
+                <a:solidFill>
+                  <a:srgbClr val="DCE1E6"/>
+                </a:solidFill>
+              </a:rPr>
+              <a:t>1.Delegation RTI 2.AS/FS Backdating CAG Audit 3.IP Login Audit→ACB 4.XEN Login
+Sting 5.DSC Location Check 6.Live Helpline Test 7.Morphed Photo Expose 8.Public
+Audit माँग 9.One Operator Three Roles Expose 10.Public Monitoring अनिवार्य।</a:t>
+            </a:r>
+          </a:p>
+        </p:txBody>
+      </p:sp>
+      <p:sp>
+        <p:nvSpPr>
+          <p:cNvPr id="10" name="TextBox 9"/>
+          <p:cNvSpPr txBox="1"/>
+          <p:nvPr/>
+        </p:nvSpPr>
+        <p:spPr>
+          <a:xfrm>
+            <a:off x="6217920" y="1280160"/>
+            <a:ext cx="5669280" cy="5029200"/>
+          </a:xfrm>
+          <a:prstGeom prst="rect">
+            <a:avLst/>
+          </a:prstGeom>
+          <a:noFill/>
+        </p:spPr>
+        <p:txBody>
+          <a:bodyPr wrap="square">
+            <a:spAutoFit/>
+          </a:bodyPr>
+          <a:lstStyle/>
+          <a:p>
+            <a:pPr algn="l"/>
+            <a:r>
+              <a:rPr sz="1050" b="0" i="1">
+                <a:solidFill>
+                  <a:srgbClr val="AAB9C3"/>
+                </a:solidFill>
+              </a:rPr>
+              <a:t>1.RTI on delegation circular 2.AS/FS backdating CAG audit 3.IP Login Audit→ACB
+4.XEN Login sting 5.DSC location check 6.Live helpline call test 7.Morphed photo
+expose 8.Public audit demand 9.One operator three roles expose 10.Public
+monitoring mandate.</a:t>
+            </a:r>
+          </a:p>
+        </p:txBody>
+      </p:sp>
+      <p:sp>
+        <p:nvSpPr>
+          <p:cNvPr id="11" name="Rectangle 10"/>
+          <p:cNvSpPr/>
+          <p:nvPr/>
+        </p:nvSpPr>
+        <p:spPr>
+          <a:xfrm>
+            <a:off x="6035040" y="1280160"/>
+            <a:ext cx="27432" cy="5029200"/>
+          </a:xfrm>
+          <a:prstGeom prst="rect">
+            <a:avLst/>
+          </a:prstGeom>
+          <a:solidFill>
+            <a:srgbClr val="0D9488"/>
+          </a:solidFill>
+          <a:ln>
+            <a:noFill/>
+          </a:ln>
+        </p:spPr>
+        <p:style>
+          <a:lnRef idx="1">
+            <a:schemeClr val="accent1"/>
+          </a:lnRef>
+          <a:fillRef idx="3">
+            <a:schemeClr val="accent1"/>
+          </a:fillRef>
+          <a:effectRef idx="2">
+            <a:schemeClr val="accent1"/>
+          </a:effectRef>
+          <a:fontRef idx="minor">
+            <a:schemeClr val="lt1"/>
+          </a:fontRef>
+        </p:style>
+        <p:txBody>
+          <a:bodyPr rtlCol="0" anchor="ctr"/>
+          <a:lstStyle/>
+          <a:p>
+            <a:pPr algn="ctr"/>
+          </a:p>
+        </p:txBody>
+      </p:sp>
+      <p:sp>
+        <p:nvSpPr>
+          <p:cNvPr id="12" name="TextBox 11"/>
+          <p:cNvSpPr txBox="1"/>
+          <p:nvPr/>
+        </p:nvSpPr>
+        <p:spPr>
+          <a:xfrm>
+            <a:off x="10972800" y="6492240"/>
+            <a:ext cx="1097280" cy="274320"/>
+          </a:xfrm>
+          <a:prstGeom prst="rect">
+            <a:avLst/>
+          </a:prstGeom>
+          <a:noFill/>
+        </p:spPr>
+        <p:txBody>
+          <a:bodyPr wrap="square">
+            <a:spAutoFit/>
+          </a:bodyPr>
+          <a:lstStyle/>
+          <a:p>
+            <a:pPr algn="r"/>
+            <a:r>
+              <a:rPr sz="800" b="0" i="0">
+                <a:solidFill>
+                  <a:srgbClr val="64788C"/>
+                </a:solidFill>
+              </a:rPr>
+              <a:t>17 / 17</a:t>
+            </a:r>
+          </a:p>
+        </p:txBody>
+      </p:sp>
+    </p:spTree>
+  </p:cSld>
+  <p:clrMapOvr>
+    <a:masterClrMapping/>
+  </p:clrMapOvr>
+</p:sld>
+</file>
+
+<file path=ppt/slides/slide18.xml><?xml version="1.0" encoding="utf-8"?>
 <p:sld xmlns:a="http://schemas.openxmlformats.org/drawingml/2006/main" xmlns:p="http://schemas.openxmlformats.org/presentationml/2006/main" xmlns:r="http://schemas.openxmlformats.org/officeDocument/2006/relationships">
   <p:cSld>
     <p:bg>
@@ -8500,7 +8957,7 @@
                   <a:srgbClr val="64788C"/>
                 </a:solidFill>
               </a:rPr>
-              <a:t>3 / 16</a:t>
+              <a:t>3 / 17</a:t>
             </a:r>
           </a:p>
         </p:txBody>
@@ -8949,7 +9406,7 @@
                   <a:srgbClr val="64788C"/>
                 </a:solidFill>
               </a:rPr>
-              <a:t>4 / 16</a:t>
+              <a:t>4 / 17</a:t>
             </a:r>
           </a:p>
         </p:txBody>
@@ -9399,7 +9856,7 @@
                   <a:srgbClr val="64788C"/>
                 </a:solidFill>
               </a:rPr>
-              <a:t>5 / 16</a:t>
+              <a:t>5 / 17</a:t>
             </a:r>
           </a:p>
         </p:txBody>
@@ -9849,7 +10306,7 @@
                   <a:srgbClr val="64788C"/>
                 </a:solidFill>
               </a:rPr>
-              <a:t>6 / 16</a:t>
+              <a:t>6 / 17</a:t>
             </a:r>
           </a:p>
         </p:txBody>
@@ -10301,7 +10758,7 @@
                   <a:srgbClr val="64788C"/>
                 </a:solidFill>
               </a:rPr>
-              <a:t>7 / 16</a:t>
+              <a:t>7 / 17</a:t>
             </a:r>
           </a:p>
         </p:txBody>
@@ -10750,7 +11207,7 @@
                   <a:srgbClr val="64788C"/>
                 </a:solidFill>
               </a:rPr>
-              <a:t>8 / 16</a:t>
+              <a:t>8 / 17</a:t>
             </a:r>
           </a:p>
         </p:txBody>
@@ -11200,7 +11657,7 @@
                   <a:srgbClr val="64788C"/>
                 </a:solidFill>
               </a:rPr>
-              <a:t>9 / 16</a:t>
+              <a:t>9 / 17</a:t>
             </a:r>
           </a:p>
         </p:txBody>

--- a/artifacts/rajasthan-ifms-crisis/IFMS-Rajasthan-Investigation.pptx
+++ b/artifacts/rajasthan-ifms-crisis/IFMS-Rajasthan-Investigation.pptx
@@ -3207,8 +3207,8 @@
         </p:nvSpPr>
         <p:spPr>
           <a:xfrm>
-            <a:off x="365760" y="274320"/>
-            <a:ext cx="11430000" cy="548640"/>
+            <a:off x="365760" y="228600"/>
+            <a:ext cx="11430000" cy="502920"/>
           </a:xfrm>
           <a:prstGeom prst="rect">
             <a:avLst/>
@@ -3223,7 +3223,7 @@
           <a:p>
             <a:pPr algn="ctr"/>
             <a:r>
-              <a:rPr sz="1400" b="1" i="0">
+              <a:rPr sz="1300" b="1" i="0">
                 <a:solidFill>
                   <a:srgbClr val="0D9488"/>
                 </a:solidFill>
@@ -3241,8 +3241,8 @@
         </p:nvSpPr>
         <p:spPr>
           <a:xfrm>
-            <a:off x="365760" y="822960"/>
-            <a:ext cx="11430000" cy="365760"/>
+            <a:off x="365760" y="749808"/>
+            <a:ext cx="11430000" cy="347472"/>
           </a:xfrm>
           <a:prstGeom prst="rect">
             <a:avLst/>
@@ -3257,9 +3257,9 @@
           <a:p>
             <a:pPr algn="ctr"/>
             <a:r>
-              <a:rPr sz="1000" b="0" i="0">
-                <a:solidFill>
-                  <a:srgbClr val="B4BEC8"/>
+              <a:rPr sz="950" b="0" i="0">
+                <a:solidFill>
+                  <a:srgbClr val="AAB9C8"/>
                 </a:solidFill>
               </a:rPr>
               <a:t>खोजी पत्रकारिता  |  INVESTIGATIVE JOURNALISM</a:t>
@@ -3275,7 +3275,7 @@
         </p:nvSpPr>
         <p:spPr>
           <a:xfrm>
-            <a:off x="1371600" y="1280160"/>
+            <a:off x="1371600" y="1188720"/>
             <a:ext cx="9445752" cy="36576"/>
           </a:xfrm>
           <a:prstGeom prst="rect">
@@ -3318,8 +3318,8 @@
         </p:nvSpPr>
         <p:spPr>
           <a:xfrm>
-            <a:off x="548640" y="1463040"/>
-            <a:ext cx="11064240" cy="1097280"/>
+            <a:off x="457200" y="1325880"/>
+            <a:ext cx="11274552" cy="1051560"/>
           </a:xfrm>
           <a:prstGeom prst="rect">
             <a:avLst/>
@@ -3334,7 +3334,7 @@
           <a:p>
             <a:pPr algn="ctr"/>
             <a:r>
-              <a:rPr sz="3200" b="1" i="0">
+              <a:rPr sz="3000" b="1" i="0">
                 <a:solidFill>
                   <a:srgbClr val="FFFFFF"/>
                 </a:solidFill>
@@ -3352,8 +3352,8 @@
         </p:nvSpPr>
         <p:spPr>
           <a:xfrm>
-            <a:off x="548640" y="2651760"/>
-            <a:ext cx="11064240" cy="731520"/>
+            <a:off x="457200" y="2468880"/>
+            <a:ext cx="11274552" cy="685800"/>
           </a:xfrm>
           <a:prstGeom prst="rect">
             <a:avLst/>
@@ -3368,7 +3368,7 @@
           <a:p>
             <a:pPr algn="ctr"/>
             <a:r>
-              <a:rPr sz="1800" b="1" i="0">
+              <a:rPr sz="1600" b="1" i="0">
                 <a:solidFill>
                   <a:srgbClr val="A0C8DC"/>
                 </a:solidFill>
@@ -3386,8 +3386,8 @@
         </p:nvSpPr>
         <p:spPr>
           <a:xfrm>
-            <a:off x="548640" y="3520440"/>
-            <a:ext cx="11064240" cy="548640"/>
+            <a:off x="457200" y="3291840"/>
+            <a:ext cx="11274552" cy="502920"/>
           </a:xfrm>
           <a:prstGeom prst="rect">
             <a:avLst/>
@@ -3402,12 +3402,12 @@
           <a:p>
             <a:pPr algn="ctr"/>
             <a:r>
-              <a:rPr sz="1100" b="0" i="1">
-                <a:solidFill>
-                  <a:srgbClr val="B4BEB4"/>
+              <a:rPr sz="1000" b="0" i="1">
+                <a:solidFill>
+                  <a:srgbClr val="AFB9AF"/>
                 </a:solidFill>
               </a:rPr>
-              <a:t>WAM बंद, IFMS टूटा, Helpline मौन, Delegation गायब — एक सम्पूर्ण खोजी रिपोर्ट</a:t>
+              <a:t>WAM बंद · IFMS टूटा · Helpline मौन · Delegation गायब · DSC बाज़ार में · AS/FS देरी · HO Credential दलाली · 200 रद्द अनुबंध · Recovery Portal नहीं</a:t>
             </a:r>
           </a:p>
         </p:txBody>
@@ -3420,8 +3420,8 @@
         </p:nvSpPr>
         <p:spPr>
           <a:xfrm>
-            <a:off x="548640" y="4069080"/>
-            <a:ext cx="11064240" cy="548640"/>
+            <a:off x="457200" y="3822191"/>
+            <a:ext cx="11274552" cy="502920"/>
           </a:xfrm>
           <a:prstGeom prst="rect">
             <a:avLst/>
@@ -3436,12 +3436,12 @@
           <a:p>
             <a:pPr algn="ctr"/>
             <a:r>
-              <a:rPr sz="1000" b="0" i="1">
-                <a:solidFill>
-                  <a:srgbClr val="A0AFA5"/>
+              <a:rPr sz="950" b="0" i="1">
+                <a:solidFill>
+                  <a:srgbClr val="9BAAA0"/>
                 </a:solidFill>
               </a:rPr>
-              <a:t>WAM shutdown, IFMS broken, Helpline silent, No delegation — a complete investigative report</a:t>
+              <a:t>A complete investigative report on Rajasthan PWD &amp; Irrigation's digital governance collapse</a:t>
             </a:r>
           </a:p>
         </p:txBody>
@@ -3454,7 +3454,7 @@
         </p:nvSpPr>
         <p:spPr>
           <a:xfrm>
-            <a:off x="1371600" y="4709160"/>
+            <a:off x="1371600" y="4480560"/>
             <a:ext cx="9445752" cy="36576"/>
           </a:xfrm>
           <a:prstGeom prst="rect">
@@ -3497,8 +3497,8 @@
         </p:nvSpPr>
         <p:spPr>
           <a:xfrm>
-            <a:off x="365760" y="4846320"/>
-            <a:ext cx="11430000" cy="365760"/>
+            <a:off x="365760" y="4617720"/>
+            <a:ext cx="11430000" cy="347472"/>
           </a:xfrm>
           <a:prstGeom prst="rect">
             <a:avLst/>
@@ -3513,9 +3513,9 @@
           <a:p>
             <a:pPr algn="ctr"/>
             <a:r>
-              <a:rPr sz="900" b="0" i="0">
-                <a:solidFill>
-                  <a:srgbClr val="788C96"/>
+              <a:rPr sz="850" b="0" i="0">
+                <a:solidFill>
+                  <a:srgbClr val="6E8291"/>
                 </a:solidFill>
               </a:rPr>
               <a:t>जन संवाददाता | Jan Samvaddaata  •  6 August 2026  •  PWD &amp; Irrigation Bureau, Rajasthan</a:t>
@@ -3532,6 +3532,457 @@
 </file>
 
 <file path=ppt/slides/slide10.xml><?xml version="1.0" encoding="utf-8"?>
+<p:sld xmlns:a="http://schemas.openxmlformats.org/drawingml/2006/main" xmlns:p="http://schemas.openxmlformats.org/presentationml/2006/main" xmlns:r="http://schemas.openxmlformats.org/officeDocument/2006/relationships">
+  <p:cSld>
+    <p:bg>
+      <p:bgPr>
+        <a:solidFill>
+          <a:srgbClr val="281805"/>
+        </a:solidFill>
+        <a:effectLst/>
+      </p:bgPr>
+    </p:bg>
+    <p:spTree>
+      <p:nvGrpSpPr>
+        <p:cNvPr id="1" name=""/>
+        <p:cNvGrpSpPr/>
+        <p:nvPr/>
+      </p:nvGrpSpPr>
+      <p:grpSpPr/>
+      <p:sp>
+        <p:nvSpPr>
+          <p:cNvPr id="2" name="Rectangle 1"/>
+          <p:cNvSpPr/>
+          <p:nvPr/>
+        </p:nvSpPr>
+        <p:spPr>
+          <a:xfrm>
+            <a:off x="0" y="0"/>
+            <a:ext cx="12188952" cy="64008"/>
+          </a:xfrm>
+          <a:prstGeom prst="rect">
+            <a:avLst/>
+          </a:prstGeom>
+          <a:solidFill>
+            <a:srgbClr val="0D9488"/>
+          </a:solidFill>
+          <a:ln>
+            <a:noFill/>
+          </a:ln>
+        </p:spPr>
+        <p:style>
+          <a:lnRef idx="1">
+            <a:schemeClr val="accent1"/>
+          </a:lnRef>
+          <a:fillRef idx="3">
+            <a:schemeClr val="accent1"/>
+          </a:fillRef>
+          <a:effectRef idx="2">
+            <a:schemeClr val="accent1"/>
+          </a:effectRef>
+          <a:fontRef idx="minor">
+            <a:schemeClr val="lt1"/>
+          </a:fontRef>
+        </p:style>
+        <p:txBody>
+          <a:bodyPr rtlCol="0" anchor="ctr"/>
+          <a:lstStyle/>
+          <a:p>
+            <a:pPr algn="ctr"/>
+          </a:p>
+        </p:txBody>
+      </p:sp>
+      <p:sp>
+        <p:nvSpPr>
+          <p:cNvPr id="3" name="Rectangle 2"/>
+          <p:cNvSpPr/>
+          <p:nvPr/>
+        </p:nvSpPr>
+        <p:spPr>
+          <a:xfrm>
+            <a:off x="0" y="6793992"/>
+            <a:ext cx="12188952" cy="64008"/>
+          </a:xfrm>
+          <a:prstGeom prst="rect">
+            <a:avLst/>
+          </a:prstGeom>
+          <a:solidFill>
+            <a:srgbClr val="0D9488"/>
+          </a:solidFill>
+          <a:ln>
+            <a:noFill/>
+          </a:ln>
+        </p:spPr>
+        <p:style>
+          <a:lnRef idx="1">
+            <a:schemeClr val="accent1"/>
+          </a:lnRef>
+          <a:fillRef idx="3">
+            <a:schemeClr val="accent1"/>
+          </a:fillRef>
+          <a:effectRef idx="2">
+            <a:schemeClr val="accent1"/>
+          </a:effectRef>
+          <a:fontRef idx="minor">
+            <a:schemeClr val="lt1"/>
+          </a:fontRef>
+        </p:style>
+        <p:txBody>
+          <a:bodyPr rtlCol="0" anchor="ctr"/>
+          <a:lstStyle/>
+          <a:p>
+            <a:pPr algn="ctr"/>
+          </a:p>
+        </p:txBody>
+      </p:sp>
+      <p:sp>
+        <p:nvSpPr>
+          <p:cNvPr id="4" name="Rectangle 3"/>
+          <p:cNvSpPr/>
+          <p:nvPr/>
+        </p:nvSpPr>
+        <p:spPr>
+          <a:xfrm>
+            <a:off x="274320" y="137160"/>
+            <a:ext cx="1005840" cy="402336"/>
+          </a:xfrm>
+          <a:prstGeom prst="rect">
+            <a:avLst/>
+          </a:prstGeom>
+          <a:solidFill>
+            <a:srgbClr val="0D9488"/>
+          </a:solidFill>
+          <a:ln>
+            <a:noFill/>
+          </a:ln>
+        </p:spPr>
+        <p:style>
+          <a:lnRef idx="1">
+            <a:schemeClr val="accent1"/>
+          </a:lnRef>
+          <a:fillRef idx="3">
+            <a:schemeClr val="accent1"/>
+          </a:fillRef>
+          <a:effectRef idx="2">
+            <a:schemeClr val="accent1"/>
+          </a:effectRef>
+          <a:fontRef idx="minor">
+            <a:schemeClr val="lt1"/>
+          </a:fontRef>
+        </p:style>
+        <p:txBody>
+          <a:bodyPr rtlCol="0" anchor="ctr"/>
+          <a:lstStyle/>
+          <a:p>
+            <a:pPr algn="ctr"/>
+          </a:p>
+        </p:txBody>
+      </p:sp>
+      <p:sp>
+        <p:nvSpPr>
+          <p:cNvPr id="5" name="TextBox 4"/>
+          <p:cNvSpPr txBox="1"/>
+          <p:nvPr/>
+        </p:nvSpPr>
+        <p:spPr>
+          <a:xfrm>
+            <a:off x="274320" y="137160"/>
+            <a:ext cx="1005840" cy="402336"/>
+          </a:xfrm>
+          <a:prstGeom prst="rect">
+            <a:avLst/>
+          </a:prstGeom>
+          <a:noFill/>
+        </p:spPr>
+        <p:txBody>
+          <a:bodyPr wrap="square">
+            <a:spAutoFit/>
+          </a:bodyPr>
+          <a:lstStyle/>
+          <a:p>
+            <a:pPr algn="ctr"/>
+            <a:r>
+              <a:rPr sz="1000" b="1" i="0">
+                <a:solidFill>
+                  <a:srgbClr val="FFFFFF"/>
+                </a:solidFill>
+              </a:rPr>
+              <a:t>Ch.6A</a:t>
+            </a:r>
+          </a:p>
+        </p:txBody>
+      </p:sp>
+      <p:sp>
+        <p:nvSpPr>
+          <p:cNvPr id="6" name="TextBox 5"/>
+          <p:cNvSpPr txBox="1"/>
+          <p:nvPr/>
+        </p:nvSpPr>
+        <p:spPr>
+          <a:xfrm>
+            <a:off x="1417320" y="109728"/>
+            <a:ext cx="10424160" cy="530352"/>
+          </a:xfrm>
+          <a:prstGeom prst="rect">
+            <a:avLst/>
+          </a:prstGeom>
+          <a:noFill/>
+        </p:spPr>
+        <p:txBody>
+          <a:bodyPr wrap="square">
+            <a:spAutoFit/>
+          </a:bodyPr>
+          <a:lstStyle/>
+          <a:p>
+            <a:pPr algn="l"/>
+            <a:r>
+              <a:rPr sz="1700" b="1" i="0">
+                <a:solidFill>
+                  <a:srgbClr val="FFFFFF"/>
+                </a:solidFill>
+              </a:rPr>
+              <a:t>आदर्श Delegation Matrix — सरकार ने Statutory Compulsion नहीं दी</a:t>
+            </a:r>
+          </a:p>
+        </p:txBody>
+      </p:sp>
+      <p:sp>
+        <p:nvSpPr>
+          <p:cNvPr id="7" name="TextBox 6"/>
+          <p:cNvSpPr txBox="1"/>
+          <p:nvPr/>
+        </p:nvSpPr>
+        <p:spPr>
+          <a:xfrm>
+            <a:off x="1417320" y="612648"/>
+            <a:ext cx="10424160" cy="402336"/>
+          </a:xfrm>
+          <a:prstGeom prst="rect">
+            <a:avLst/>
+          </a:prstGeom>
+          <a:noFill/>
+        </p:spPr>
+        <p:txBody>
+          <a:bodyPr wrap="square">
+            <a:spAutoFit/>
+          </a:bodyPr>
+          <a:lstStyle/>
+          <a:p>
+            <a:pPr algn="l"/>
+            <a:r>
+              <a:rPr sz="1150" b="1" i="0">
+                <a:solidFill>
+                  <a:srgbClr val="A0C8DC"/>
+                </a:solidFill>
+              </a:rPr>
+              <a:t>Ideal Delegation Matrix — 10 Tasks, 3 Officers Each</a:t>
+            </a:r>
+          </a:p>
+        </p:txBody>
+      </p:sp>
+      <p:sp>
+        <p:nvSpPr>
+          <p:cNvPr id="8" name="Rectangle 7"/>
+          <p:cNvSpPr/>
+          <p:nvPr/>
+        </p:nvSpPr>
+        <p:spPr>
+          <a:xfrm>
+            <a:off x="274320" y="1133856"/>
+            <a:ext cx="11640312" cy="27432"/>
+          </a:xfrm>
+          <a:prstGeom prst="rect">
+            <a:avLst/>
+          </a:prstGeom>
+          <a:solidFill>
+            <a:srgbClr val="0D9488"/>
+          </a:solidFill>
+          <a:ln>
+            <a:noFill/>
+          </a:ln>
+        </p:spPr>
+        <p:style>
+          <a:lnRef idx="1">
+            <a:schemeClr val="accent1"/>
+          </a:lnRef>
+          <a:fillRef idx="3">
+            <a:schemeClr val="accent1"/>
+          </a:fillRef>
+          <a:effectRef idx="2">
+            <a:schemeClr val="accent1"/>
+          </a:effectRef>
+          <a:fontRef idx="minor">
+            <a:schemeClr val="lt1"/>
+          </a:fontRef>
+        </p:style>
+        <p:txBody>
+          <a:bodyPr rtlCol="0" anchor="ctr"/>
+          <a:lstStyle/>
+          <a:p>
+            <a:pPr algn="ctr"/>
+          </a:p>
+        </p:txBody>
+      </p:sp>
+      <p:sp>
+        <p:nvSpPr>
+          <p:cNvPr id="9" name="TextBox 8"/>
+          <p:cNvSpPr txBox="1"/>
+          <p:nvPr/>
+        </p:nvSpPr>
+        <p:spPr>
+          <a:xfrm>
+            <a:off x="274320" y="1234440"/>
+            <a:ext cx="5669280" cy="5120640"/>
+          </a:xfrm>
+          <a:prstGeom prst="rect">
+            <a:avLst/>
+          </a:prstGeom>
+          <a:noFill/>
+        </p:spPr>
+        <p:txBody>
+          <a:bodyPr wrap="square">
+            <a:spAutoFit/>
+          </a:bodyPr>
+          <a:lstStyle/>
+          <a:p>
+            <a:pPr algn="l"/>
+            <a:r>
+              <a:rPr sz="1050" b="0" i="0">
+                <a:solidFill>
+                  <a:srgbClr val="DAE0E6"/>
+                </a:solidFill>
+              </a:rPr>
+              <a:t>10 tasks के लिए task-wise delegation: AS&amp;FS: AE/SDC→Div Auditor→XEN। Sanction:
+Div Auditor→Div Accountant→XEN। TS/BOQ/Package/WO/Abstract: AE→TA→XEN। सरकार
+ने कोई Statutory Circular नहीं दिया — यही घातक चूक।</a:t>
+            </a:r>
+          </a:p>
+        </p:txBody>
+      </p:sp>
+      <p:sp>
+        <p:nvSpPr>
+          <p:cNvPr id="10" name="TextBox 9"/>
+          <p:cNvSpPr txBox="1"/>
+          <p:nvPr/>
+        </p:nvSpPr>
+        <p:spPr>
+          <a:xfrm>
+            <a:off x="6217920" y="1234440"/>
+            <a:ext cx="5669280" cy="5120640"/>
+          </a:xfrm>
+          <a:prstGeom prst="rect">
+            <a:avLst/>
+          </a:prstGeom>
+          <a:noFill/>
+        </p:spPr>
+        <p:txBody>
+          <a:bodyPr wrap="square">
+            <a:spAutoFit/>
+          </a:bodyPr>
+          <a:lstStyle/>
+          <a:p>
+            <a:pPr algn="l"/>
+            <a:r>
+              <a:rPr sz="1000" b="0" i="1">
+                <a:solidFill>
+                  <a:srgbClr val="A8B9C3"/>
+                </a:solidFill>
+              </a:rPr>
+              <a:t>Technical expert proposed framework: AS&amp;FS / Vendor Bill / Refund: AE/SDC →
+Div Auditor → XEN. Sanction: Div Auditor → Div Accountant → XEN.
+TS/BOQ/Package/WO/Abstract: AE → TA → XEN. Government issued NO statutory
+circular mandating this delegation — fatal omission enabling monopoly
+operator.</a:t>
+            </a:r>
+          </a:p>
+        </p:txBody>
+      </p:sp>
+      <p:sp>
+        <p:nvSpPr>
+          <p:cNvPr id="11" name="Rectangle 10"/>
+          <p:cNvSpPr/>
+          <p:nvPr/>
+        </p:nvSpPr>
+        <p:spPr>
+          <a:xfrm>
+            <a:off x="6035040" y="1234440"/>
+            <a:ext cx="27432" cy="5120640"/>
+          </a:xfrm>
+          <a:prstGeom prst="rect">
+            <a:avLst/>
+          </a:prstGeom>
+          <a:solidFill>
+            <a:srgbClr val="0D9488"/>
+          </a:solidFill>
+          <a:ln>
+            <a:noFill/>
+          </a:ln>
+        </p:spPr>
+        <p:style>
+          <a:lnRef idx="1">
+            <a:schemeClr val="accent1"/>
+          </a:lnRef>
+          <a:fillRef idx="3">
+            <a:schemeClr val="accent1"/>
+          </a:fillRef>
+          <a:effectRef idx="2">
+            <a:schemeClr val="accent1"/>
+          </a:effectRef>
+          <a:fontRef idx="minor">
+            <a:schemeClr val="lt1"/>
+          </a:fontRef>
+        </p:style>
+        <p:txBody>
+          <a:bodyPr rtlCol="0" anchor="ctr"/>
+          <a:lstStyle/>
+          <a:p>
+            <a:pPr algn="ctr"/>
+          </a:p>
+        </p:txBody>
+      </p:sp>
+      <p:sp>
+        <p:nvSpPr>
+          <p:cNvPr id="12" name="TextBox 11"/>
+          <p:cNvSpPr txBox="1"/>
+          <p:nvPr/>
+        </p:nvSpPr>
+        <p:spPr>
+          <a:xfrm>
+            <a:off x="10881360" y="6492240"/>
+            <a:ext cx="1188720" cy="274320"/>
+          </a:xfrm>
+          <a:prstGeom prst="rect">
+            <a:avLst/>
+          </a:prstGeom>
+          <a:noFill/>
+        </p:spPr>
+        <p:txBody>
+          <a:bodyPr wrap="square">
+            <a:spAutoFit/>
+          </a:bodyPr>
+          <a:lstStyle/>
+          <a:p>
+            <a:pPr algn="r"/>
+            <a:r>
+              <a:rPr sz="800" b="0" i="0">
+                <a:solidFill>
+                  <a:srgbClr val="647382"/>
+                </a:solidFill>
+              </a:rPr>
+              <a:t>Slide 10 / 17</a:t>
+            </a:r>
+          </a:p>
+        </p:txBody>
+      </p:sp>
+    </p:spTree>
+  </p:cSld>
+  <p:clrMapOvr>
+    <a:masterClrMapping/>
+  </p:clrMapOvr>
+</p:sld>
+</file>
+
+<file path=ppt/slides/slide11.xml><?xml version="1.0" encoding="utf-8"?>
 <p:sld xmlns:a="http://schemas.openxmlformats.org/drawingml/2006/main" xmlns:p="http://schemas.openxmlformats.org/presentationml/2006/main" xmlns:r="http://schemas.openxmlformats.org/officeDocument/2006/relationships">
   <p:cSld>
     <p:bg>
@@ -3643,8 +4094,8 @@
         </p:nvSpPr>
         <p:spPr>
           <a:xfrm>
-            <a:off x="274320" y="164592"/>
-            <a:ext cx="1005840" cy="411480"/>
+            <a:off x="274320" y="137160"/>
+            <a:ext cx="1005840" cy="402336"/>
           </a:xfrm>
           <a:prstGeom prst="rect">
             <a:avLst/>
@@ -3686,8 +4137,8 @@
         </p:nvSpPr>
         <p:spPr>
           <a:xfrm>
-            <a:off x="274320" y="164592"/>
-            <a:ext cx="1005840" cy="411480"/>
+            <a:off x="274320" y="137160"/>
+            <a:ext cx="1005840" cy="402336"/>
           </a:xfrm>
           <a:prstGeom prst="rect">
             <a:avLst/>
@@ -3702,12 +4153,12 @@
           <a:p>
             <a:pPr algn="ctr"/>
             <a:r>
-              <a:rPr sz="1100" b="1" i="0">
+              <a:rPr sz="1000" b="1" i="0">
                 <a:solidFill>
                   <a:srgbClr val="FFFFFF"/>
                 </a:solidFill>
               </a:rPr>
-              <a:t>Ch.6A</a:t>
+              <a:t>Ch.6B</a:t>
             </a:r>
           </a:p>
         </p:txBody>
@@ -3720,8 +4171,8 @@
         </p:nvSpPr>
         <p:spPr>
           <a:xfrm>
-            <a:off x="1417320" y="137160"/>
-            <a:ext cx="10424160" cy="548640"/>
+            <a:off x="1417320" y="109728"/>
+            <a:ext cx="10424160" cy="530352"/>
           </a:xfrm>
           <a:prstGeom prst="rect">
             <a:avLst/>
@@ -3736,12 +4187,12 @@
           <a:p>
             <a:pPr algn="l"/>
             <a:r>
-              <a:rPr sz="1800" b="1" i="0">
+              <a:rPr sz="1700" b="1" i="0">
                 <a:solidFill>
                   <a:srgbClr val="FFFFFF"/>
                 </a:solidFill>
               </a:rPr>
-              <a:t>आदर्श Maker-Checker-Approver Delegation Matrix</a:t>
+              <a:t>Digital Signature बाज़ार में — XEN का DSC Computer Centre पर</a:t>
             </a:r>
           </a:p>
         </p:txBody>
@@ -3754,8 +4205,8 @@
         </p:nvSpPr>
         <p:spPr>
           <a:xfrm>
-            <a:off x="1417320" y="658368"/>
-            <a:ext cx="10424160" cy="411480"/>
+            <a:off x="1417320" y="612648"/>
+            <a:ext cx="10424160" cy="402336"/>
           </a:xfrm>
           <a:prstGeom prst="rect">
             <a:avLst/>
@@ -3770,12 +4221,12 @@
           <a:p>
             <a:pPr algn="l"/>
             <a:r>
-              <a:rPr sz="1200" b="1" i="0">
+              <a:rPr sz="1150" b="1" i="0">
                 <a:solidFill>
                   <a:srgbClr val="A0C8DC"/>
                 </a:solidFill>
               </a:rPr>
-              <a:t>Ideal Maker-Checker-Approver Delegation Matrix</a:t>
+              <a:t>Digital Signature Abuse — DSC at Market Computer Centres</a:t>
             </a:r>
           </a:p>
         </p:txBody>
@@ -3788,7 +4239,7 @@
         </p:nvSpPr>
         <p:spPr>
           <a:xfrm>
-            <a:off x="274320" y="1170432"/>
+            <a:off x="274320" y="1133856"/>
             <a:ext cx="11640312" cy="27432"/>
           </a:xfrm>
           <a:prstGeom prst="rect">
@@ -3831,8 +4282,8 @@
         </p:nvSpPr>
         <p:spPr>
           <a:xfrm>
-            <a:off x="274320" y="1280160"/>
-            <a:ext cx="5669280" cy="5029200"/>
+            <a:off x="274320" y="1234440"/>
+            <a:ext cx="5669280" cy="5120640"/>
           </a:xfrm>
           <a:prstGeom prst="rect">
             <a:avLst/>
@@ -3847,15 +4298,13 @@
           <a:p>
             <a:pPr algn="l"/>
             <a:r>
-              <a:rPr sz="1100" b="0" i="0">
-                <a:solidFill>
-                  <a:srgbClr val="DCE1E6"/>
+              <a:rPr sz="1050" b="0" i="0">
+                <a:solidFill>
+                  <a:srgbClr val="DAE0E6"/>
                 </a:solidFill>
               </a:rPr>
-              <a:t>तकनीकी विशेषज्ञ का प्रस्तावित framework: AS&amp;FS: AE/SDC→Div Auditor→XEN |
-Sanction: Div Auditor→Div Accountant→XEN | TS/BOQ/Package/WO/Abstract: AE→TA→XEN
-| Vendor Bill &amp; Refund: AE/SDC→Div Auditor→XEN। सरकार ने कोई Statutory Circular
-नहीं दिया — यही घातक चूक है।</a:t>
+              <a:t>कोई XEN login नहीं किया। DSC बाज़ार के computer centre पर। Operator XEN के DSC
+से तीनों roles। IT Act 66C: 3 वर्ष कारावास।</a:t>
             </a:r>
           </a:p>
         </p:txBody>
@@ -3868,8 +4317,8 @@
         </p:nvSpPr>
         <p:spPr>
           <a:xfrm>
-            <a:off x="6217920" y="1280160"/>
-            <a:ext cx="5669280" cy="5029200"/>
+            <a:off x="6217920" y="1234440"/>
+            <a:ext cx="5669280" cy="5120640"/>
           </a:xfrm>
           <a:prstGeom prst="rect">
             <a:avLst/>
@@ -3884,16 +4333,15 @@
           <a:p>
             <a:pPr algn="l"/>
             <a:r>
-              <a:rPr sz="1050" b="0" i="1">
-                <a:solidFill>
-                  <a:srgbClr val="AAB9C3"/>
+              <a:rPr sz="1000" b="0" i="1">
+                <a:solidFill>
+                  <a:srgbClr val="A8B9C3"/>
                 </a:solidFill>
               </a:rPr>
-              <a:t>Technical expert proposed framework: AS&amp;FS: AE/Sub-Div Clerk→Div Auditor→XEN |
-Sanction: Div Auditor→Div Accountant→XEN | TS/BOQ/Package/WO/Abstract: AE→TA→XEN
-| Vendor Bill &amp; Refund: AE/Sub-Div Clerk→Div Auditor→XEN. Government has issued
-NO statutory circular mandating this delegation — fatal omission enabling one-
-operator monopoly.</a:t>
+              <a:t>No XEN has logged into IFMS. Their DSC (Digital Signature Certificates) are
+kept at market computer centres. Operator signs as Maker, Checker AND Approver
+using XEN's DSC. IT Act 66C: using another person's digital identity = 3 years
+imprisonment. This crime occurs daily in government offices across Rajasthan.</a:t>
             </a:r>
           </a:p>
         </p:txBody>
@@ -3906,8 +4354,8 @@
         </p:nvSpPr>
         <p:spPr>
           <a:xfrm>
-            <a:off x="6035040" y="1280160"/>
-            <a:ext cx="27432" cy="5029200"/>
+            <a:off x="6035040" y="1234440"/>
+            <a:ext cx="27432" cy="5120640"/>
           </a:xfrm>
           <a:prstGeom prst="rect">
             <a:avLst/>
@@ -3949,8 +4397,8 @@
         </p:nvSpPr>
         <p:spPr>
           <a:xfrm>
-            <a:off x="10972800" y="6492240"/>
-            <a:ext cx="1097280" cy="274320"/>
+            <a:off x="10881360" y="6492240"/>
+            <a:ext cx="1188720" cy="274320"/>
           </a:xfrm>
           <a:prstGeom prst="rect">
             <a:avLst/>
@@ -3967,460 +4415,10 @@
             <a:r>
               <a:rPr sz="800" b="0" i="0">
                 <a:solidFill>
-                  <a:srgbClr val="64788C"/>
+                  <a:srgbClr val="647382"/>
                 </a:solidFill>
               </a:rPr>
-              <a:t>10 / 17</a:t>
-            </a:r>
-          </a:p>
-        </p:txBody>
-      </p:sp>
-    </p:spTree>
-  </p:cSld>
-  <p:clrMapOvr>
-    <a:masterClrMapping/>
-  </p:clrMapOvr>
-</p:sld>
-</file>
-
-<file path=ppt/slides/slide11.xml><?xml version="1.0" encoding="utf-8"?>
-<p:sld xmlns:a="http://schemas.openxmlformats.org/drawingml/2006/main" xmlns:p="http://schemas.openxmlformats.org/presentationml/2006/main" xmlns:r="http://schemas.openxmlformats.org/officeDocument/2006/relationships">
-  <p:cSld>
-    <p:bg>
-      <p:bgPr>
-        <a:solidFill>
-          <a:srgbClr val="1A2E50"/>
-        </a:solidFill>
-        <a:effectLst/>
-      </p:bgPr>
-    </p:bg>
-    <p:spTree>
-      <p:nvGrpSpPr>
-        <p:cNvPr id="1" name=""/>
-        <p:cNvGrpSpPr/>
-        <p:nvPr/>
-      </p:nvGrpSpPr>
-      <p:grpSpPr/>
-      <p:sp>
-        <p:nvSpPr>
-          <p:cNvPr id="2" name="Rectangle 1"/>
-          <p:cNvSpPr/>
-          <p:nvPr/>
-        </p:nvSpPr>
-        <p:spPr>
-          <a:xfrm>
-            <a:off x="0" y="0"/>
-            <a:ext cx="12188952" cy="64008"/>
-          </a:xfrm>
-          <a:prstGeom prst="rect">
-            <a:avLst/>
-          </a:prstGeom>
-          <a:solidFill>
-            <a:srgbClr val="0D9488"/>
-          </a:solidFill>
-          <a:ln>
-            <a:noFill/>
-          </a:ln>
-        </p:spPr>
-        <p:style>
-          <a:lnRef idx="1">
-            <a:schemeClr val="accent1"/>
-          </a:lnRef>
-          <a:fillRef idx="3">
-            <a:schemeClr val="accent1"/>
-          </a:fillRef>
-          <a:effectRef idx="2">
-            <a:schemeClr val="accent1"/>
-          </a:effectRef>
-          <a:fontRef idx="minor">
-            <a:schemeClr val="lt1"/>
-          </a:fontRef>
-        </p:style>
-        <p:txBody>
-          <a:bodyPr rtlCol="0" anchor="ctr"/>
-          <a:lstStyle/>
-          <a:p>
-            <a:pPr algn="ctr"/>
-          </a:p>
-        </p:txBody>
-      </p:sp>
-      <p:sp>
-        <p:nvSpPr>
-          <p:cNvPr id="3" name="Rectangle 2"/>
-          <p:cNvSpPr/>
-          <p:nvPr/>
-        </p:nvSpPr>
-        <p:spPr>
-          <a:xfrm>
-            <a:off x="0" y="6793992"/>
-            <a:ext cx="12188952" cy="64008"/>
-          </a:xfrm>
-          <a:prstGeom prst="rect">
-            <a:avLst/>
-          </a:prstGeom>
-          <a:solidFill>
-            <a:srgbClr val="0D9488"/>
-          </a:solidFill>
-          <a:ln>
-            <a:noFill/>
-          </a:ln>
-        </p:spPr>
-        <p:style>
-          <a:lnRef idx="1">
-            <a:schemeClr val="accent1"/>
-          </a:lnRef>
-          <a:fillRef idx="3">
-            <a:schemeClr val="accent1"/>
-          </a:fillRef>
-          <a:effectRef idx="2">
-            <a:schemeClr val="accent1"/>
-          </a:effectRef>
-          <a:fontRef idx="minor">
-            <a:schemeClr val="lt1"/>
-          </a:fontRef>
-        </p:style>
-        <p:txBody>
-          <a:bodyPr rtlCol="0" anchor="ctr"/>
-          <a:lstStyle/>
-          <a:p>
-            <a:pPr algn="ctr"/>
-          </a:p>
-        </p:txBody>
-      </p:sp>
-      <p:sp>
-        <p:nvSpPr>
-          <p:cNvPr id="4" name="Rectangle 3"/>
-          <p:cNvSpPr/>
-          <p:nvPr/>
-        </p:nvSpPr>
-        <p:spPr>
-          <a:xfrm>
-            <a:off x="274320" y="164592"/>
-            <a:ext cx="1005840" cy="411480"/>
-          </a:xfrm>
-          <a:prstGeom prst="rect">
-            <a:avLst/>
-          </a:prstGeom>
-          <a:solidFill>
-            <a:srgbClr val="0D9488"/>
-          </a:solidFill>
-          <a:ln>
-            <a:noFill/>
-          </a:ln>
-        </p:spPr>
-        <p:style>
-          <a:lnRef idx="1">
-            <a:schemeClr val="accent1"/>
-          </a:lnRef>
-          <a:fillRef idx="3">
-            <a:schemeClr val="accent1"/>
-          </a:fillRef>
-          <a:effectRef idx="2">
-            <a:schemeClr val="accent1"/>
-          </a:effectRef>
-          <a:fontRef idx="minor">
-            <a:schemeClr val="lt1"/>
-          </a:fontRef>
-        </p:style>
-        <p:txBody>
-          <a:bodyPr rtlCol="0" anchor="ctr"/>
-          <a:lstStyle/>
-          <a:p>
-            <a:pPr algn="ctr"/>
-          </a:p>
-        </p:txBody>
-      </p:sp>
-      <p:sp>
-        <p:nvSpPr>
-          <p:cNvPr id="5" name="TextBox 4"/>
-          <p:cNvSpPr txBox="1"/>
-          <p:nvPr/>
-        </p:nvSpPr>
-        <p:spPr>
-          <a:xfrm>
-            <a:off x="274320" y="164592"/>
-            <a:ext cx="1005840" cy="411480"/>
-          </a:xfrm>
-          <a:prstGeom prst="rect">
-            <a:avLst/>
-          </a:prstGeom>
-          <a:noFill/>
-        </p:spPr>
-        <p:txBody>
-          <a:bodyPr wrap="square">
-            <a:spAutoFit/>
-          </a:bodyPr>
-          <a:lstStyle/>
-          <a:p>
-            <a:pPr algn="ctr"/>
-            <a:r>
-              <a:rPr sz="1100" b="1" i="0">
-                <a:solidFill>
-                  <a:srgbClr val="FFFFFF"/>
-                </a:solidFill>
-              </a:rPr>
-              <a:t>Ch.6B</a:t>
-            </a:r>
-          </a:p>
-        </p:txBody>
-      </p:sp>
-      <p:sp>
-        <p:nvSpPr>
-          <p:cNvPr id="6" name="TextBox 5"/>
-          <p:cNvSpPr txBox="1"/>
-          <p:nvPr/>
-        </p:nvSpPr>
-        <p:spPr>
-          <a:xfrm>
-            <a:off x="1417320" y="137160"/>
-            <a:ext cx="10424160" cy="548640"/>
-          </a:xfrm>
-          <a:prstGeom prst="rect">
-            <a:avLst/>
-          </a:prstGeom>
-          <a:noFill/>
-        </p:spPr>
-        <p:txBody>
-          <a:bodyPr wrap="square">
-            <a:spAutoFit/>
-          </a:bodyPr>
-          <a:lstStyle/>
-          <a:p>
-            <a:pPr algn="l"/>
-            <a:r>
-              <a:rPr sz="1800" b="1" i="0">
-                <a:solidFill>
-                  <a:srgbClr val="FFFFFF"/>
-                </a:solidFill>
-              </a:rPr>
-              <a:t>Digital Signature का बाज़ार — XEN का DSC Computer Centre पर</a:t>
-            </a:r>
-          </a:p>
-        </p:txBody>
-      </p:sp>
-      <p:sp>
-        <p:nvSpPr>
-          <p:cNvPr id="7" name="TextBox 6"/>
-          <p:cNvSpPr txBox="1"/>
-          <p:nvPr/>
-        </p:nvSpPr>
-        <p:spPr>
-          <a:xfrm>
-            <a:off x="1417320" y="658368"/>
-            <a:ext cx="10424160" cy="411480"/>
-          </a:xfrm>
-          <a:prstGeom prst="rect">
-            <a:avLst/>
-          </a:prstGeom>
-          <a:noFill/>
-        </p:spPr>
-        <p:txBody>
-          <a:bodyPr wrap="square">
-            <a:spAutoFit/>
-          </a:bodyPr>
-          <a:lstStyle/>
-          <a:p>
-            <a:pPr algn="l"/>
-            <a:r>
-              <a:rPr sz="1200" b="1" i="0">
-                <a:solidFill>
-                  <a:srgbClr val="A0C8DC"/>
-                </a:solidFill>
-              </a:rPr>
-              <a:t>Digital Signature Abuse — DSC at Market Computer Centres</a:t>
-            </a:r>
-          </a:p>
-        </p:txBody>
-      </p:sp>
-      <p:sp>
-        <p:nvSpPr>
-          <p:cNvPr id="8" name="Rectangle 7"/>
-          <p:cNvSpPr/>
-          <p:nvPr/>
-        </p:nvSpPr>
-        <p:spPr>
-          <a:xfrm>
-            <a:off x="274320" y="1170432"/>
-            <a:ext cx="11640312" cy="27432"/>
-          </a:xfrm>
-          <a:prstGeom prst="rect">
-            <a:avLst/>
-          </a:prstGeom>
-          <a:solidFill>
-            <a:srgbClr val="0D9488"/>
-          </a:solidFill>
-          <a:ln>
-            <a:noFill/>
-          </a:ln>
-        </p:spPr>
-        <p:style>
-          <a:lnRef idx="1">
-            <a:schemeClr val="accent1"/>
-          </a:lnRef>
-          <a:fillRef idx="3">
-            <a:schemeClr val="accent1"/>
-          </a:fillRef>
-          <a:effectRef idx="2">
-            <a:schemeClr val="accent1"/>
-          </a:effectRef>
-          <a:fontRef idx="minor">
-            <a:schemeClr val="lt1"/>
-          </a:fontRef>
-        </p:style>
-        <p:txBody>
-          <a:bodyPr rtlCol="0" anchor="ctr"/>
-          <a:lstStyle/>
-          <a:p>
-            <a:pPr algn="ctr"/>
-          </a:p>
-        </p:txBody>
-      </p:sp>
-      <p:sp>
-        <p:nvSpPr>
-          <p:cNvPr id="9" name="TextBox 8"/>
-          <p:cNvSpPr txBox="1"/>
-          <p:nvPr/>
-        </p:nvSpPr>
-        <p:spPr>
-          <a:xfrm>
-            <a:off x="274320" y="1280160"/>
-            <a:ext cx="5669280" cy="5029200"/>
-          </a:xfrm>
-          <a:prstGeom prst="rect">
-            <a:avLst/>
-          </a:prstGeom>
-          <a:noFill/>
-        </p:spPr>
-        <p:txBody>
-          <a:bodyPr wrap="square">
-            <a:spAutoFit/>
-          </a:bodyPr>
-          <a:lstStyle/>
-          <a:p>
-            <a:pPr algn="l"/>
-            <a:r>
-              <a:rPr sz="1100" b="0" i="0">
-                <a:solidFill>
-                  <a:srgbClr val="DCE1E6"/>
-                </a:solidFill>
-              </a:rPr>
-              <a:t>किसी XEN ने IFMS login नहीं किया। DSC बाज़ार के computer centre पर। Operator XEN
-के DSC से Maker, Checker, Approver — तीनों roles निभाता है। IT Act 66C: किसी और
-की digital identity का उपयोग = 3 वर्ष कारावास।</a:t>
-            </a:r>
-          </a:p>
-        </p:txBody>
-      </p:sp>
-      <p:sp>
-        <p:nvSpPr>
-          <p:cNvPr id="10" name="TextBox 9"/>
-          <p:cNvSpPr txBox="1"/>
-          <p:nvPr/>
-        </p:nvSpPr>
-        <p:spPr>
-          <a:xfrm>
-            <a:off x="6217920" y="1280160"/>
-            <a:ext cx="5669280" cy="5029200"/>
-          </a:xfrm>
-          <a:prstGeom prst="rect">
-            <a:avLst/>
-          </a:prstGeom>
-          <a:noFill/>
-        </p:spPr>
-        <p:txBody>
-          <a:bodyPr wrap="square">
-            <a:spAutoFit/>
-          </a:bodyPr>
-          <a:lstStyle/>
-          <a:p>
-            <a:pPr algn="l"/>
-            <a:r>
-              <a:rPr sz="1050" b="0" i="1">
-                <a:solidFill>
-                  <a:srgbClr val="AAB9C3"/>
-                </a:solidFill>
-              </a:rPr>
-              <a:t>No XEN has logged into IFMS. Their Digital Signature Certificates are kept at
-market computer centres. The operator uses the XEN's DSC to sign as Maker,
-Checker, AND Approver. IT Act 66C: using another person's digital identity = 3
-years imprisonment. This crime is happening daily in government offices.</a:t>
-            </a:r>
-          </a:p>
-        </p:txBody>
-      </p:sp>
-      <p:sp>
-        <p:nvSpPr>
-          <p:cNvPr id="11" name="Rectangle 10"/>
-          <p:cNvSpPr/>
-          <p:nvPr/>
-        </p:nvSpPr>
-        <p:spPr>
-          <a:xfrm>
-            <a:off x="6035040" y="1280160"/>
-            <a:ext cx="27432" cy="5029200"/>
-          </a:xfrm>
-          <a:prstGeom prst="rect">
-            <a:avLst/>
-          </a:prstGeom>
-          <a:solidFill>
-            <a:srgbClr val="0D9488"/>
-          </a:solidFill>
-          <a:ln>
-            <a:noFill/>
-          </a:ln>
-        </p:spPr>
-        <p:style>
-          <a:lnRef idx="1">
-            <a:schemeClr val="accent1"/>
-          </a:lnRef>
-          <a:fillRef idx="3">
-            <a:schemeClr val="accent1"/>
-          </a:fillRef>
-          <a:effectRef idx="2">
-            <a:schemeClr val="accent1"/>
-          </a:effectRef>
-          <a:fontRef idx="minor">
-            <a:schemeClr val="lt1"/>
-          </a:fontRef>
-        </p:style>
-        <p:txBody>
-          <a:bodyPr rtlCol="0" anchor="ctr"/>
-          <a:lstStyle/>
-          <a:p>
-            <a:pPr algn="ctr"/>
-          </a:p>
-        </p:txBody>
-      </p:sp>
-      <p:sp>
-        <p:nvSpPr>
-          <p:cNvPr id="12" name="TextBox 11"/>
-          <p:cNvSpPr txBox="1"/>
-          <p:nvPr/>
-        </p:nvSpPr>
-        <p:spPr>
-          <a:xfrm>
-            <a:off x="10972800" y="6492240"/>
-            <a:ext cx="1097280" cy="274320"/>
-          </a:xfrm>
-          <a:prstGeom prst="rect">
-            <a:avLst/>
-          </a:prstGeom>
-          <a:noFill/>
-        </p:spPr>
-        <p:txBody>
-          <a:bodyPr wrap="square">
-            <a:spAutoFit/>
-          </a:bodyPr>
-          <a:lstStyle/>
-          <a:p>
-            <a:pPr algn="r"/>
-            <a:r>
-              <a:rPr sz="800" b="0" i="0">
-                <a:solidFill>
-                  <a:srgbClr val="64788C"/>
-                </a:solidFill>
-              </a:rPr>
-              <a:t>11 / 17</a:t>
+              <a:t>Slide 11 / 17</a:t>
             </a:r>
           </a:p>
         </p:txBody>
@@ -4545,8 +4543,8 @@
         </p:nvSpPr>
         <p:spPr>
           <a:xfrm>
-            <a:off x="274320" y="164592"/>
-            <a:ext cx="1005840" cy="411480"/>
+            <a:off x="274320" y="137160"/>
+            <a:ext cx="1005840" cy="402336"/>
           </a:xfrm>
           <a:prstGeom prst="rect">
             <a:avLst/>
@@ -4588,8 +4586,8 @@
         </p:nvSpPr>
         <p:spPr>
           <a:xfrm>
-            <a:off x="274320" y="164592"/>
-            <a:ext cx="1005840" cy="411480"/>
+            <a:off x="274320" y="137160"/>
+            <a:ext cx="1005840" cy="402336"/>
           </a:xfrm>
           <a:prstGeom prst="rect">
             <a:avLst/>
@@ -4604,7 +4602,7 @@
           <a:p>
             <a:pPr algn="ctr"/>
             <a:r>
-              <a:rPr sz="1100" b="1" i="0">
+              <a:rPr sz="1000" b="1" i="0">
                 <a:solidFill>
                   <a:srgbClr val="FFFFFF"/>
                 </a:solidFill>
@@ -4622,8 +4620,8 @@
         </p:nvSpPr>
         <p:spPr>
           <a:xfrm>
-            <a:off x="1417320" y="137160"/>
-            <a:ext cx="10424160" cy="548640"/>
+            <a:off x="1417320" y="109728"/>
+            <a:ext cx="10424160" cy="530352"/>
           </a:xfrm>
           <a:prstGeom prst="rect">
             <a:avLst/>
@@ -4638,9 +4636,43 @@
           <a:p>
             <a:pPr algn="l"/>
             <a:r>
-              <a:rPr sz="1800" b="1" i="0">
+              <a:rPr sz="1700" b="1" i="0">
                 <a:solidFill>
                   <a:srgbClr val="FFFFFF"/>
+                </a:solidFill>
+              </a:rPr>
+              <a:t>1 August 2026 — 4 Documented Bugs — Official Complaint Unanswered</a:t>
+            </a:r>
+          </a:p>
+        </p:txBody>
+      </p:sp>
+      <p:sp>
+        <p:nvSpPr>
+          <p:cNvPr id="7" name="TextBox 6"/>
+          <p:cNvSpPr txBox="1"/>
+          <p:nvPr/>
+        </p:nvSpPr>
+        <p:spPr>
+          <a:xfrm>
+            <a:off x="1417320" y="612648"/>
+            <a:ext cx="10424160" cy="402336"/>
+          </a:xfrm>
+          <a:prstGeom prst="rect">
+            <a:avLst/>
+          </a:prstGeom>
+          <a:noFill/>
+        </p:spPr>
+        <p:txBody>
+          <a:bodyPr wrap="square">
+            <a:spAutoFit/>
+          </a:bodyPr>
+          <a:lstStyle/>
+          <a:p>
+            <a:pPr algn="l"/>
+            <a:r>
+              <a:rPr sz="1150" b="1" i="0">
+                <a:solidFill>
+                  <a:srgbClr val="A0C8DC"/>
                 </a:solidFill>
               </a:rPr>
               <a:t>1 August 2026 — Portal Status: 4 Documented Bugs</a:t>
@@ -4650,47 +4682,13 @@
       </p:sp>
       <p:sp>
         <p:nvSpPr>
-          <p:cNvPr id="7" name="TextBox 6"/>
-          <p:cNvSpPr txBox="1"/>
-          <p:nvPr/>
-        </p:nvSpPr>
-        <p:spPr>
-          <a:xfrm>
-            <a:off x="1417320" y="658368"/>
-            <a:ext cx="10424160" cy="411480"/>
-          </a:xfrm>
-          <a:prstGeom prst="rect">
-            <a:avLst/>
-          </a:prstGeom>
-          <a:noFill/>
-        </p:spPr>
-        <p:txBody>
-          <a:bodyPr wrap="square">
-            <a:spAutoFit/>
-          </a:bodyPr>
-          <a:lstStyle/>
-          <a:p>
-            <a:pPr algn="l"/>
-            <a:r>
-              <a:rPr sz="1200" b="1" i="0">
-                <a:solidFill>
-                  <a:srgbClr val="A0C8DC"/>
-                </a:solidFill>
-              </a:rPr>
-              <a:t>1 August 2026 — Portal Status: 4 Documented Bugs</a:t>
-            </a:r>
-          </a:p>
-        </p:txBody>
-      </p:sp>
-      <p:sp>
-        <p:nvSpPr>
           <p:cNvPr id="8" name="Rectangle 7"/>
           <p:cNvSpPr/>
           <p:nvPr/>
         </p:nvSpPr>
         <p:spPr>
           <a:xfrm>
-            <a:off x="274320" y="1170432"/>
+            <a:off x="274320" y="1133856"/>
             <a:ext cx="11640312" cy="27432"/>
           </a:xfrm>
           <a:prstGeom prst="rect">
@@ -4733,8 +4731,8 @@
         </p:nvSpPr>
         <p:spPr>
           <a:xfrm>
-            <a:off x="274320" y="1280160"/>
-            <a:ext cx="5669280" cy="5029200"/>
+            <a:off x="274320" y="1234440"/>
+            <a:ext cx="5669280" cy="5120640"/>
           </a:xfrm>
           <a:prstGeom prst="rect">
             <a:avLst/>
@@ -4749,14 +4747,14 @@
           <a:p>
             <a:pPr algn="l"/>
             <a:r>
-              <a:rPr sz="1100" b="0" i="0">
-                <a:solidFill>
-                  <a:srgbClr val="DCE1E6"/>
+              <a:rPr sz="1050" b="0" i="0">
+                <a:solidFill>
+                  <a:srgbClr val="DAE0E6"/>
                 </a:solidFill>
               </a:rPr>
-              <a:t>Official complaint: employeehelpdesk.ifms@rajasthan.gov.in — कोई reply नहीं। Bug
-1: Vendor list अधूरी। Bug 2: Security Refund balance absent। Bug 3: July Report
-non-responsive। Bug 4: Disbursement Engine page blank।</a:t>
+              <a:t>Complaint email: employeehelpdesk.ifms@rajasthan.gov.in — कोई reply नहीं। Bug
+1: Vendor list अधूरी। Bug 2: Security Refund balance absent। Bug 3: July
+Report non-responsive। Bug 4: Disbursement Engine blank।</a:t>
             </a:r>
           </a:p>
         </p:txBody>
@@ -4769,8 +4767,8 @@
         </p:nvSpPr>
         <p:spPr>
           <a:xfrm>
-            <a:off x="6217920" y="1280160"/>
-            <a:ext cx="5669280" cy="5029200"/>
+            <a:off x="6217920" y="1234440"/>
+            <a:ext cx="5669280" cy="5120640"/>
           </a:xfrm>
           <a:prstGeom prst="rect">
             <a:avLst/>
@@ -4785,15 +4783,15 @@
           <a:p>
             <a:pPr algn="l"/>
             <a:r>
-              <a:rPr sz="1050" b="0" i="1">
-                <a:solidFill>
-                  <a:srgbClr val="AAB9C3"/>
+              <a:rPr sz="1000" b="0" i="1">
+                <a:solidFill>
+                  <a:srgbClr val="A8B9C3"/>
                 </a:solidFill>
               </a:rPr>
-              <a:t>Official complaint email to employeehelpdesk.ifms@rajasthan.gov.in — no reply.
-Bug #1: Vendor selection list incomplete, not alphabetical. Bug #2: Security
-Refund balance not showing. Bug #3: July Monthly Report non-responsive. Bug #4:
-Disbursement Engine WAM page blank.</a:t>
+              <a:t>Official complaint to employeehelpdesk.ifms@rajasthan.gov.in — no reply. Bug
+1: Vendor selection list incomplete, not alphabetical. Bug 2: Security Refund
+balance not showing. Bug 3: July Monthly Report section non-responsive. Bug 4:
+Disbursement Engine WAM page completely blank.</a:t>
             </a:r>
           </a:p>
         </p:txBody>
@@ -4806,8 +4804,8 @@
         </p:nvSpPr>
         <p:spPr>
           <a:xfrm>
-            <a:off x="6035040" y="1280160"/>
-            <a:ext cx="27432" cy="5029200"/>
+            <a:off x="6035040" y="1234440"/>
+            <a:ext cx="27432" cy="5120640"/>
           </a:xfrm>
           <a:prstGeom prst="rect">
             <a:avLst/>
@@ -4849,8 +4847,8 @@
         </p:nvSpPr>
         <p:spPr>
           <a:xfrm>
-            <a:off x="10972800" y="6492240"/>
-            <a:ext cx="1097280" cy="274320"/>
+            <a:off x="10881360" y="6492240"/>
+            <a:ext cx="1188720" cy="274320"/>
           </a:xfrm>
           <a:prstGeom prst="rect">
             <a:avLst/>
@@ -4867,10 +4865,10 @@
             <a:r>
               <a:rPr sz="800" b="0" i="0">
                 <a:solidFill>
-                  <a:srgbClr val="64788C"/>
+                  <a:srgbClr val="647382"/>
                 </a:solidFill>
               </a:rPr>
-              <a:t>12 / 17</a:t>
+              <a:t>Slide 12 / 17</a:t>
             </a:r>
           </a:p>
         </p:txBody>
@@ -4884,456 +4882,6 @@
 </file>
 
 <file path=ppt/slides/slide13.xml><?xml version="1.0" encoding="utf-8"?>
-<p:sld xmlns:a="http://schemas.openxmlformats.org/drawingml/2006/main" xmlns:p="http://schemas.openxmlformats.org/presentationml/2006/main" xmlns:r="http://schemas.openxmlformats.org/officeDocument/2006/relationships">
-  <p:cSld>
-    <p:bg>
-      <p:bgPr>
-        <a:solidFill>
-          <a:srgbClr val="1E3A5F"/>
-        </a:solidFill>
-        <a:effectLst/>
-      </p:bgPr>
-    </p:bg>
-    <p:spTree>
-      <p:nvGrpSpPr>
-        <p:cNvPr id="1" name=""/>
-        <p:cNvGrpSpPr/>
-        <p:nvPr/>
-      </p:nvGrpSpPr>
-      <p:grpSpPr/>
-      <p:sp>
-        <p:nvSpPr>
-          <p:cNvPr id="2" name="Rectangle 1"/>
-          <p:cNvSpPr/>
-          <p:nvPr/>
-        </p:nvSpPr>
-        <p:spPr>
-          <a:xfrm>
-            <a:off x="0" y="0"/>
-            <a:ext cx="12188952" cy="64008"/>
-          </a:xfrm>
-          <a:prstGeom prst="rect">
-            <a:avLst/>
-          </a:prstGeom>
-          <a:solidFill>
-            <a:srgbClr val="0D9488"/>
-          </a:solidFill>
-          <a:ln>
-            <a:noFill/>
-          </a:ln>
-        </p:spPr>
-        <p:style>
-          <a:lnRef idx="1">
-            <a:schemeClr val="accent1"/>
-          </a:lnRef>
-          <a:fillRef idx="3">
-            <a:schemeClr val="accent1"/>
-          </a:fillRef>
-          <a:effectRef idx="2">
-            <a:schemeClr val="accent1"/>
-          </a:effectRef>
-          <a:fontRef idx="minor">
-            <a:schemeClr val="lt1"/>
-          </a:fontRef>
-        </p:style>
-        <p:txBody>
-          <a:bodyPr rtlCol="0" anchor="ctr"/>
-          <a:lstStyle/>
-          <a:p>
-            <a:pPr algn="ctr"/>
-          </a:p>
-        </p:txBody>
-      </p:sp>
-      <p:sp>
-        <p:nvSpPr>
-          <p:cNvPr id="3" name="Rectangle 2"/>
-          <p:cNvSpPr/>
-          <p:nvPr/>
-        </p:nvSpPr>
-        <p:spPr>
-          <a:xfrm>
-            <a:off x="0" y="6793992"/>
-            <a:ext cx="12188952" cy="64008"/>
-          </a:xfrm>
-          <a:prstGeom prst="rect">
-            <a:avLst/>
-          </a:prstGeom>
-          <a:solidFill>
-            <a:srgbClr val="0D9488"/>
-          </a:solidFill>
-          <a:ln>
-            <a:noFill/>
-          </a:ln>
-        </p:spPr>
-        <p:style>
-          <a:lnRef idx="1">
-            <a:schemeClr val="accent1"/>
-          </a:lnRef>
-          <a:fillRef idx="3">
-            <a:schemeClr val="accent1"/>
-          </a:fillRef>
-          <a:effectRef idx="2">
-            <a:schemeClr val="accent1"/>
-          </a:effectRef>
-          <a:fontRef idx="minor">
-            <a:schemeClr val="lt1"/>
-          </a:fontRef>
-        </p:style>
-        <p:txBody>
-          <a:bodyPr rtlCol="0" anchor="ctr"/>
-          <a:lstStyle/>
-          <a:p>
-            <a:pPr algn="ctr"/>
-          </a:p>
-        </p:txBody>
-      </p:sp>
-      <p:sp>
-        <p:nvSpPr>
-          <p:cNvPr id="4" name="Rectangle 3"/>
-          <p:cNvSpPr/>
-          <p:nvPr/>
-        </p:nvSpPr>
-        <p:spPr>
-          <a:xfrm>
-            <a:off x="274320" y="164592"/>
-            <a:ext cx="1005840" cy="411480"/>
-          </a:xfrm>
-          <a:prstGeom prst="rect">
-            <a:avLst/>
-          </a:prstGeom>
-          <a:solidFill>
-            <a:srgbClr val="0D9488"/>
-          </a:solidFill>
-          <a:ln>
-            <a:noFill/>
-          </a:ln>
-        </p:spPr>
-        <p:style>
-          <a:lnRef idx="1">
-            <a:schemeClr val="accent1"/>
-          </a:lnRef>
-          <a:fillRef idx="3">
-            <a:schemeClr val="accent1"/>
-          </a:fillRef>
-          <a:effectRef idx="2">
-            <a:schemeClr val="accent1"/>
-          </a:effectRef>
-          <a:fontRef idx="minor">
-            <a:schemeClr val="lt1"/>
-          </a:fontRef>
-        </p:style>
-        <p:txBody>
-          <a:bodyPr rtlCol="0" anchor="ctr"/>
-          <a:lstStyle/>
-          <a:p>
-            <a:pPr algn="ctr"/>
-          </a:p>
-        </p:txBody>
-      </p:sp>
-      <p:sp>
-        <p:nvSpPr>
-          <p:cNvPr id="5" name="TextBox 4"/>
-          <p:cNvSpPr txBox="1"/>
-          <p:nvPr/>
-        </p:nvSpPr>
-        <p:spPr>
-          <a:xfrm>
-            <a:off x="274320" y="164592"/>
-            <a:ext cx="1005840" cy="411480"/>
-          </a:xfrm>
-          <a:prstGeom prst="rect">
-            <a:avLst/>
-          </a:prstGeom>
-          <a:noFill/>
-        </p:spPr>
-        <p:txBody>
-          <a:bodyPr wrap="square">
-            <a:spAutoFit/>
-          </a:bodyPr>
-          <a:lstStyle/>
-          <a:p>
-            <a:pPr algn="ctr"/>
-            <a:r>
-              <a:rPr sz="1100" b="1" i="0">
-                <a:solidFill>
-                  <a:srgbClr val="FFFFFF"/>
-                </a:solidFill>
-              </a:rPr>
-              <a:t>Ch.8</a:t>
-            </a:r>
-          </a:p>
-        </p:txBody>
-      </p:sp>
-      <p:sp>
-        <p:nvSpPr>
-          <p:cNvPr id="6" name="TextBox 5"/>
-          <p:cNvSpPr txBox="1"/>
-          <p:nvPr/>
-        </p:nvSpPr>
-        <p:spPr>
-          <a:xfrm>
-            <a:off x="1417320" y="137160"/>
-            <a:ext cx="10424160" cy="548640"/>
-          </a:xfrm>
-          <a:prstGeom prst="rect">
-            <a:avLst/>
-          </a:prstGeom>
-          <a:noFill/>
-        </p:spPr>
-        <p:txBody>
-          <a:bodyPr wrap="square">
-            <a:spAutoFit/>
-          </a:bodyPr>
-          <a:lstStyle/>
-          <a:p>
-            <a:pPr algn="l"/>
-            <a:r>
-              <a:rPr sz="1800" b="1" i="0">
-                <a:solidFill>
-                  <a:srgbClr val="FFFFFF"/>
-                </a:solidFill>
-              </a:rPr>
-              <a:t>IFMS Helpline: संपर्क नहीं, समाधान नहीं</a:t>
-            </a:r>
-          </a:p>
-        </p:txBody>
-      </p:sp>
-      <p:sp>
-        <p:nvSpPr>
-          <p:cNvPr id="7" name="TextBox 6"/>
-          <p:cNvSpPr txBox="1"/>
-          <p:nvPr/>
-        </p:nvSpPr>
-        <p:spPr>
-          <a:xfrm>
-            <a:off x="1417320" y="658368"/>
-            <a:ext cx="10424160" cy="411480"/>
-          </a:xfrm>
-          <a:prstGeom prst="rect">
-            <a:avLst/>
-          </a:prstGeom>
-          <a:noFill/>
-        </p:spPr>
-        <p:txBody>
-          <a:bodyPr wrap="square">
-            <a:spAutoFit/>
-          </a:bodyPr>
-          <a:lstStyle/>
-          <a:p>
-            <a:pPr algn="l"/>
-            <a:r>
-              <a:rPr sz="1200" b="1" i="0">
-                <a:solidFill>
-                  <a:srgbClr val="A0C8DC"/>
-                </a:solidFill>
-              </a:rPr>
-              <a:t>IFMS Helpline: No Contact, No Solution</a:t>
-            </a:r>
-          </a:p>
-        </p:txBody>
-      </p:sp>
-      <p:sp>
-        <p:nvSpPr>
-          <p:cNvPr id="8" name="Rectangle 7"/>
-          <p:cNvSpPr/>
-          <p:nvPr/>
-        </p:nvSpPr>
-        <p:spPr>
-          <a:xfrm>
-            <a:off x="274320" y="1170432"/>
-            <a:ext cx="11640312" cy="27432"/>
-          </a:xfrm>
-          <a:prstGeom prst="rect">
-            <a:avLst/>
-          </a:prstGeom>
-          <a:solidFill>
-            <a:srgbClr val="0D9488"/>
-          </a:solidFill>
-          <a:ln>
-            <a:noFill/>
-          </a:ln>
-        </p:spPr>
-        <p:style>
-          <a:lnRef idx="1">
-            <a:schemeClr val="accent1"/>
-          </a:lnRef>
-          <a:fillRef idx="3">
-            <a:schemeClr val="accent1"/>
-          </a:fillRef>
-          <a:effectRef idx="2">
-            <a:schemeClr val="accent1"/>
-          </a:effectRef>
-          <a:fontRef idx="minor">
-            <a:schemeClr val="lt1"/>
-          </a:fontRef>
-        </p:style>
-        <p:txBody>
-          <a:bodyPr rtlCol="0" anchor="ctr"/>
-          <a:lstStyle/>
-          <a:p>
-            <a:pPr algn="ctr"/>
-          </a:p>
-        </p:txBody>
-      </p:sp>
-      <p:sp>
-        <p:nvSpPr>
-          <p:cNvPr id="9" name="TextBox 8"/>
-          <p:cNvSpPr txBox="1"/>
-          <p:nvPr/>
-        </p:nvSpPr>
-        <p:spPr>
-          <a:xfrm>
-            <a:off x="274320" y="1280160"/>
-            <a:ext cx="5669280" cy="5029200"/>
-          </a:xfrm>
-          <a:prstGeom prst="rect">
-            <a:avLst/>
-          </a:prstGeom>
-          <a:noFill/>
-        </p:spPr>
-        <p:txBody>
-          <a:bodyPr wrap="square">
-            <a:spAutoFit/>
-          </a:bodyPr>
-          <a:lstStyle/>
-          <a:p>
-            <a:pPr algn="l"/>
-            <a:r>
-              <a:rPr sz="1100" b="0" i="0">
-                <a:solidFill>
-                  <a:srgbClr val="DCE1E6"/>
-                </a:solidFill>
-              </a:rPr>
-              <a:t>सभी IFMS helpline numbers non-responsive। Email:
-employeehelpdesk.ifms@rajasthan.gov.in — silent। NIC support desk काम नहीं करता।
-कोई escalation matrix नहीं। Officers WhatsApp groups पर निर्भर।</a:t>
-            </a:r>
-          </a:p>
-        </p:txBody>
-      </p:sp>
-      <p:sp>
-        <p:nvSpPr>
-          <p:cNvPr id="10" name="TextBox 9"/>
-          <p:cNvSpPr txBox="1"/>
-          <p:nvPr/>
-        </p:nvSpPr>
-        <p:spPr>
-          <a:xfrm>
-            <a:off x="6217920" y="1280160"/>
-            <a:ext cx="5669280" cy="5029200"/>
-          </a:xfrm>
-          <a:prstGeom prst="rect">
-            <a:avLst/>
-          </a:prstGeom>
-          <a:noFill/>
-        </p:spPr>
-        <p:txBody>
-          <a:bodyPr wrap="square">
-            <a:spAutoFit/>
-          </a:bodyPr>
-          <a:lstStyle/>
-          <a:p>
-            <a:pPr algn="l"/>
-            <a:r>
-              <a:rPr sz="1050" b="0" i="1">
-                <a:solidFill>
-                  <a:srgbClr val="AAB9C3"/>
-                </a:solidFill>
-              </a:rPr>
-              <a:t>All IFMS 3.0 helpline numbers non-responsive. Official email
-employeehelpdesk.ifms@rajasthan.gov.in silent. NIC support desk not functional.
-No escalation matrix. No dedicated 24x7 toll-free line. Officers resort to
-unofficial WhatsApp groups.</a:t>
-            </a:r>
-          </a:p>
-        </p:txBody>
-      </p:sp>
-      <p:sp>
-        <p:nvSpPr>
-          <p:cNvPr id="11" name="Rectangle 10"/>
-          <p:cNvSpPr/>
-          <p:nvPr/>
-        </p:nvSpPr>
-        <p:spPr>
-          <a:xfrm>
-            <a:off x="6035040" y="1280160"/>
-            <a:ext cx="27432" cy="5029200"/>
-          </a:xfrm>
-          <a:prstGeom prst="rect">
-            <a:avLst/>
-          </a:prstGeom>
-          <a:solidFill>
-            <a:srgbClr val="0D9488"/>
-          </a:solidFill>
-          <a:ln>
-            <a:noFill/>
-          </a:ln>
-        </p:spPr>
-        <p:style>
-          <a:lnRef idx="1">
-            <a:schemeClr val="accent1"/>
-          </a:lnRef>
-          <a:fillRef idx="3">
-            <a:schemeClr val="accent1"/>
-          </a:fillRef>
-          <a:effectRef idx="2">
-            <a:schemeClr val="accent1"/>
-          </a:effectRef>
-          <a:fontRef idx="minor">
-            <a:schemeClr val="lt1"/>
-          </a:fontRef>
-        </p:style>
-        <p:txBody>
-          <a:bodyPr rtlCol="0" anchor="ctr"/>
-          <a:lstStyle/>
-          <a:p>
-            <a:pPr algn="ctr"/>
-          </a:p>
-        </p:txBody>
-      </p:sp>
-      <p:sp>
-        <p:nvSpPr>
-          <p:cNvPr id="12" name="TextBox 11"/>
-          <p:cNvSpPr txBox="1"/>
-          <p:nvPr/>
-        </p:nvSpPr>
-        <p:spPr>
-          <a:xfrm>
-            <a:off x="10972800" y="6492240"/>
-            <a:ext cx="1097280" cy="274320"/>
-          </a:xfrm>
-          <a:prstGeom prst="rect">
-            <a:avLst/>
-          </a:prstGeom>
-          <a:noFill/>
-        </p:spPr>
-        <p:txBody>
-          <a:bodyPr wrap="square">
-            <a:spAutoFit/>
-          </a:bodyPr>
-          <a:lstStyle/>
-          <a:p>
-            <a:pPr algn="r"/>
-            <a:r>
-              <a:rPr sz="800" b="0" i="0">
-                <a:solidFill>
-                  <a:srgbClr val="64788C"/>
-                </a:solidFill>
-              </a:rPr>
-              <a:t>13 / 17</a:t>
-            </a:r>
-          </a:p>
-        </p:txBody>
-      </p:sp>
-    </p:spTree>
-  </p:cSld>
-  <p:clrMapOvr>
-    <a:masterClrMapping/>
-  </p:clrMapOvr>
-</p:sld>
-</file>
-
-<file path=ppt/slides/slide14.xml><?xml version="1.0" encoding="utf-8"?>
 <p:sld xmlns:a="http://schemas.openxmlformats.org/drawingml/2006/main" xmlns:p="http://schemas.openxmlformats.org/presentationml/2006/main" xmlns:r="http://schemas.openxmlformats.org/officeDocument/2006/relationships">
   <p:cSld>
     <p:bg>
@@ -5445,8 +4993,8 @@
         </p:nvSpPr>
         <p:spPr>
           <a:xfrm>
-            <a:off x="274320" y="164592"/>
-            <a:ext cx="1005840" cy="411480"/>
+            <a:off x="274320" y="137160"/>
+            <a:ext cx="1005840" cy="402336"/>
           </a:xfrm>
           <a:prstGeom prst="rect">
             <a:avLst/>
@@ -5488,8 +5036,8 @@
         </p:nvSpPr>
         <p:spPr>
           <a:xfrm>
-            <a:off x="274320" y="164592"/>
-            <a:ext cx="1005840" cy="411480"/>
+            <a:off x="274320" y="137160"/>
+            <a:ext cx="1005840" cy="402336"/>
           </a:xfrm>
           <a:prstGeom prst="rect">
             <a:avLst/>
@@ -5504,12 +5052,12 @@
           <a:p>
             <a:pPr algn="ctr"/>
             <a:r>
-              <a:rPr sz="1100" b="1" i="0">
+              <a:rPr sz="1000" b="1" i="0">
                 <a:solidFill>
                   <a:srgbClr val="FFFFFF"/>
                 </a:solidFill>
               </a:rPr>
-              <a:t>Ch.8B</a:t>
+              <a:t>Ch.8</a:t>
             </a:r>
           </a:p>
         </p:txBody>
@@ -5522,8 +5070,8 @@
         </p:nvSpPr>
         <p:spPr>
           <a:xfrm>
-            <a:off x="1417320" y="137160"/>
-            <a:ext cx="10424160" cy="548640"/>
+            <a:off x="1417320" y="109728"/>
+            <a:ext cx="10424160" cy="530352"/>
           </a:xfrm>
           <a:prstGeom prst="rect">
             <a:avLst/>
@@ -5538,12 +5086,12 @@
           <a:p>
             <a:pPr algn="l"/>
             <a:r>
-              <a:rPr sz="1800" b="1" i="0">
+              <a:rPr sz="1700" b="1" i="0">
                 <a:solidFill>
                   <a:srgbClr val="FFFFFF"/>
                 </a:solidFill>
               </a:rPr>
-              <a:t>~200 रद्द अनुबंध — वसूली शून्य: नामित ठेकेदार बेखौफ</a:t>
+              <a:t>IFMS Helpline — संपर्क नहीं, समाधान नहीं</a:t>
             </a:r>
           </a:p>
         </p:txBody>
@@ -5556,8 +5104,8 @@
         </p:nvSpPr>
         <p:spPr>
           <a:xfrm>
-            <a:off x="1417320" y="658368"/>
-            <a:ext cx="10424160" cy="411480"/>
+            <a:off x="1417320" y="612648"/>
+            <a:ext cx="10424160" cy="402336"/>
           </a:xfrm>
           <a:prstGeom prst="rect">
             <a:avLst/>
@@ -5572,12 +5120,12 @@
           <a:p>
             <a:pPr algn="l"/>
             <a:r>
-              <a:rPr sz="1200" b="1" i="0">
+              <a:rPr sz="1150" b="1" i="0">
                 <a:solidFill>
                   <a:srgbClr val="A0C8DC"/>
                 </a:solidFill>
               </a:rPr>
-              <a:t>~200 Rescinded Contracts — Zero Recovery: Named Defaulters Walk Free</a:t>
+              <a:t>IFMS Helpline — No Contact, No Solution</a:t>
             </a:r>
           </a:p>
         </p:txBody>
@@ -5590,7 +5138,7 @@
         </p:nvSpPr>
         <p:spPr>
           <a:xfrm>
-            <a:off x="274320" y="1170432"/>
+            <a:off x="274320" y="1133856"/>
             <a:ext cx="11640312" cy="27432"/>
           </a:xfrm>
           <a:prstGeom prst="rect">
@@ -5633,8 +5181,8 @@
         </p:nvSpPr>
         <p:spPr>
           <a:xfrm>
-            <a:off x="274320" y="1280160"/>
-            <a:ext cx="5669280" cy="5029200"/>
+            <a:off x="274320" y="1234440"/>
+            <a:ext cx="5669280" cy="5120640"/>
           </a:xfrm>
           <a:prstGeom prst="rect">
             <a:avLst/>
@@ -5649,14 +5197,13 @@
           <a:p>
             <a:pPr algn="l"/>
             <a:r>
-              <a:rPr sz="1100" b="0" i="0">
-                <a:solidFill>
-                  <a:srgbClr val="DCE1E6"/>
+              <a:rPr sz="1050" b="0" i="0">
+                <a:solidFill>
+                  <a:srgbClr val="DAE0E6"/>
                 </a:solidFill>
               </a:rPr>
-              <a:t>~200 रद्द अनुबंध — Risk and Cost tenders — recovery monitoring शून्य। भैरवजी
-Bridge बाँसवाड़ा, Kotada Road उदयपुर, Gannon Dunkerlay — तीनों में वसूली शून्य।
-Rescission केवल कागज़ी खतरा। Blacklist enforce नहीं।</a:t>
+              <a:t>Helpline numbers non-responsive। Email silent। NIC support ठप। Escalation
+matrix नहीं। Officers WhatsApp groups पर।</a:t>
             </a:r>
           </a:p>
         </p:txBody>
@@ -5669,8 +5216,8 @@
         </p:nvSpPr>
         <p:spPr>
           <a:xfrm>
-            <a:off x="6217920" y="1280160"/>
-            <a:ext cx="5669280" cy="5029200"/>
+            <a:off x="6217920" y="1234440"/>
+            <a:ext cx="5669280" cy="5120640"/>
           </a:xfrm>
           <a:prstGeom prst="rect">
             <a:avLst/>
@@ -5685,16 +5232,15 @@
           <a:p>
             <a:pPr algn="l"/>
             <a:r>
-              <a:rPr sz="1050" b="0" i="1">
-                <a:solidFill>
-                  <a:srgbClr val="AAB9C3"/>
+              <a:rPr sz="1000" b="0" i="1">
+                <a:solidFill>
+                  <a:srgbClr val="A8B9C3"/>
                 </a:solidFill>
               </a:rPr>
-              <a:t>Three named cases: Bhairavji Bridge Banswara (rescinded, nil recovery), Kotada
-Road Udaipur (rescinded, nil recovery), Gannon Dunkerlay &amp; Co (rescinded,
-substantial dues unexercised — company walked free). State-wide pattern: ~200
-rescissions, zero systematic recovery monitoring. Rescission is a paper threat.
-No blacklist enforced. Taxpayer pays twice.</a:t>
+              <a:t>All helpline numbers non-responsive. Official email
+employeehelpdesk.ifms@rajasthan.gov.in silent — formal complaint with 4 bugs +
+screenshots sent, zero reply. NIC support desk non-functional. No escalation
+matrix. No dedicated 24x7 line. Officers resort to WhatsApp groups.</a:t>
             </a:r>
           </a:p>
         </p:txBody>
@@ -5707,8 +5253,8 @@
         </p:nvSpPr>
         <p:spPr>
           <a:xfrm>
-            <a:off x="6035040" y="1280160"/>
-            <a:ext cx="27432" cy="5029200"/>
+            <a:off x="6035040" y="1234440"/>
+            <a:ext cx="27432" cy="5120640"/>
           </a:xfrm>
           <a:prstGeom prst="rect">
             <a:avLst/>
@@ -5750,8 +5296,8 @@
         </p:nvSpPr>
         <p:spPr>
           <a:xfrm>
-            <a:off x="10972800" y="6492240"/>
-            <a:ext cx="1097280" cy="274320"/>
+            <a:off x="10881360" y="6492240"/>
+            <a:ext cx="1188720" cy="274320"/>
           </a:xfrm>
           <a:prstGeom prst="rect">
             <a:avLst/>
@@ -5768,10 +5314,10 @@
             <a:r>
               <a:rPr sz="800" b="0" i="0">
                 <a:solidFill>
-                  <a:srgbClr val="64788C"/>
+                  <a:srgbClr val="647382"/>
                 </a:solidFill>
               </a:rPr>
-              <a:t>14 / 17</a:t>
+              <a:t>Slide 13 / 17</a:t>
             </a:r>
           </a:p>
         </p:txBody>
@@ -5784,471 +5330,7 @@
 </p:sld>
 </file>
 
-<file path=ppt/slides/slide15.xml><?xml version="1.0" encoding="utf-8"?>
-<p:sld xmlns:a="http://schemas.openxmlformats.org/drawingml/2006/main" xmlns:p="http://schemas.openxmlformats.org/presentationml/2006/main" xmlns:r="http://schemas.openxmlformats.org/officeDocument/2006/relationships">
-  <p:cSld>
-    <p:bg>
-      <p:bgPr>
-        <a:solidFill>
-          <a:srgbClr val="122442"/>
-        </a:solidFill>
-        <a:effectLst/>
-      </p:bgPr>
-    </p:bg>
-    <p:spTree>
-      <p:nvGrpSpPr>
-        <p:cNvPr id="1" name=""/>
-        <p:cNvGrpSpPr/>
-        <p:nvPr/>
-      </p:nvGrpSpPr>
-      <p:grpSpPr/>
-      <p:sp>
-        <p:nvSpPr>
-          <p:cNvPr id="2" name="Rectangle 1"/>
-          <p:cNvSpPr/>
-          <p:nvPr/>
-        </p:nvSpPr>
-        <p:spPr>
-          <a:xfrm>
-            <a:off x="0" y="0"/>
-            <a:ext cx="12188952" cy="64008"/>
-          </a:xfrm>
-          <a:prstGeom prst="rect">
-            <a:avLst/>
-          </a:prstGeom>
-          <a:solidFill>
-            <a:srgbClr val="0D9488"/>
-          </a:solidFill>
-          <a:ln>
-            <a:noFill/>
-          </a:ln>
-        </p:spPr>
-        <p:style>
-          <a:lnRef idx="1">
-            <a:schemeClr val="accent1"/>
-          </a:lnRef>
-          <a:fillRef idx="3">
-            <a:schemeClr val="accent1"/>
-          </a:fillRef>
-          <a:effectRef idx="2">
-            <a:schemeClr val="accent1"/>
-          </a:effectRef>
-          <a:fontRef idx="minor">
-            <a:schemeClr val="lt1"/>
-          </a:fontRef>
-        </p:style>
-        <p:txBody>
-          <a:bodyPr rtlCol="0" anchor="ctr"/>
-          <a:lstStyle/>
-          <a:p>
-            <a:pPr algn="ctr"/>
-          </a:p>
-        </p:txBody>
-      </p:sp>
-      <p:sp>
-        <p:nvSpPr>
-          <p:cNvPr id="3" name="Rectangle 2"/>
-          <p:cNvSpPr/>
-          <p:nvPr/>
-        </p:nvSpPr>
-        <p:spPr>
-          <a:xfrm>
-            <a:off x="0" y="6793992"/>
-            <a:ext cx="12188952" cy="64008"/>
-          </a:xfrm>
-          <a:prstGeom prst="rect">
-            <a:avLst/>
-          </a:prstGeom>
-          <a:solidFill>
-            <a:srgbClr val="0D9488"/>
-          </a:solidFill>
-          <a:ln>
-            <a:noFill/>
-          </a:ln>
-        </p:spPr>
-        <p:style>
-          <a:lnRef idx="1">
-            <a:schemeClr val="accent1"/>
-          </a:lnRef>
-          <a:fillRef idx="3">
-            <a:schemeClr val="accent1"/>
-          </a:fillRef>
-          <a:effectRef idx="2">
-            <a:schemeClr val="accent1"/>
-          </a:effectRef>
-          <a:fontRef idx="minor">
-            <a:schemeClr val="lt1"/>
-          </a:fontRef>
-        </p:style>
-        <p:txBody>
-          <a:bodyPr rtlCol="0" anchor="ctr"/>
-          <a:lstStyle/>
-          <a:p>
-            <a:pPr algn="ctr"/>
-          </a:p>
-        </p:txBody>
-      </p:sp>
-      <p:sp>
-        <p:nvSpPr>
-          <p:cNvPr id="4" name="Rectangle 3"/>
-          <p:cNvSpPr/>
-          <p:nvPr/>
-        </p:nvSpPr>
-        <p:spPr>
-          <a:xfrm>
-            <a:off x="274320" y="164592"/>
-            <a:ext cx="1005840" cy="411480"/>
-          </a:xfrm>
-          <a:prstGeom prst="rect">
-            <a:avLst/>
-          </a:prstGeom>
-          <a:solidFill>
-            <a:srgbClr val="0D9488"/>
-          </a:solidFill>
-          <a:ln>
-            <a:noFill/>
-          </a:ln>
-        </p:spPr>
-        <p:style>
-          <a:lnRef idx="1">
-            <a:schemeClr val="accent1"/>
-          </a:lnRef>
-          <a:fillRef idx="3">
-            <a:schemeClr val="accent1"/>
-          </a:fillRef>
-          <a:effectRef idx="2">
-            <a:schemeClr val="accent1"/>
-          </a:effectRef>
-          <a:fontRef idx="minor">
-            <a:schemeClr val="lt1"/>
-          </a:fontRef>
-        </p:style>
-        <p:txBody>
-          <a:bodyPr rtlCol="0" anchor="ctr"/>
-          <a:lstStyle/>
-          <a:p>
-            <a:pPr algn="ctr"/>
-          </a:p>
-        </p:txBody>
-      </p:sp>
-      <p:sp>
-        <p:nvSpPr>
-          <p:cNvPr id="5" name="TextBox 4"/>
-          <p:cNvSpPr txBox="1"/>
-          <p:nvPr/>
-        </p:nvSpPr>
-        <p:spPr>
-          <a:xfrm>
-            <a:off x="274320" y="164592"/>
-            <a:ext cx="1005840" cy="411480"/>
-          </a:xfrm>
-          <a:prstGeom prst="rect">
-            <a:avLst/>
-          </a:prstGeom>
-          <a:noFill/>
-        </p:spPr>
-        <p:txBody>
-          <a:bodyPr wrap="square">
-            <a:spAutoFit/>
-          </a:bodyPr>
-          <a:lstStyle/>
-          <a:p>
-            <a:pPr algn="ctr"/>
-            <a:r>
-              <a:rPr sz="1100" b="1" i="0">
-                <a:solidFill>
-                  <a:srgbClr val="FFFFFF"/>
-                </a:solidFill>
-              </a:rPr>
-              <a:t>Ch.8C</a:t>
-            </a:r>
-          </a:p>
-        </p:txBody>
-      </p:sp>
-      <p:sp>
-        <p:nvSpPr>
-          <p:cNvPr id="6" name="TextBox 5"/>
-          <p:cNvSpPr txBox="1"/>
-          <p:nvPr/>
-        </p:nvSpPr>
-        <p:spPr>
-          <a:xfrm>
-            <a:off x="1417320" y="137160"/>
-            <a:ext cx="10424160" cy="548640"/>
-          </a:xfrm>
-          <a:prstGeom prst="rect">
-            <a:avLst/>
-          </a:prstGeom>
-          <a:noFill/>
-        </p:spPr>
-        <p:txBody>
-          <a:bodyPr wrap="square">
-            <a:spAutoFit/>
-          </a:bodyPr>
-          <a:lstStyle/>
-          <a:p>
-            <a:pPr algn="l"/>
-            <a:r>
-              <a:rPr sz="1800" b="1" i="0">
-                <a:solidFill>
-                  <a:srgbClr val="FFFFFF"/>
-                </a:solidFill>
-              </a:rPr>
-              <a:t>Recovery Portal क्यों नहीं? Legal Pursuit क्यों नहीं? — Impunity का Architecture</a:t>
-            </a:r>
-          </a:p>
-        </p:txBody>
-      </p:sp>
-      <p:sp>
-        <p:nvSpPr>
-          <p:cNvPr id="7" name="TextBox 6"/>
-          <p:cNvSpPr txBox="1"/>
-          <p:nvPr/>
-        </p:nvSpPr>
-        <p:spPr>
-          <a:xfrm>
-            <a:off x="1417320" y="658368"/>
-            <a:ext cx="10424160" cy="411480"/>
-          </a:xfrm>
-          <a:prstGeom prst="rect">
-            <a:avLst/>
-          </a:prstGeom>
-          <a:noFill/>
-        </p:spPr>
-        <p:txBody>
-          <a:bodyPr wrap="square">
-            <a:spAutoFit/>
-          </a:bodyPr>
-          <a:lstStyle/>
-          <a:p>
-            <a:pPr algn="l"/>
-            <a:r>
-              <a:rPr sz="1200" b="1" i="0">
-                <a:solidFill>
-                  <a:srgbClr val="A0C8DC"/>
-                </a:solidFill>
-              </a:rPr>
-              <a:t>Why No Digitised Recovery Portal? Why No Legal Pursuit? — Architecture of Impunity</a:t>
-            </a:r>
-          </a:p>
-        </p:txBody>
-      </p:sp>
-      <p:sp>
-        <p:nvSpPr>
-          <p:cNvPr id="8" name="Rectangle 7"/>
-          <p:cNvSpPr/>
-          <p:nvPr/>
-        </p:nvSpPr>
-        <p:spPr>
-          <a:xfrm>
-            <a:off x="274320" y="1170432"/>
-            <a:ext cx="11640312" cy="27432"/>
-          </a:xfrm>
-          <a:prstGeom prst="rect">
-            <a:avLst/>
-          </a:prstGeom>
-          <a:solidFill>
-            <a:srgbClr val="0D9488"/>
-          </a:solidFill>
-          <a:ln>
-            <a:noFill/>
-          </a:ln>
-        </p:spPr>
-        <p:style>
-          <a:lnRef idx="1">
-            <a:schemeClr val="accent1"/>
-          </a:lnRef>
-          <a:fillRef idx="3">
-            <a:schemeClr val="accent1"/>
-          </a:fillRef>
-          <a:effectRef idx="2">
-            <a:schemeClr val="accent1"/>
-          </a:effectRef>
-          <a:fontRef idx="minor">
-            <a:schemeClr val="lt1"/>
-          </a:fontRef>
-        </p:style>
-        <p:txBody>
-          <a:bodyPr rtlCol="0" anchor="ctr"/>
-          <a:lstStyle/>
-          <a:p>
-            <a:pPr algn="ctr"/>
-          </a:p>
-        </p:txBody>
-      </p:sp>
-      <p:sp>
-        <p:nvSpPr>
-          <p:cNvPr id="9" name="TextBox 8"/>
-          <p:cNvSpPr txBox="1"/>
-          <p:nvPr/>
-        </p:nvSpPr>
-        <p:spPr>
-          <a:xfrm>
-            <a:off x="274320" y="1280160"/>
-            <a:ext cx="5669280" cy="5029200"/>
-          </a:xfrm>
-          <a:prstGeom prst="rect">
-            <a:avLst/>
-          </a:prstGeom>
-          <a:noFill/>
-        </p:spPr>
-        <p:txBody>
-          <a:bodyPr wrap="square">
-            <a:spAutoFit/>
-          </a:bodyPr>
-          <a:lstStyle/>
-          <a:p>
-            <a:pPr algn="l"/>
-            <a:r>
-              <a:rPr sz="1100" b="0" i="0">
-                <a:solidFill>
-                  <a:srgbClr val="DCE1E6"/>
-                </a:solidFill>
-              </a:rPr>
-              <a:t>दो अनुत्तरित प्रश्न पूरे तंत्र को उघाड़ते हैं। प्रश्न 1: Digitised Recovery
-Portal क्यों नहीं? 15 वर्षों में नहीं बना — क्योंकि यह portal हर non-recovery को
-visible और attributable बना देता। प्रश्न 2: Legal pursuit और monitoring क्यों
-नहीं? Recovery करना department का legal obligation है। दो उत्तर: A) Gross
-Negligence — governance पतन। B) Complicity — जिस हाथ ने payments किए वही
-recovery रोक रहा है। पाँच-बिंदु framework: 90 दिन में Recovery Portal; 30 दिन
-में legal notice; Litigation Register; Limitation Period alerts; Same-officer
-overlap = automatic ACB referral।</a:t>
-            </a:r>
-          </a:p>
-        </p:txBody>
-      </p:sp>
-      <p:sp>
-        <p:nvSpPr>
-          <p:cNvPr id="10" name="TextBox 9"/>
-          <p:cNvSpPr txBox="1"/>
-          <p:nvPr/>
-        </p:nvSpPr>
-        <p:spPr>
-          <a:xfrm>
-            <a:off x="6217920" y="1280160"/>
-            <a:ext cx="5669280" cy="5029200"/>
-          </a:xfrm>
-          <a:prstGeom prst="rect">
-            <a:avLst/>
-          </a:prstGeom>
-          <a:noFill/>
-        </p:spPr>
-        <p:txBody>
-          <a:bodyPr wrap="square">
-            <a:spAutoFit/>
-          </a:bodyPr>
-          <a:lstStyle/>
-          <a:p>
-            <a:pPr algn="l"/>
-            <a:r>
-              <a:rPr sz="1050" b="0" i="1">
-                <a:solidFill>
-                  <a:srgbClr val="AAB9C3"/>
-                </a:solidFill>
-              </a:rPr>
-              <a:t>Two unanswered questions expose the system. Q1: Why no Digitised Recovery
-Portal? Government has e-Procurement, IFMS, PayManager, NIC capacity. A portal
-could be built in 90 days on IFMS infrastructure — showing every rescinded
-contract, recoverable amount, officer responsible, legal notice status,
-limitation period alerts, and public access. It does not exist because it would
-make every non-recovery visible and attributable to a named officer. Q2: Why no
-legal pursuit or monitoring? Recovery is a legal obligation — not optional. Two
-explanations: A) Gross Negligence — management systems absent. B) Complicity —
-the same officer who processed and paid the contract refuses to initiate
-recovery. That overlap should be automatic ACB referral. Five-point framework:
-Recovery Portal in 90 days; mandatory legal notice in 30 days of rescission;
-litigation register monthly updated; limitation period automatic alerts; same-
-officer overlap triggers ACB referral.</a:t>
-            </a:r>
-          </a:p>
-        </p:txBody>
-      </p:sp>
-      <p:sp>
-        <p:nvSpPr>
-          <p:cNvPr id="11" name="Rectangle 10"/>
-          <p:cNvSpPr/>
-          <p:nvPr/>
-        </p:nvSpPr>
-        <p:spPr>
-          <a:xfrm>
-            <a:off x="6035040" y="1280160"/>
-            <a:ext cx="27432" cy="5029200"/>
-          </a:xfrm>
-          <a:prstGeom prst="rect">
-            <a:avLst/>
-          </a:prstGeom>
-          <a:solidFill>
-            <a:srgbClr val="0D9488"/>
-          </a:solidFill>
-          <a:ln>
-            <a:noFill/>
-          </a:ln>
-        </p:spPr>
-        <p:style>
-          <a:lnRef idx="1">
-            <a:schemeClr val="accent1"/>
-          </a:lnRef>
-          <a:fillRef idx="3">
-            <a:schemeClr val="accent1"/>
-          </a:fillRef>
-          <a:effectRef idx="2">
-            <a:schemeClr val="accent1"/>
-          </a:effectRef>
-          <a:fontRef idx="minor">
-            <a:schemeClr val="lt1"/>
-          </a:fontRef>
-        </p:style>
-        <p:txBody>
-          <a:bodyPr rtlCol="0" anchor="ctr"/>
-          <a:lstStyle/>
-          <a:p>
-            <a:pPr algn="ctr"/>
-          </a:p>
-        </p:txBody>
-      </p:sp>
-      <p:sp>
-        <p:nvSpPr>
-          <p:cNvPr id="12" name="TextBox 11"/>
-          <p:cNvSpPr txBox="1"/>
-          <p:nvPr/>
-        </p:nvSpPr>
-        <p:spPr>
-          <a:xfrm>
-            <a:off x="10972800" y="6492240"/>
-            <a:ext cx="1097280" cy="274320"/>
-          </a:xfrm>
-          <a:prstGeom prst="rect">
-            <a:avLst/>
-          </a:prstGeom>
-          <a:noFill/>
-        </p:spPr>
-        <p:txBody>
-          <a:bodyPr wrap="square">
-            <a:spAutoFit/>
-          </a:bodyPr>
-          <a:lstStyle/>
-          <a:p>
-            <a:pPr algn="r"/>
-            <a:r>
-              <a:rPr sz="800" b="0" i="0">
-                <a:solidFill>
-                  <a:srgbClr val="64788C"/>
-                </a:solidFill>
-              </a:rPr>
-              <a:t>15 / 17</a:t>
-            </a:r>
-          </a:p>
-        </p:txBody>
-      </p:sp>
-    </p:spTree>
-  </p:cSld>
-  <p:clrMapOvr>
-    <a:masterClrMapping/>
-  </p:clrMapOvr>
-</p:sld>
-</file>
-
-<file path=ppt/slides/slide16.xml><?xml version="1.0" encoding="utf-8"?>
+<file path=ppt/slides/slide14.xml><?xml version="1.0" encoding="utf-8"?>
 <p:sld xmlns:a="http://schemas.openxmlformats.org/drawingml/2006/main" xmlns:p="http://schemas.openxmlformats.org/presentationml/2006/main" xmlns:r="http://schemas.openxmlformats.org/officeDocument/2006/relationships">
   <p:cSld>
     <p:bg>
@@ -6360,8 +5442,8 @@
         </p:nvSpPr>
         <p:spPr>
           <a:xfrm>
-            <a:off x="274320" y="164592"/>
-            <a:ext cx="1005840" cy="411480"/>
+            <a:off x="274320" y="137160"/>
+            <a:ext cx="1005840" cy="402336"/>
           </a:xfrm>
           <a:prstGeom prst="rect">
             <a:avLst/>
@@ -6403,8 +5485,8 @@
         </p:nvSpPr>
         <p:spPr>
           <a:xfrm>
-            <a:off x="274320" y="164592"/>
-            <a:ext cx="1005840" cy="411480"/>
+            <a:off x="274320" y="137160"/>
+            <a:ext cx="1005840" cy="402336"/>
           </a:xfrm>
           <a:prstGeom prst="rect">
             <a:avLst/>
@@ -6419,12 +5501,12 @@
           <a:p>
             <a:pPr algn="ctr"/>
             <a:r>
-              <a:rPr sz="1100" b="1" i="0">
+              <a:rPr sz="1000" b="1" i="0">
                 <a:solidFill>
                   <a:srgbClr val="FFFFFF"/>
                 </a:solidFill>
               </a:rPr>
-              <a:t>Ch.9</a:t>
+              <a:t>Ch.8B</a:t>
             </a:r>
           </a:p>
         </p:txBody>
@@ -6437,8 +5519,8 @@
         </p:nvSpPr>
         <p:spPr>
           <a:xfrm>
-            <a:off x="1417320" y="137160"/>
-            <a:ext cx="10424160" cy="548640"/>
+            <a:off x="1417320" y="109728"/>
+            <a:ext cx="10424160" cy="530352"/>
           </a:xfrm>
           <a:prstGeom prst="rect">
             <a:avLst/>
@@ -6453,12 +5535,12 @@
           <a:p>
             <a:pPr algn="l"/>
             <a:r>
-              <a:rPr sz="1800" b="1" i="0">
+              <a:rPr sz="1700" b="1" i="0">
                 <a:solidFill>
                   <a:srgbClr val="FFFFFF"/>
                 </a:solidFill>
               </a:rPr>
-              <a:t>सात तत्काल माँगें</a:t>
+              <a:t>~200 रद्द अनुबंध — वसूली शून्य: नामित ठेकेदार बेखौफ</a:t>
             </a:r>
           </a:p>
         </p:txBody>
@@ -6471,8 +5553,8 @@
         </p:nvSpPr>
         <p:spPr>
           <a:xfrm>
-            <a:off x="1417320" y="658368"/>
-            <a:ext cx="10424160" cy="411480"/>
+            <a:off x="1417320" y="612648"/>
+            <a:ext cx="10424160" cy="402336"/>
           </a:xfrm>
           <a:prstGeom prst="rect">
             <a:avLst/>
@@ -6487,12 +5569,12 @@
           <a:p>
             <a:pPr algn="l"/>
             <a:r>
-              <a:rPr sz="1200" b="1" i="0">
+              <a:rPr sz="1150" b="1" i="0">
                 <a:solidFill>
                   <a:srgbClr val="A0C8DC"/>
                 </a:solidFill>
               </a:rPr>
-              <a:t>Seven Immediate Demands</a:t>
+              <a:t>~200 Rescinded Contracts — Zero Recovery: Named Defaulters Walk Free</a:t>
             </a:r>
           </a:p>
         </p:txBody>
@@ -6505,7 +5587,7 @@
         </p:nvSpPr>
         <p:spPr>
           <a:xfrm>
-            <a:off x="274320" y="1170432"/>
+            <a:off x="274320" y="1133856"/>
             <a:ext cx="11640312" cy="27432"/>
           </a:xfrm>
           <a:prstGeom prst="rect">
@@ -6548,8 +5630,8 @@
         </p:nvSpPr>
         <p:spPr>
           <a:xfrm>
-            <a:off x="274320" y="1280160"/>
-            <a:ext cx="5669280" cy="5029200"/>
+            <a:off x="274320" y="1234440"/>
+            <a:ext cx="5669280" cy="5120640"/>
           </a:xfrm>
           <a:prstGeom prst="rect">
             <a:avLst/>
@@ -6564,15 +5646,15 @@
           <a:p>
             <a:pPr algn="l"/>
             <a:r>
-              <a:rPr sz="1100" b="0" i="0">
-                <a:solidFill>
-                  <a:srgbClr val="DCE1E6"/>
+              <a:rPr sz="1050" b="0" i="0">
+                <a:solidFill>
+                  <a:srgbClr val="DAE0E6"/>
                 </a:solidFill>
               </a:rPr>
-              <a:t>1. Statutory Delegation Order (Gazette Notification)। 2. नागरिक पारदर्शिता। 3.
-DSC अधिकारी के पास — operator के नहीं। 4. अनिवार्य Training। 5. Portal bugs
-deadline के साथ fix हों। 6. 24×7 Dedicated Helpline। 7. Independent Monitoring
-Committee।</a:t>
+              <a:t>तीन नामित मामले: (1) भैरवजी Bridge, बाँसवाड़ा — rescinded, वसूली शून्य। (2)
+Kotada Road, उदयपुर — rescinded, cost unrecovered। (3) Gannon Dunkerlay —
+established company, walked free। ~200 rescissions — zero monitoring।
+Rescission = कागज़ी खतरा।</a:t>
             </a:r>
           </a:p>
         </p:txBody>
@@ -6585,8 +5667,8 @@
         </p:nvSpPr>
         <p:spPr>
           <a:xfrm>
-            <a:off x="6217920" y="1280160"/>
-            <a:ext cx="5669280" cy="5029200"/>
+            <a:off x="6217920" y="1234440"/>
+            <a:ext cx="5669280" cy="5120640"/>
           </a:xfrm>
           <a:prstGeom prst="rect">
             <a:avLst/>
@@ -6601,15 +5683,17 @@
           <a:p>
             <a:pPr algn="l"/>
             <a:r>
-              <a:rPr sz="1050" b="0" i="1">
-                <a:solidFill>
-                  <a:srgbClr val="AAB9C3"/>
+              <a:rPr sz="1000" b="0" i="1">
+                <a:solidFill>
+                  <a:srgbClr val="A8B9C3"/>
                 </a:solidFill>
               </a:rPr>
-              <a:t>1. Statutory Delegation Order (Gazette Notification). 2. Citizen Transparency.
-3. DSC must stay with officer — not at computer centre. 4. Mandatory
-comprehensive training. 5. Portal bugs fixed with deadline. 6. 24x7 dedicated
-helpline. 7. Independent Monitoring Committee.</a:t>
+              <a:t>Three named cases: (1) Bhairavji Bridge, Banswara — rescinded, risk-and-cost
+tender floated, ZERO recovery. (2) Kotada Road, Udaipur — rescinded,
+differential cost UNRECOVERED. (3) Gannon Dunkerlay &amp; Co — large established
+firm, contract rescinded, substantial dues UNEXERCISED, company walked free.
+Statewide pattern: ~200 rescissions, zero systematic recovery monitoring.
+Rescission is a paper threat, not a financial one.</a:t>
             </a:r>
           </a:p>
         </p:txBody>
@@ -6622,8 +5706,8 @@
         </p:nvSpPr>
         <p:spPr>
           <a:xfrm>
-            <a:off x="6035040" y="1280160"/>
-            <a:ext cx="27432" cy="5029200"/>
+            <a:off x="6035040" y="1234440"/>
+            <a:ext cx="27432" cy="5120640"/>
           </a:xfrm>
           <a:prstGeom prst="rect">
             <a:avLst/>
@@ -6665,8 +5749,8 @@
         </p:nvSpPr>
         <p:spPr>
           <a:xfrm>
-            <a:off x="10972800" y="6492240"/>
-            <a:ext cx="1097280" cy="274320"/>
+            <a:off x="10881360" y="6492240"/>
+            <a:ext cx="1188720" cy="274320"/>
           </a:xfrm>
           <a:prstGeom prst="rect">
             <a:avLst/>
@@ -6683,10 +5767,10 @@
             <a:r>
               <a:rPr sz="800" b="0" i="0">
                 <a:solidFill>
-                  <a:srgbClr val="64788C"/>
+                  <a:srgbClr val="647382"/>
                 </a:solidFill>
               </a:rPr>
-              <a:t>16 / 17</a:t>
+              <a:t>Slide 14 / 17</a:t>
             </a:r>
           </a:p>
         </p:txBody>
@@ -6699,7 +5783,7 @@
 </p:sld>
 </file>
 
-<file path=ppt/slides/slide17.xml><?xml version="1.0" encoding="utf-8"?>
+<file path=ppt/slides/slide15.xml><?xml version="1.0" encoding="utf-8"?>
 <p:sld xmlns:a="http://schemas.openxmlformats.org/drawingml/2006/main" xmlns:p="http://schemas.openxmlformats.org/presentationml/2006/main" xmlns:r="http://schemas.openxmlformats.org/officeDocument/2006/relationships">
   <p:cSld>
     <p:bg>
@@ -6811,8 +5895,8 @@
         </p:nvSpPr>
         <p:spPr>
           <a:xfrm>
-            <a:off x="274320" y="164592"/>
-            <a:ext cx="1005840" cy="411480"/>
+            <a:off x="274320" y="137160"/>
+            <a:ext cx="1005840" cy="402336"/>
           </a:xfrm>
           <a:prstGeom prst="rect">
             <a:avLst/>
@@ -6854,8 +5938,8 @@
         </p:nvSpPr>
         <p:spPr>
           <a:xfrm>
-            <a:off x="274320" y="164592"/>
-            <a:ext cx="1005840" cy="411480"/>
+            <a:off x="274320" y="137160"/>
+            <a:ext cx="1005840" cy="402336"/>
           </a:xfrm>
           <a:prstGeom prst="rect">
             <a:avLst/>
@@ -6870,12 +5954,12 @@
           <a:p>
             <a:pPr algn="ctr"/>
             <a:r>
-              <a:rPr sz="1100" b="1" i="0">
+              <a:rPr sz="1000" b="1" i="0">
                 <a:solidFill>
                   <a:srgbClr val="FFFFFF"/>
                 </a:solidFill>
               </a:rPr>
-              <a:t>Ch.10</a:t>
+              <a:t>Ch.8C</a:t>
             </a:r>
           </a:p>
         </p:txBody>
@@ -6888,8 +5972,8 @@
         </p:nvSpPr>
         <p:spPr>
           <a:xfrm>
-            <a:off x="1417320" y="137160"/>
-            <a:ext cx="10424160" cy="548640"/>
+            <a:off x="1417320" y="109728"/>
+            <a:ext cx="10424160" cy="530352"/>
           </a:xfrm>
           <a:prstGeom prst="rect">
             <a:avLst/>
@@ -6904,12 +5988,12 @@
           <a:p>
             <a:pPr algn="l"/>
             <a:r>
-              <a:rPr sz="1800" b="1" i="0">
+              <a:rPr sz="1700" b="1" i="0">
                 <a:solidFill>
                   <a:srgbClr val="FFFFFF"/>
                 </a:solidFill>
               </a:rPr>
-              <a:t>चौथे स्तंभ से आह्वान — 10 मीडिया माँगें</a:t>
+              <a:t>Recovery Portal क्यों नहीं? Legal Pursuit क्यों नहीं? — Impunity का Architecture</a:t>
             </a:r>
           </a:p>
         </p:txBody>
@@ -6922,8 +6006,8 @@
         </p:nvSpPr>
         <p:spPr>
           <a:xfrm>
-            <a:off x="1417320" y="658368"/>
-            <a:ext cx="10424160" cy="411480"/>
+            <a:off x="1417320" y="612648"/>
+            <a:ext cx="10424160" cy="402336"/>
           </a:xfrm>
           <a:prstGeom prst="rect">
             <a:avLst/>
@@ -6938,12 +6022,12 @@
           <a:p>
             <a:pPr algn="l"/>
             <a:r>
-              <a:rPr sz="1200" b="1" i="0">
+              <a:rPr sz="1150" b="1" i="0">
                 <a:solidFill>
                   <a:srgbClr val="A0C8DC"/>
                 </a:solidFill>
               </a:rPr>
-              <a:t>Call to the Fourth Estate — 10 Media Demands</a:t>
+              <a:t>Why No Recovery Portal? Why No Legal Pursuit? — Architecture of Impunity</a:t>
             </a:r>
           </a:p>
         </p:txBody>
@@ -6956,7 +6040,7 @@
         </p:nvSpPr>
         <p:spPr>
           <a:xfrm>
-            <a:off x="274320" y="1170432"/>
+            <a:off x="274320" y="1133856"/>
             <a:ext cx="11640312" cy="27432"/>
           </a:xfrm>
           <a:prstGeom prst="rect">
@@ -6999,8 +6083,8 @@
         </p:nvSpPr>
         <p:spPr>
           <a:xfrm>
-            <a:off x="274320" y="1280160"/>
-            <a:ext cx="5669280" cy="5029200"/>
+            <a:off x="274320" y="1234440"/>
+            <a:ext cx="5669280" cy="5120640"/>
           </a:xfrm>
           <a:prstGeom prst="rect">
             <a:avLst/>
@@ -7015,14 +6099,17 @@
           <a:p>
             <a:pPr algn="l"/>
             <a:r>
-              <a:rPr sz="1100" b="0" i="0">
-                <a:solidFill>
-                  <a:srgbClr val="DCE1E6"/>
+              <a:rPr sz="1050" b="0" i="0">
+                <a:solidFill>
+                  <a:srgbClr val="DAE0E6"/>
                 </a:solidFill>
               </a:rPr>
-              <a:t>1.Delegation RTI 2.AS/FS Backdating CAG Audit 3.IP Login Audit→ACB 4.XEN Login
-Sting 5.DSC Location Check 6.Live Helpline Test 7.Morphed Photo Expose 8.Public
-Audit माँग 9.One Operator Three Roles Expose 10.Public Monitoring अनिवार्य।</a:t>
+              <a:t>Q1: Recovery Portal 15 वर्षों में क्यों नहीं? क्योंकि visibility =
+accountability — जिससे system बचता है। Q2: Legal pursuit क्यों नहीं?
+Negligence या Complicity — जिस हाथ ने payments किए वही recovery रोक रहा है।
+Limitation periods expire हो रहे हैं। 5-point framework: Portal 90 days; Legal
+notice 30 days; Litigation register; Limitation alerts; Same-officer = ACB
+referral।</a:t>
             </a:r>
           </a:p>
         </p:txBody>
@@ -7035,8 +6122,8 @@
         </p:nvSpPr>
         <p:spPr>
           <a:xfrm>
-            <a:off x="6217920" y="1280160"/>
-            <a:ext cx="5669280" cy="5029200"/>
+            <a:off x="6217920" y="1234440"/>
+            <a:ext cx="5669280" cy="5120640"/>
           </a:xfrm>
           <a:prstGeom prst="rect">
             <a:avLst/>
@@ -7051,15 +6138,20 @@
           <a:p>
             <a:pPr algn="l"/>
             <a:r>
-              <a:rPr sz="1050" b="0" i="1">
-                <a:solidFill>
-                  <a:srgbClr val="AAB9C3"/>
+              <a:rPr sz="1000" b="0" i="1">
+                <a:solidFill>
+                  <a:srgbClr val="A8B9C3"/>
                 </a:solidFill>
               </a:rPr>
-              <a:t>1.RTI on delegation circular 2.AS/FS backdating CAG audit 3.IP Login Audit→ACB
-4.XEN Login sting 5.DSC location check 6.Live helpline call test 7.Morphed photo
-expose 8.Public audit demand 9.One operator three roles expose 10.Public
-monitoring mandate.</a:t>
+              <a:t>Q1: Why no Digitised Recovery Portal despite 15 years of digital
+infrastructure? Because it would make every non-recovery visible and
+attributable to a named officer — exactly what the system avoids. Q2: Why no
+legal pursuit? Two explanations: Gross Negligence OR Complicity — the same
+officer who processed payments refuses to initiate recovery. Limitation
+periods are expiring unnoticed. Five-point framework: (A) Recovery Portal on
+IFMS in 90 days; (B) Legal notice within 30 days of rescission; (C) Litigation
+Register monthly updated; (D) Limitation period auto-alerts; (E) Same-officer
+overlap = automatic ACB referral.</a:t>
             </a:r>
           </a:p>
         </p:txBody>
@@ -7072,8 +6164,8 @@
         </p:nvSpPr>
         <p:spPr>
           <a:xfrm>
-            <a:off x="6035040" y="1280160"/>
-            <a:ext cx="27432" cy="5029200"/>
+            <a:off x="6035040" y="1234440"/>
+            <a:ext cx="27432" cy="5120640"/>
           </a:xfrm>
           <a:prstGeom prst="rect">
             <a:avLst/>
@@ -7115,8 +6207,8 @@
         </p:nvSpPr>
         <p:spPr>
           <a:xfrm>
-            <a:off x="10972800" y="6492240"/>
-            <a:ext cx="1097280" cy="274320"/>
+            <a:off x="10881360" y="6492240"/>
+            <a:ext cx="1188720" cy="274320"/>
           </a:xfrm>
           <a:prstGeom prst="rect">
             <a:avLst/>
@@ -7133,10 +6225,911 @@
             <a:r>
               <a:rPr sz="800" b="0" i="0">
                 <a:solidFill>
-                  <a:srgbClr val="64788C"/>
+                  <a:srgbClr val="647382"/>
                 </a:solidFill>
               </a:rPr>
-              <a:t>17 / 17</a:t>
+              <a:t>Slide 15 / 17</a:t>
+            </a:r>
+          </a:p>
+        </p:txBody>
+      </p:sp>
+    </p:spTree>
+  </p:cSld>
+  <p:clrMapOvr>
+    <a:masterClrMapping/>
+  </p:clrMapOvr>
+</p:sld>
+</file>
+
+<file path=ppt/slides/slide16.xml><?xml version="1.0" encoding="utf-8"?>
+<p:sld xmlns:a="http://schemas.openxmlformats.org/drawingml/2006/main" xmlns:p="http://schemas.openxmlformats.org/presentationml/2006/main" xmlns:r="http://schemas.openxmlformats.org/officeDocument/2006/relationships">
+  <p:cSld>
+    <p:bg>
+      <p:bgPr>
+        <a:solidFill>
+          <a:srgbClr val="1A0533"/>
+        </a:solidFill>
+        <a:effectLst/>
+      </p:bgPr>
+    </p:bg>
+    <p:spTree>
+      <p:nvGrpSpPr>
+        <p:cNvPr id="1" name=""/>
+        <p:cNvGrpSpPr/>
+        <p:nvPr/>
+      </p:nvGrpSpPr>
+      <p:grpSpPr/>
+      <p:sp>
+        <p:nvSpPr>
+          <p:cNvPr id="2" name="Rectangle 1"/>
+          <p:cNvSpPr/>
+          <p:nvPr/>
+        </p:nvSpPr>
+        <p:spPr>
+          <a:xfrm>
+            <a:off x="0" y="0"/>
+            <a:ext cx="12188952" cy="64008"/>
+          </a:xfrm>
+          <a:prstGeom prst="rect">
+            <a:avLst/>
+          </a:prstGeom>
+          <a:solidFill>
+            <a:srgbClr val="0D9488"/>
+          </a:solidFill>
+          <a:ln>
+            <a:noFill/>
+          </a:ln>
+        </p:spPr>
+        <p:style>
+          <a:lnRef idx="1">
+            <a:schemeClr val="accent1"/>
+          </a:lnRef>
+          <a:fillRef idx="3">
+            <a:schemeClr val="accent1"/>
+          </a:fillRef>
+          <a:effectRef idx="2">
+            <a:schemeClr val="accent1"/>
+          </a:effectRef>
+          <a:fontRef idx="minor">
+            <a:schemeClr val="lt1"/>
+          </a:fontRef>
+        </p:style>
+        <p:txBody>
+          <a:bodyPr rtlCol="0" anchor="ctr"/>
+          <a:lstStyle/>
+          <a:p>
+            <a:pPr algn="ctr"/>
+          </a:p>
+        </p:txBody>
+      </p:sp>
+      <p:sp>
+        <p:nvSpPr>
+          <p:cNvPr id="3" name="Rectangle 2"/>
+          <p:cNvSpPr/>
+          <p:nvPr/>
+        </p:nvSpPr>
+        <p:spPr>
+          <a:xfrm>
+            <a:off x="0" y="6793992"/>
+            <a:ext cx="12188952" cy="64008"/>
+          </a:xfrm>
+          <a:prstGeom prst="rect">
+            <a:avLst/>
+          </a:prstGeom>
+          <a:solidFill>
+            <a:srgbClr val="0D9488"/>
+          </a:solidFill>
+          <a:ln>
+            <a:noFill/>
+          </a:ln>
+        </p:spPr>
+        <p:style>
+          <a:lnRef idx="1">
+            <a:schemeClr val="accent1"/>
+          </a:lnRef>
+          <a:fillRef idx="3">
+            <a:schemeClr val="accent1"/>
+          </a:fillRef>
+          <a:effectRef idx="2">
+            <a:schemeClr val="accent1"/>
+          </a:effectRef>
+          <a:fontRef idx="minor">
+            <a:schemeClr val="lt1"/>
+          </a:fontRef>
+        </p:style>
+        <p:txBody>
+          <a:bodyPr rtlCol="0" anchor="ctr"/>
+          <a:lstStyle/>
+          <a:p>
+            <a:pPr algn="ctr"/>
+          </a:p>
+        </p:txBody>
+      </p:sp>
+      <p:sp>
+        <p:nvSpPr>
+          <p:cNvPr id="4" name="Rectangle 3"/>
+          <p:cNvSpPr/>
+          <p:nvPr/>
+        </p:nvSpPr>
+        <p:spPr>
+          <a:xfrm>
+            <a:off x="274320" y="137160"/>
+            <a:ext cx="1005840" cy="402336"/>
+          </a:xfrm>
+          <a:prstGeom prst="rect">
+            <a:avLst/>
+          </a:prstGeom>
+          <a:solidFill>
+            <a:srgbClr val="0D9488"/>
+          </a:solidFill>
+          <a:ln>
+            <a:noFill/>
+          </a:ln>
+        </p:spPr>
+        <p:style>
+          <a:lnRef idx="1">
+            <a:schemeClr val="accent1"/>
+          </a:lnRef>
+          <a:fillRef idx="3">
+            <a:schemeClr val="accent1"/>
+          </a:fillRef>
+          <a:effectRef idx="2">
+            <a:schemeClr val="accent1"/>
+          </a:effectRef>
+          <a:fontRef idx="minor">
+            <a:schemeClr val="lt1"/>
+          </a:fontRef>
+        </p:style>
+        <p:txBody>
+          <a:bodyPr rtlCol="0" anchor="ctr"/>
+          <a:lstStyle/>
+          <a:p>
+            <a:pPr algn="ctr"/>
+          </a:p>
+        </p:txBody>
+      </p:sp>
+      <p:sp>
+        <p:nvSpPr>
+          <p:cNvPr id="5" name="TextBox 4"/>
+          <p:cNvSpPr txBox="1"/>
+          <p:nvPr/>
+        </p:nvSpPr>
+        <p:spPr>
+          <a:xfrm>
+            <a:off x="274320" y="137160"/>
+            <a:ext cx="1005840" cy="402336"/>
+          </a:xfrm>
+          <a:prstGeom prst="rect">
+            <a:avLst/>
+          </a:prstGeom>
+          <a:noFill/>
+        </p:spPr>
+        <p:txBody>
+          <a:bodyPr wrap="square">
+            <a:spAutoFit/>
+          </a:bodyPr>
+          <a:lstStyle/>
+          <a:p>
+            <a:pPr algn="ctr"/>
+            <a:r>
+              <a:rPr sz="1000" b="1" i="0">
+                <a:solidFill>
+                  <a:srgbClr val="FFFFFF"/>
+                </a:solidFill>
+              </a:rPr>
+              <a:t>Ch.9</a:t>
+            </a:r>
+          </a:p>
+        </p:txBody>
+      </p:sp>
+      <p:sp>
+        <p:nvSpPr>
+          <p:cNvPr id="6" name="TextBox 5"/>
+          <p:cNvSpPr txBox="1"/>
+          <p:nvPr/>
+        </p:nvSpPr>
+        <p:spPr>
+          <a:xfrm>
+            <a:off x="1417320" y="109728"/>
+            <a:ext cx="10424160" cy="530352"/>
+          </a:xfrm>
+          <a:prstGeom prst="rect">
+            <a:avLst/>
+          </a:prstGeom>
+          <a:noFill/>
+        </p:spPr>
+        <p:txBody>
+          <a:bodyPr wrap="square">
+            <a:spAutoFit/>
+          </a:bodyPr>
+          <a:lstStyle/>
+          <a:p>
+            <a:pPr algn="l"/>
+            <a:r>
+              <a:rPr sz="1700" b="1" i="0">
+                <a:solidFill>
+                  <a:srgbClr val="FFFFFF"/>
+                </a:solidFill>
+              </a:rPr>
+              <a:t>सात तत्काल माँगें</a:t>
+            </a:r>
+          </a:p>
+        </p:txBody>
+      </p:sp>
+      <p:sp>
+        <p:nvSpPr>
+          <p:cNvPr id="7" name="TextBox 6"/>
+          <p:cNvSpPr txBox="1"/>
+          <p:nvPr/>
+        </p:nvSpPr>
+        <p:spPr>
+          <a:xfrm>
+            <a:off x="1417320" y="612648"/>
+            <a:ext cx="10424160" cy="402336"/>
+          </a:xfrm>
+          <a:prstGeom prst="rect">
+            <a:avLst/>
+          </a:prstGeom>
+          <a:noFill/>
+        </p:spPr>
+        <p:txBody>
+          <a:bodyPr wrap="square">
+            <a:spAutoFit/>
+          </a:bodyPr>
+          <a:lstStyle/>
+          <a:p>
+            <a:pPr algn="l"/>
+            <a:r>
+              <a:rPr sz="1150" b="1" i="0">
+                <a:solidFill>
+                  <a:srgbClr val="A0C8DC"/>
+                </a:solidFill>
+              </a:rPr>
+              <a:t>Seven Immediate Reforms</a:t>
+            </a:r>
+          </a:p>
+        </p:txBody>
+      </p:sp>
+      <p:sp>
+        <p:nvSpPr>
+          <p:cNvPr id="8" name="Rectangle 7"/>
+          <p:cNvSpPr/>
+          <p:nvPr/>
+        </p:nvSpPr>
+        <p:spPr>
+          <a:xfrm>
+            <a:off x="274320" y="1133856"/>
+            <a:ext cx="11640312" cy="27432"/>
+          </a:xfrm>
+          <a:prstGeom prst="rect">
+            <a:avLst/>
+          </a:prstGeom>
+          <a:solidFill>
+            <a:srgbClr val="0D9488"/>
+          </a:solidFill>
+          <a:ln>
+            <a:noFill/>
+          </a:ln>
+        </p:spPr>
+        <p:style>
+          <a:lnRef idx="1">
+            <a:schemeClr val="accent1"/>
+          </a:lnRef>
+          <a:fillRef idx="3">
+            <a:schemeClr val="accent1"/>
+          </a:fillRef>
+          <a:effectRef idx="2">
+            <a:schemeClr val="accent1"/>
+          </a:effectRef>
+          <a:fontRef idx="minor">
+            <a:schemeClr val="lt1"/>
+          </a:fontRef>
+        </p:style>
+        <p:txBody>
+          <a:bodyPr rtlCol="0" anchor="ctr"/>
+          <a:lstStyle/>
+          <a:p>
+            <a:pPr algn="ctr"/>
+          </a:p>
+        </p:txBody>
+      </p:sp>
+      <p:sp>
+        <p:nvSpPr>
+          <p:cNvPr id="9" name="TextBox 8"/>
+          <p:cNvSpPr txBox="1"/>
+          <p:nvPr/>
+        </p:nvSpPr>
+        <p:spPr>
+          <a:xfrm>
+            <a:off x="274320" y="1234440"/>
+            <a:ext cx="5669280" cy="5120640"/>
+          </a:xfrm>
+          <a:prstGeom prst="rect">
+            <a:avLst/>
+          </a:prstGeom>
+          <a:noFill/>
+        </p:spPr>
+        <p:txBody>
+          <a:bodyPr wrap="square">
+            <a:spAutoFit/>
+          </a:bodyPr>
+          <a:lstStyle/>
+          <a:p>
+            <a:pPr algn="l"/>
+            <a:r>
+              <a:rPr sz="1050" b="0" i="0">
+                <a:solidFill>
+                  <a:srgbClr val="DAE0E6"/>
+                </a:solidFill>
+              </a:rPr>
+              <a:t>1.Statutory Delegation Gazette Notification। 2.Citizen Transparency। 3.DSC
+अधिकारी के पास। 4.Mandatory Training। 5.Portal bugs deadline fix। 6.24×7
+Helpline। 7.Independent Monitoring Committee।</a:t>
+            </a:r>
+          </a:p>
+        </p:txBody>
+      </p:sp>
+      <p:sp>
+        <p:nvSpPr>
+          <p:cNvPr id="10" name="TextBox 9"/>
+          <p:cNvSpPr txBox="1"/>
+          <p:nvPr/>
+        </p:nvSpPr>
+        <p:spPr>
+          <a:xfrm>
+            <a:off x="6217920" y="1234440"/>
+            <a:ext cx="5669280" cy="5120640"/>
+          </a:xfrm>
+          <a:prstGeom prst="rect">
+            <a:avLst/>
+          </a:prstGeom>
+          <a:noFill/>
+        </p:spPr>
+        <p:txBody>
+          <a:bodyPr wrap="square">
+            <a:spAutoFit/>
+          </a:bodyPr>
+          <a:lstStyle/>
+          <a:p>
+            <a:pPr algn="l"/>
+            <a:r>
+              <a:rPr sz="1000" b="0" i="1">
+                <a:solidFill>
+                  <a:srgbClr val="A8B9C3"/>
+                </a:solidFill>
+              </a:rPr>
+              <a:t>1.Statutory Delegation Gazette Notification. 2.Citizen Transparency portal.
+3.DSC with officer only — computer centre = IT Act offence. 4.Mandatory
+training before portal access. 5.Portal bugs fixed with deadline — NIC
+accountable. 6.24x7 dedicated helpline + working email. 7.Independent
+Monitoring Committee.</a:t>
+            </a:r>
+          </a:p>
+        </p:txBody>
+      </p:sp>
+      <p:sp>
+        <p:nvSpPr>
+          <p:cNvPr id="11" name="Rectangle 10"/>
+          <p:cNvSpPr/>
+          <p:nvPr/>
+        </p:nvSpPr>
+        <p:spPr>
+          <a:xfrm>
+            <a:off x="6035040" y="1234440"/>
+            <a:ext cx="27432" cy="5120640"/>
+          </a:xfrm>
+          <a:prstGeom prst="rect">
+            <a:avLst/>
+          </a:prstGeom>
+          <a:solidFill>
+            <a:srgbClr val="0D9488"/>
+          </a:solidFill>
+          <a:ln>
+            <a:noFill/>
+          </a:ln>
+        </p:spPr>
+        <p:style>
+          <a:lnRef idx="1">
+            <a:schemeClr val="accent1"/>
+          </a:lnRef>
+          <a:fillRef idx="3">
+            <a:schemeClr val="accent1"/>
+          </a:fillRef>
+          <a:effectRef idx="2">
+            <a:schemeClr val="accent1"/>
+          </a:effectRef>
+          <a:fontRef idx="minor">
+            <a:schemeClr val="lt1"/>
+          </a:fontRef>
+        </p:style>
+        <p:txBody>
+          <a:bodyPr rtlCol="0" anchor="ctr"/>
+          <a:lstStyle/>
+          <a:p>
+            <a:pPr algn="ctr"/>
+          </a:p>
+        </p:txBody>
+      </p:sp>
+      <p:sp>
+        <p:nvSpPr>
+          <p:cNvPr id="12" name="TextBox 11"/>
+          <p:cNvSpPr txBox="1"/>
+          <p:nvPr/>
+        </p:nvSpPr>
+        <p:spPr>
+          <a:xfrm>
+            <a:off x="10881360" y="6492240"/>
+            <a:ext cx="1188720" cy="274320"/>
+          </a:xfrm>
+          <a:prstGeom prst="rect">
+            <a:avLst/>
+          </a:prstGeom>
+          <a:noFill/>
+        </p:spPr>
+        <p:txBody>
+          <a:bodyPr wrap="square">
+            <a:spAutoFit/>
+          </a:bodyPr>
+          <a:lstStyle/>
+          <a:p>
+            <a:pPr algn="r"/>
+            <a:r>
+              <a:rPr sz="800" b="0" i="0">
+                <a:solidFill>
+                  <a:srgbClr val="647382"/>
+                </a:solidFill>
+              </a:rPr>
+              <a:t>Slide 16 / 17</a:t>
+            </a:r>
+          </a:p>
+        </p:txBody>
+      </p:sp>
+    </p:spTree>
+  </p:cSld>
+  <p:clrMapOvr>
+    <a:masterClrMapping/>
+  </p:clrMapOvr>
+</p:sld>
+</file>
+
+<file path=ppt/slides/slide17.xml><?xml version="1.0" encoding="utf-8"?>
+<p:sld xmlns:a="http://schemas.openxmlformats.org/drawingml/2006/main" xmlns:p="http://schemas.openxmlformats.org/presentationml/2006/main" xmlns:r="http://schemas.openxmlformats.org/officeDocument/2006/relationships">
+  <p:cSld>
+    <p:bg>
+      <p:bgPr>
+        <a:solidFill>
+          <a:srgbClr val="142420"/>
+        </a:solidFill>
+        <a:effectLst/>
+      </p:bgPr>
+    </p:bg>
+    <p:spTree>
+      <p:nvGrpSpPr>
+        <p:cNvPr id="1" name=""/>
+        <p:cNvGrpSpPr/>
+        <p:nvPr/>
+      </p:nvGrpSpPr>
+      <p:grpSpPr/>
+      <p:sp>
+        <p:nvSpPr>
+          <p:cNvPr id="2" name="Rectangle 1"/>
+          <p:cNvSpPr/>
+          <p:nvPr/>
+        </p:nvSpPr>
+        <p:spPr>
+          <a:xfrm>
+            <a:off x="0" y="0"/>
+            <a:ext cx="12188952" cy="64008"/>
+          </a:xfrm>
+          <a:prstGeom prst="rect">
+            <a:avLst/>
+          </a:prstGeom>
+          <a:solidFill>
+            <a:srgbClr val="0D9488"/>
+          </a:solidFill>
+          <a:ln>
+            <a:noFill/>
+          </a:ln>
+        </p:spPr>
+        <p:style>
+          <a:lnRef idx="1">
+            <a:schemeClr val="accent1"/>
+          </a:lnRef>
+          <a:fillRef idx="3">
+            <a:schemeClr val="accent1"/>
+          </a:fillRef>
+          <a:effectRef idx="2">
+            <a:schemeClr val="accent1"/>
+          </a:effectRef>
+          <a:fontRef idx="minor">
+            <a:schemeClr val="lt1"/>
+          </a:fontRef>
+        </p:style>
+        <p:txBody>
+          <a:bodyPr rtlCol="0" anchor="ctr"/>
+          <a:lstStyle/>
+          <a:p>
+            <a:pPr algn="ctr"/>
+          </a:p>
+        </p:txBody>
+      </p:sp>
+      <p:sp>
+        <p:nvSpPr>
+          <p:cNvPr id="3" name="Rectangle 2"/>
+          <p:cNvSpPr/>
+          <p:nvPr/>
+        </p:nvSpPr>
+        <p:spPr>
+          <a:xfrm>
+            <a:off x="0" y="6793992"/>
+            <a:ext cx="12188952" cy="64008"/>
+          </a:xfrm>
+          <a:prstGeom prst="rect">
+            <a:avLst/>
+          </a:prstGeom>
+          <a:solidFill>
+            <a:srgbClr val="0D9488"/>
+          </a:solidFill>
+          <a:ln>
+            <a:noFill/>
+          </a:ln>
+        </p:spPr>
+        <p:style>
+          <a:lnRef idx="1">
+            <a:schemeClr val="accent1"/>
+          </a:lnRef>
+          <a:fillRef idx="3">
+            <a:schemeClr val="accent1"/>
+          </a:fillRef>
+          <a:effectRef idx="2">
+            <a:schemeClr val="accent1"/>
+          </a:effectRef>
+          <a:fontRef idx="minor">
+            <a:schemeClr val="lt1"/>
+          </a:fontRef>
+        </p:style>
+        <p:txBody>
+          <a:bodyPr rtlCol="0" anchor="ctr"/>
+          <a:lstStyle/>
+          <a:p>
+            <a:pPr algn="ctr"/>
+          </a:p>
+        </p:txBody>
+      </p:sp>
+      <p:sp>
+        <p:nvSpPr>
+          <p:cNvPr id="4" name="Rectangle 3"/>
+          <p:cNvSpPr/>
+          <p:nvPr/>
+        </p:nvSpPr>
+        <p:spPr>
+          <a:xfrm>
+            <a:off x="274320" y="137160"/>
+            <a:ext cx="1005840" cy="402336"/>
+          </a:xfrm>
+          <a:prstGeom prst="rect">
+            <a:avLst/>
+          </a:prstGeom>
+          <a:solidFill>
+            <a:srgbClr val="0D9488"/>
+          </a:solidFill>
+          <a:ln>
+            <a:noFill/>
+          </a:ln>
+        </p:spPr>
+        <p:style>
+          <a:lnRef idx="1">
+            <a:schemeClr val="accent1"/>
+          </a:lnRef>
+          <a:fillRef idx="3">
+            <a:schemeClr val="accent1"/>
+          </a:fillRef>
+          <a:effectRef idx="2">
+            <a:schemeClr val="accent1"/>
+          </a:effectRef>
+          <a:fontRef idx="minor">
+            <a:schemeClr val="lt1"/>
+          </a:fontRef>
+        </p:style>
+        <p:txBody>
+          <a:bodyPr rtlCol="0" anchor="ctr"/>
+          <a:lstStyle/>
+          <a:p>
+            <a:pPr algn="ctr"/>
+          </a:p>
+        </p:txBody>
+      </p:sp>
+      <p:sp>
+        <p:nvSpPr>
+          <p:cNvPr id="5" name="TextBox 4"/>
+          <p:cNvSpPr txBox="1"/>
+          <p:nvPr/>
+        </p:nvSpPr>
+        <p:spPr>
+          <a:xfrm>
+            <a:off x="274320" y="137160"/>
+            <a:ext cx="1005840" cy="402336"/>
+          </a:xfrm>
+          <a:prstGeom prst="rect">
+            <a:avLst/>
+          </a:prstGeom>
+          <a:noFill/>
+        </p:spPr>
+        <p:txBody>
+          <a:bodyPr wrap="square">
+            <a:spAutoFit/>
+          </a:bodyPr>
+          <a:lstStyle/>
+          <a:p>
+            <a:pPr algn="ctr"/>
+            <a:r>
+              <a:rPr sz="1000" b="1" i="0">
+                <a:solidFill>
+                  <a:srgbClr val="FFFFFF"/>
+                </a:solidFill>
+              </a:rPr>
+              <a:t>Ch.10</a:t>
+            </a:r>
+          </a:p>
+        </p:txBody>
+      </p:sp>
+      <p:sp>
+        <p:nvSpPr>
+          <p:cNvPr id="6" name="TextBox 5"/>
+          <p:cNvSpPr txBox="1"/>
+          <p:nvPr/>
+        </p:nvSpPr>
+        <p:spPr>
+          <a:xfrm>
+            <a:off x="1417320" y="109728"/>
+            <a:ext cx="10424160" cy="530352"/>
+          </a:xfrm>
+          <a:prstGeom prst="rect">
+            <a:avLst/>
+          </a:prstGeom>
+          <a:noFill/>
+        </p:spPr>
+        <p:txBody>
+          <a:bodyPr wrap="square">
+            <a:spAutoFit/>
+          </a:bodyPr>
+          <a:lstStyle/>
+          <a:p>
+            <a:pPr algn="l"/>
+            <a:r>
+              <a:rPr sz="1700" b="1" i="0">
+                <a:solidFill>
+                  <a:srgbClr val="FFFFFF"/>
+                </a:solidFill>
+              </a:rPr>
+              <a:t>दस मीडिया माँगें — चौथे स्तंभ से आह्वान</a:t>
+            </a:r>
+          </a:p>
+        </p:txBody>
+      </p:sp>
+      <p:sp>
+        <p:nvSpPr>
+          <p:cNvPr id="7" name="TextBox 6"/>
+          <p:cNvSpPr txBox="1"/>
+          <p:nvPr/>
+        </p:nvSpPr>
+        <p:spPr>
+          <a:xfrm>
+            <a:off x="1417320" y="612648"/>
+            <a:ext cx="10424160" cy="402336"/>
+          </a:xfrm>
+          <a:prstGeom prst="rect">
+            <a:avLst/>
+          </a:prstGeom>
+          <a:noFill/>
+        </p:spPr>
+        <p:txBody>
+          <a:bodyPr wrap="square">
+            <a:spAutoFit/>
+          </a:bodyPr>
+          <a:lstStyle/>
+          <a:p>
+            <a:pPr algn="l"/>
+            <a:r>
+              <a:rPr sz="1150" b="1" i="0">
+                <a:solidFill>
+                  <a:srgbClr val="A0C8DC"/>
+                </a:solidFill>
+              </a:rPr>
+              <a:t>Ten Media Demands — Call to the Fourth Estate</a:t>
+            </a:r>
+          </a:p>
+        </p:txBody>
+      </p:sp>
+      <p:sp>
+        <p:nvSpPr>
+          <p:cNvPr id="8" name="Rectangle 7"/>
+          <p:cNvSpPr/>
+          <p:nvPr/>
+        </p:nvSpPr>
+        <p:spPr>
+          <a:xfrm>
+            <a:off x="274320" y="1133856"/>
+            <a:ext cx="11640312" cy="27432"/>
+          </a:xfrm>
+          <a:prstGeom prst="rect">
+            <a:avLst/>
+          </a:prstGeom>
+          <a:solidFill>
+            <a:srgbClr val="0D9488"/>
+          </a:solidFill>
+          <a:ln>
+            <a:noFill/>
+          </a:ln>
+        </p:spPr>
+        <p:style>
+          <a:lnRef idx="1">
+            <a:schemeClr val="accent1"/>
+          </a:lnRef>
+          <a:fillRef idx="3">
+            <a:schemeClr val="accent1"/>
+          </a:fillRef>
+          <a:effectRef idx="2">
+            <a:schemeClr val="accent1"/>
+          </a:effectRef>
+          <a:fontRef idx="minor">
+            <a:schemeClr val="lt1"/>
+          </a:fontRef>
+        </p:style>
+        <p:txBody>
+          <a:bodyPr rtlCol="0" anchor="ctr"/>
+          <a:lstStyle/>
+          <a:p>
+            <a:pPr algn="ctr"/>
+          </a:p>
+        </p:txBody>
+      </p:sp>
+      <p:sp>
+        <p:nvSpPr>
+          <p:cNvPr id="9" name="TextBox 8"/>
+          <p:cNvSpPr txBox="1"/>
+          <p:nvPr/>
+        </p:nvSpPr>
+        <p:spPr>
+          <a:xfrm>
+            <a:off x="274320" y="1234440"/>
+            <a:ext cx="5669280" cy="5120640"/>
+          </a:xfrm>
+          <a:prstGeom prst="rect">
+            <a:avLst/>
+          </a:prstGeom>
+          <a:noFill/>
+        </p:spPr>
+        <p:txBody>
+          <a:bodyPr wrap="square">
+            <a:spAutoFit/>
+          </a:bodyPr>
+          <a:lstStyle/>
+          <a:p>
+            <a:pPr algn="l"/>
+            <a:r>
+              <a:rPr sz="1050" b="0" i="0">
+                <a:solidFill>
+                  <a:srgbClr val="DAE0E6"/>
+                </a:solidFill>
+              </a:rPr>
+              <a:t>1.Delegation RTI। 2.AS/FS Backdating CAG Audit। 3.IP Login Audit→ACB। 4.XEN
+Login Sting। 5.DSC Location Check। 6.Live Helpline Test। 7.Morphed Photo
+Expose। 8.Public Audit। 9.One Operator Three Roles। 10.Recovery RTI।</a:t>
+            </a:r>
+          </a:p>
+        </p:txBody>
+      </p:sp>
+      <p:sp>
+        <p:nvSpPr>
+          <p:cNvPr id="10" name="TextBox 9"/>
+          <p:cNvSpPr txBox="1"/>
+          <p:nvPr/>
+        </p:nvSpPr>
+        <p:spPr>
+          <a:xfrm>
+            <a:off x="6217920" y="1234440"/>
+            <a:ext cx="5669280" cy="5120640"/>
+          </a:xfrm>
+          <a:prstGeom prst="rect">
+            <a:avLst/>
+          </a:prstGeom>
+          <a:noFill/>
+        </p:spPr>
+        <p:txBody>
+          <a:bodyPr wrap="square">
+            <a:spAutoFit/>
+          </a:bodyPr>
+          <a:lstStyle/>
+          <a:p>
+            <a:pPr algn="l"/>
+            <a:r>
+              <a:rPr sz="1000" b="0" i="1">
+                <a:solidFill>
+                  <a:srgbClr val="A8B9C3"/>
+                </a:solidFill>
+              </a:rPr>
+              <a:t>1.RTI on delegation circular. 2.AS/FS backdating CAG audit. 3.IP Login Audit →
+ACB. 4.XEN Login sting. 5.DSC location live check. 6.Helpline live call test.
+7.Morphed photo expose. 8.IFMS public audit. 9.One operator three roles
+expose. 10.Rescinded contracts recovery RTI.</a:t>
+            </a:r>
+          </a:p>
+        </p:txBody>
+      </p:sp>
+      <p:sp>
+        <p:nvSpPr>
+          <p:cNvPr id="11" name="Rectangle 10"/>
+          <p:cNvSpPr/>
+          <p:nvPr/>
+        </p:nvSpPr>
+        <p:spPr>
+          <a:xfrm>
+            <a:off x="6035040" y="1234440"/>
+            <a:ext cx="27432" cy="5120640"/>
+          </a:xfrm>
+          <a:prstGeom prst="rect">
+            <a:avLst/>
+          </a:prstGeom>
+          <a:solidFill>
+            <a:srgbClr val="0D9488"/>
+          </a:solidFill>
+          <a:ln>
+            <a:noFill/>
+          </a:ln>
+        </p:spPr>
+        <p:style>
+          <a:lnRef idx="1">
+            <a:schemeClr val="accent1"/>
+          </a:lnRef>
+          <a:fillRef idx="3">
+            <a:schemeClr val="accent1"/>
+          </a:fillRef>
+          <a:effectRef idx="2">
+            <a:schemeClr val="accent1"/>
+          </a:effectRef>
+          <a:fontRef idx="minor">
+            <a:schemeClr val="lt1"/>
+          </a:fontRef>
+        </p:style>
+        <p:txBody>
+          <a:bodyPr rtlCol="0" anchor="ctr"/>
+          <a:lstStyle/>
+          <a:p>
+            <a:pPr algn="ctr"/>
+          </a:p>
+        </p:txBody>
+      </p:sp>
+      <p:sp>
+        <p:nvSpPr>
+          <p:cNvPr id="12" name="TextBox 11"/>
+          <p:cNvSpPr txBox="1"/>
+          <p:nvPr/>
+        </p:nvSpPr>
+        <p:spPr>
+          <a:xfrm>
+            <a:off x="10881360" y="6492240"/>
+            <a:ext cx="1188720" cy="274320"/>
+          </a:xfrm>
+          <a:prstGeom prst="rect">
+            <a:avLst/>
+          </a:prstGeom>
+          <a:noFill/>
+        </p:spPr>
+        <p:txBody>
+          <a:bodyPr wrap="square">
+            <a:spAutoFit/>
+          </a:bodyPr>
+          <a:lstStyle/>
+          <a:p>
+            <a:pPr algn="r"/>
+            <a:r>
+              <a:rPr sz="800" b="0" i="0">
+                <a:solidFill>
+                  <a:srgbClr val="647382"/>
+                </a:solidFill>
+              </a:rPr>
+              <a:t>Slide 17 / 17</a:t>
             </a:r>
           </a:p>
         </p:txBody>
@@ -7261,8 +7254,8 @@
         </p:nvSpPr>
         <p:spPr>
           <a:xfrm>
-            <a:off x="457200" y="457200"/>
-            <a:ext cx="11274552" cy="731520"/>
+            <a:off x="457200" y="411480"/>
+            <a:ext cx="11274552" cy="685800"/>
           </a:xfrm>
           <a:prstGeom prst="rect">
             <a:avLst/>
@@ -7277,7 +7270,7 @@
           <a:p>
             <a:pPr algn="ctr"/>
             <a:r>
-              <a:rPr sz="2200" b="1" i="0">
+              <a:rPr sz="2100" b="1" i="0">
                 <a:solidFill>
                   <a:srgbClr val="FFFFFF"/>
                 </a:solidFill>
@@ -7295,8 +7288,8 @@
         </p:nvSpPr>
         <p:spPr>
           <a:xfrm>
-            <a:off x="457200" y="1371600"/>
-            <a:ext cx="11274552" cy="914400"/>
+            <a:off x="457200" y="1234440"/>
+            <a:ext cx="11274552" cy="822960"/>
           </a:xfrm>
           <a:prstGeom prst="rect">
             <a:avLst/>
@@ -7311,13 +7304,13 @@
           <a:p>
             <a:pPr algn="ctr"/>
             <a:r>
-              <a:rPr sz="1400" b="0" i="0">
+              <a:rPr sz="1300" b="0" i="0">
                 <a:solidFill>
                   <a:srgbClr val="FFC8C8"/>
                 </a:solidFill>
               </a:rPr>
-              <a:t>RTI FILE करें  •  CAG Audit माँगें  •  ACB को सूचित करें
-File RTI  •  Demand CAG Audit  •  Alert Anti-Corruption Bureau</a:t>
+              <a:t>RTI FILE करें  •  CAG Audit माँगें  •  ACB को सूचित करें  •  Recovery Portal माँगें
+File RTI  •  Demand CAG Audit  •  Alert ACB  •  Demand Recovery Portal</a:t>
             </a:r>
           </a:p>
         </p:txBody>
@@ -7330,8 +7323,8 @@
         </p:nvSpPr>
         <p:spPr>
           <a:xfrm>
-            <a:off x="914400" y="2743200"/>
-            <a:ext cx="10360152" cy="2560320"/>
+            <a:off x="914400" y="2377440"/>
+            <a:ext cx="10360152" cy="3200400"/>
           </a:xfrm>
           <a:prstGeom prst="rect">
             <a:avLst/>
@@ -7346,15 +7339,16 @@
           <a:p>
             <a:pPr algn="ctr"/>
             <a:r>
-              <a:rPr sz="1600" b="0" i="1">
+              <a:rPr sz="1500" b="0" i="1">
                 <a:solidFill>
                   <a:srgbClr val="FFFFFF"/>
                 </a:solidFill>
               </a:rPr>
               <a:t>"जब तक system की monitoring नहीं होगी —
-जनता का पैसा डूबता रहेगा।"
-"Until the system is monitored,
-public money will keep draining."</a:t>
+जनता का पैसा डूबता रहेगा।
+"Recovery Portal बनाना 90 दिन का काम था।
+15 वर्ष में नहीं बना — यह negligence नहीं,
+यह impunity का architecture है।"</a:t>
             </a:r>
           </a:p>
         </p:txBody>
@@ -7368,7 +7362,7 @@
         <p:spPr>
           <a:xfrm>
             <a:off x="457200" y="6217920"/>
-            <a:ext cx="11274552" cy="457200"/>
+            <a:ext cx="11274552" cy="411480"/>
           </a:xfrm>
           <a:prstGeom prst="rect">
             <a:avLst/>
@@ -7470,8 +7464,8 @@
         </p:nvSpPr>
         <p:spPr>
           <a:xfrm>
-            <a:off x="274320" y="137160"/>
-            <a:ext cx="11430000" cy="457200"/>
+            <a:off x="274320" y="109728"/>
+            <a:ext cx="11430000" cy="438912"/>
           </a:xfrm>
           <a:prstGeom prst="rect">
             <a:avLst/>
@@ -7486,7 +7480,7 @@
           <a:p>
             <a:pPr algn="ctr"/>
             <a:r>
-              <a:rPr sz="1400" b="1" i="0">
+              <a:rPr sz="1300" b="1" i="0">
                 <a:solidFill>
                   <a:srgbClr val="0D9488"/>
                 </a:solidFill>
@@ -7504,8 +7498,8 @@
         </p:nvSpPr>
         <p:spPr>
           <a:xfrm>
-            <a:off x="274320" y="777240"/>
-            <a:ext cx="2743200" cy="1234440"/>
+            <a:off x="274320" y="685800"/>
+            <a:ext cx="2743200" cy="1188720"/>
           </a:xfrm>
           <a:prstGeom prst="rect">
             <a:avLst/>
@@ -7549,8 +7543,8 @@
         </p:nvSpPr>
         <p:spPr>
           <a:xfrm>
-            <a:off x="365760" y="868680"/>
-            <a:ext cx="2560320" cy="640080"/>
+            <a:off x="347472" y="758952"/>
+            <a:ext cx="2596896" cy="594360"/>
           </a:xfrm>
           <a:prstGeom prst="rect">
             <a:avLst/>
@@ -7565,7 +7559,7 @@
           <a:p>
             <a:pPr algn="ctr"/>
             <a:r>
-              <a:rPr sz="2200" b="1" i="0">
+              <a:rPr sz="2000" b="1" i="0">
                 <a:solidFill>
                   <a:srgbClr val="FFFFFF"/>
                 </a:solidFill>
@@ -7583,8 +7577,8 @@
         </p:nvSpPr>
         <p:spPr>
           <a:xfrm>
-            <a:off x="365760" y="1463040"/>
-            <a:ext cx="2560320" cy="502920"/>
+            <a:off x="347472" y="1344168"/>
+            <a:ext cx="2596896" cy="475488"/>
           </a:xfrm>
           <a:prstGeom prst="rect">
             <a:avLst/>
@@ -7599,9 +7593,9 @@
           <a:p>
             <a:pPr algn="ctr"/>
             <a:r>
-              <a:rPr sz="850" b="0" i="0">
-                <a:solidFill>
-                  <a:srgbClr val="B4C3D2"/>
+              <a:rPr sz="800" b="0" i="0">
+                <a:solidFill>
+                  <a:srgbClr val="AFBECD"/>
                 </a:solidFill>
               </a:rPr>
               <a:t>PWD Divisions affected</a:t>
@@ -7617,8 +7611,8 @@
         </p:nvSpPr>
         <p:spPr>
           <a:xfrm>
-            <a:off x="3136391" y="777240"/>
-            <a:ext cx="2743200" cy="1234440"/>
+            <a:off x="3136391" y="685800"/>
+            <a:ext cx="2743200" cy="1188720"/>
           </a:xfrm>
           <a:prstGeom prst="rect">
             <a:avLst/>
@@ -7662,8 +7656,8 @@
         </p:nvSpPr>
         <p:spPr>
           <a:xfrm>
-            <a:off x="3227832" y="868680"/>
-            <a:ext cx="2560320" cy="640080"/>
+            <a:off x="3209544" y="758952"/>
+            <a:ext cx="2596896" cy="594360"/>
           </a:xfrm>
           <a:prstGeom prst="rect">
             <a:avLst/>
@@ -7678,12 +7672,12 @@
           <a:p>
             <a:pPr algn="ctr"/>
             <a:r>
-              <a:rPr sz="2200" b="1" i="0">
+              <a:rPr sz="2000" b="1" i="0">
                 <a:solidFill>
                   <a:srgbClr val="FFFFFF"/>
                 </a:solidFill>
               </a:rPr>
-              <a:t>₹20L+</a:t>
+              <a:t>₹40Cr+</a:t>
             </a:r>
           </a:p>
         </p:txBody>
@@ -7696,8 +7690,8 @@
         </p:nvSpPr>
         <p:spPr>
           <a:xfrm>
-            <a:off x="3227832" y="1463040"/>
-            <a:ext cx="2560320" cy="502920"/>
+            <a:off x="3209544" y="1344168"/>
+            <a:ext cx="2596896" cy="475488"/>
           </a:xfrm>
           <a:prstGeom prst="rect">
             <a:avLst/>
@@ -7712,12 +7706,12 @@
           <a:p>
             <a:pPr algn="ctr"/>
             <a:r>
-              <a:rPr sz="850" b="0" i="0">
-                <a:solidFill>
-                  <a:srgbClr val="B4C3D2"/>
+              <a:rPr sz="800" b="0" i="0">
+                <a:solidFill>
+                  <a:srgbClr val="AFBECD"/>
                 </a:solidFill>
               </a:rPr>
-              <a:t>Outsourcing cost/Division/year</a:t>
+              <a:t>Annual outsourcing loss statewide</a:t>
             </a:r>
           </a:p>
         </p:txBody>
@@ -7730,8 +7724,8 @@
         </p:nvSpPr>
         <p:spPr>
           <a:xfrm>
-            <a:off x="5998464" y="777240"/>
-            <a:ext cx="2743200" cy="1234440"/>
+            <a:off x="5998464" y="685800"/>
+            <a:ext cx="2743200" cy="1188720"/>
           </a:xfrm>
           <a:prstGeom prst="rect">
             <a:avLst/>
@@ -7775,8 +7769,8 @@
         </p:nvSpPr>
         <p:spPr>
           <a:xfrm>
-            <a:off x="6089903" y="868680"/>
-            <a:ext cx="2560320" cy="640080"/>
+            <a:off x="6071616" y="758952"/>
+            <a:ext cx="2596896" cy="594360"/>
           </a:xfrm>
           <a:prstGeom prst="rect">
             <a:avLst/>
@@ -7791,12 +7785,12 @@
           <a:p>
             <a:pPr algn="ctr"/>
             <a:r>
-              <a:rPr sz="2200" b="1" i="0">
+              <a:rPr sz="2000" b="1" i="0">
                 <a:solidFill>
                   <a:srgbClr val="FFFFFF"/>
                 </a:solidFill>
               </a:rPr>
-              <a:t>₹40 Cr+</a:t>
+              <a:t>10 Jul</a:t>
             </a:r>
           </a:p>
         </p:txBody>
@@ -7809,8 +7803,8 @@
         </p:nvSpPr>
         <p:spPr>
           <a:xfrm>
-            <a:off x="6089903" y="1463040"/>
-            <a:ext cx="2560320" cy="502920"/>
+            <a:off x="6071616" y="1344168"/>
+            <a:ext cx="2596896" cy="475488"/>
           </a:xfrm>
           <a:prstGeom prst="rect">
             <a:avLst/>
@@ -7825,12 +7819,12 @@
           <a:p>
             <a:pPr algn="ctr"/>
             <a:r>
-              <a:rPr sz="850" b="0" i="0">
-                <a:solidFill>
-                  <a:srgbClr val="B4C3D2"/>
+              <a:rPr sz="800" b="0" i="0">
+                <a:solidFill>
+                  <a:srgbClr val="AFBECD"/>
                 </a:solidFill>
               </a:rPr>
-              <a:t>Annual state-level loss</a:t>
+              <a:t>WAM shutdown — payments stopped 2026</a:t>
             </a:r>
           </a:p>
         </p:txBody>
@@ -7843,8 +7837,8 @@
         </p:nvSpPr>
         <p:spPr>
           <a:xfrm>
-            <a:off x="8860536" y="777240"/>
-            <a:ext cx="2743200" cy="1234440"/>
+            <a:off x="8860536" y="685800"/>
+            <a:ext cx="2743200" cy="1188720"/>
           </a:xfrm>
           <a:prstGeom prst="rect">
             <a:avLst/>
@@ -7888,8 +7882,8 @@
         </p:nvSpPr>
         <p:spPr>
           <a:xfrm>
-            <a:off x="8951976" y="868680"/>
-            <a:ext cx="2560320" cy="640080"/>
+            <a:off x="8933688" y="758952"/>
+            <a:ext cx="2596896" cy="594360"/>
           </a:xfrm>
           <a:prstGeom prst="rect">
             <a:avLst/>
@@ -7904,12 +7898,12 @@
           <a:p>
             <a:pPr algn="ctr"/>
             <a:r>
-              <a:rPr sz="2200" b="1" i="0">
+              <a:rPr sz="2000" b="1" i="0">
                 <a:solidFill>
                   <a:srgbClr val="FFFFFF"/>
                 </a:solidFill>
               </a:rPr>
-              <a:t>14 Years</a:t>
+              <a:t>4 Bugs</a:t>
             </a:r>
           </a:p>
         </p:txBody>
@@ -7922,8 +7916,8 @@
         </p:nvSpPr>
         <p:spPr>
           <a:xfrm>
-            <a:off x="8951976" y="1463040"/>
-            <a:ext cx="2560320" cy="502920"/>
+            <a:off x="8933688" y="1344168"/>
+            <a:ext cx="2596896" cy="475488"/>
           </a:xfrm>
           <a:prstGeom prst="rect">
             <a:avLst/>
@@ -7938,12 +7932,12 @@
           <a:p>
             <a:pPr algn="ctr"/>
             <a:r>
-              <a:rPr sz="850" b="0" i="0">
-                <a:solidFill>
-                  <a:srgbClr val="B4C3D2"/>
+              <a:rPr sz="800" b="0" i="0">
+                <a:solidFill>
+                  <a:srgbClr val="AFBECD"/>
                 </a:solidFill>
               </a:rPr>
-              <a:t>WAM Portal worked (2012-2026)</a:t>
+              <a:t>Documented in official complaint email</a:t>
             </a:r>
           </a:p>
         </p:txBody>
@@ -7956,8 +7950,8 @@
         </p:nvSpPr>
         <p:spPr>
           <a:xfrm>
-            <a:off x="274320" y="2176272"/>
-            <a:ext cx="2743200" cy="1234440"/>
+            <a:off x="274320" y="2020824"/>
+            <a:ext cx="2743200" cy="1188720"/>
           </a:xfrm>
           <a:prstGeom prst="rect">
             <a:avLst/>
@@ -8001,8 +7995,8 @@
         </p:nvSpPr>
         <p:spPr>
           <a:xfrm>
-            <a:off x="365760" y="2267712"/>
-            <a:ext cx="2560320" cy="640080"/>
+            <a:off x="347472" y="2093976"/>
+            <a:ext cx="2596896" cy="594360"/>
           </a:xfrm>
           <a:prstGeom prst="rect">
             <a:avLst/>
@@ -8017,12 +8011,12 @@
           <a:p>
             <a:pPr algn="ctr"/>
             <a:r>
-              <a:rPr sz="2200" b="1" i="0">
+              <a:rPr sz="2000" b="1" i="0">
                 <a:solidFill>
                   <a:srgbClr val="FFFFFF"/>
                 </a:solidFill>
               </a:rPr>
-              <a:t>10 Jul</a:t>
+              <a:t>6 Mths</a:t>
             </a:r>
           </a:p>
         </p:txBody>
@@ -8035,8 +8029,8 @@
         </p:nvSpPr>
         <p:spPr>
           <a:xfrm>
-            <a:off x="365760" y="2862072"/>
-            <a:ext cx="2560320" cy="502920"/>
+            <a:off x="347472" y="2679191"/>
+            <a:ext cx="2596896" cy="475488"/>
           </a:xfrm>
           <a:prstGeom prst="rect">
             <a:avLst/>
@@ -8051,12 +8045,12 @@
           <a:p>
             <a:pPr algn="ctr"/>
             <a:r>
-              <a:rPr sz="850" b="0" i="0">
-                <a:solidFill>
-                  <a:srgbClr val="B4C3D2"/>
+              <a:rPr sz="800" b="0" i="0">
+                <a:solidFill>
+                  <a:srgbClr val="AFBECD"/>
                 </a:solidFill>
               </a:rPr>
-              <a:t>WAM shutdown, payments stopped</a:t>
+              <a:t>AS-ID delay: Physical Oct 2025, IFMS Apr 2026</a:t>
             </a:r>
           </a:p>
         </p:txBody>
@@ -8069,8 +8063,8 @@
         </p:nvSpPr>
         <p:spPr>
           <a:xfrm>
-            <a:off x="3136391" y="2176272"/>
-            <a:ext cx="2743200" cy="1234440"/>
+            <a:off x="3136391" y="2020824"/>
+            <a:ext cx="2743200" cy="1188720"/>
           </a:xfrm>
           <a:prstGeom prst="rect">
             <a:avLst/>
@@ -8114,8 +8108,8 @@
         </p:nvSpPr>
         <p:spPr>
           <a:xfrm>
-            <a:off x="3227832" y="2267712"/>
-            <a:ext cx="2560320" cy="640080"/>
+            <a:off x="3209544" y="2093976"/>
+            <a:ext cx="2596896" cy="594360"/>
           </a:xfrm>
           <a:prstGeom prst="rect">
             <a:avLst/>
@@ -8130,12 +8124,12 @@
           <a:p>
             <a:pPr algn="ctr"/>
             <a:r>
-              <a:rPr sz="2200" b="1" i="0">
+              <a:rPr sz="2000" b="1" i="0">
                 <a:solidFill>
                   <a:srgbClr val="FFFFFF"/>
                 </a:solidFill>
               </a:rPr>
-              <a:t>4 Bugs</a:t>
+              <a:t>DSC</a:t>
             </a:r>
           </a:p>
         </p:txBody>
@@ -8148,8 +8142,8 @@
         </p:nvSpPr>
         <p:spPr>
           <a:xfrm>
-            <a:off x="3227832" y="2862072"/>
-            <a:ext cx="2560320" cy="502920"/>
+            <a:off x="3209544" y="2679191"/>
+            <a:ext cx="2596896" cy="475488"/>
           </a:xfrm>
           <a:prstGeom prst="rect">
             <a:avLst/>
@@ -8164,12 +8158,12 @@
           <a:p>
             <a:pPr algn="ctr"/>
             <a:r>
-              <a:rPr sz="850" b="0" i="0">
-                <a:solidFill>
-                  <a:srgbClr val="B4C3D2"/>
+              <a:rPr sz="800" b="0" i="0">
+                <a:solidFill>
+                  <a:srgbClr val="AFBECD"/>
                 </a:solidFill>
               </a:rPr>
-              <a:t>Documented in official complaint email</a:t>
+              <a:t>At computer centre — IT Act 66C violation</a:t>
             </a:r>
           </a:p>
         </p:txBody>
@@ -8182,8 +8176,8 @@
         </p:nvSpPr>
         <p:spPr>
           <a:xfrm>
-            <a:off x="5998464" y="2176272"/>
-            <a:ext cx="2743200" cy="1234440"/>
+            <a:off x="5998464" y="2020824"/>
+            <a:ext cx="2743200" cy="1188720"/>
           </a:xfrm>
           <a:prstGeom prst="rect">
             <a:avLst/>
@@ -8227,8 +8221,8 @@
         </p:nvSpPr>
         <p:spPr>
           <a:xfrm>
-            <a:off x="6089903" y="2267712"/>
-            <a:ext cx="2560320" cy="640080"/>
+            <a:off x="6071616" y="2093976"/>
+            <a:ext cx="2596896" cy="594360"/>
           </a:xfrm>
           <a:prstGeom prst="rect">
             <a:avLst/>
@@ -8243,12 +8237,12 @@
           <a:p>
             <a:pPr algn="ctr"/>
             <a:r>
-              <a:rPr sz="2200" b="1" i="0">
+              <a:rPr sz="2000" b="1" i="0">
                 <a:solidFill>
                   <a:srgbClr val="FFFFFF"/>
                 </a:solidFill>
               </a:rPr>
-              <a:t>6 Months</a:t>
+              <a:t>~200</a:t>
             </a:r>
           </a:p>
         </p:txBody>
@@ -8261,8 +8255,8 @@
         </p:nvSpPr>
         <p:spPr>
           <a:xfrm>
-            <a:off x="6089903" y="2862072"/>
-            <a:ext cx="2560320" cy="502920"/>
+            <a:off x="6071616" y="2679191"/>
+            <a:ext cx="2596896" cy="475488"/>
           </a:xfrm>
           <a:prstGeom prst="rect">
             <a:avLst/>
@@ -8277,12 +8271,12 @@
           <a:p>
             <a:pPr algn="ctr"/>
             <a:r>
-              <a:rPr sz="850" b="0" i="0">
-                <a:solidFill>
-                  <a:srgbClr val="B4C3D2"/>
+              <a:rPr sz="800" b="0" i="0">
+                <a:solidFill>
+                  <a:srgbClr val="AFBECD"/>
                 </a:solidFill>
               </a:rPr>
-              <a:t>AS-ID delay: Physical Oct 2025, IFMS Apr 2026</a:t>
+              <a:t>Contracts rescinded — ZERO recovery monitoring</a:t>
             </a:r>
           </a:p>
         </p:txBody>
@@ -8295,8 +8289,8 @@
         </p:nvSpPr>
         <p:spPr>
           <a:xfrm>
-            <a:off x="8860536" y="2176272"/>
-            <a:ext cx="2743200" cy="1234440"/>
+            <a:off x="8860536" y="2020824"/>
+            <a:ext cx="2743200" cy="1188720"/>
           </a:xfrm>
           <a:prstGeom prst="rect">
             <a:avLst/>
@@ -8340,8 +8334,8 @@
         </p:nvSpPr>
         <p:spPr>
           <a:xfrm>
-            <a:off x="8951976" y="2267712"/>
-            <a:ext cx="2560320" cy="640080"/>
+            <a:off x="8933688" y="2093976"/>
+            <a:ext cx="2596896" cy="594360"/>
           </a:xfrm>
           <a:prstGeom prst="rect">
             <a:avLst/>
@@ -8356,7 +8350,7 @@
           <a:p>
             <a:pPr algn="ctr"/>
             <a:r>
-              <a:rPr sz="2200" b="1" i="0">
+              <a:rPr sz="2000" b="1" i="0">
                 <a:solidFill>
                   <a:srgbClr val="FFFFFF"/>
                 </a:solidFill>
@@ -8374,8 +8368,8 @@
         </p:nvSpPr>
         <p:spPr>
           <a:xfrm>
-            <a:off x="8951976" y="2862072"/>
-            <a:ext cx="2560320" cy="502920"/>
+            <a:off x="8933688" y="2679191"/>
+            <a:ext cx="2596896" cy="475488"/>
           </a:xfrm>
           <a:prstGeom prst="rect">
             <a:avLst/>
@@ -8390,12 +8384,12 @@
           <a:p>
             <a:pPr algn="ctr"/>
             <a:r>
-              <a:rPr sz="850" b="0" i="0">
-                <a:solidFill>
-                  <a:srgbClr val="B4C3D2"/>
+              <a:rPr sz="800" b="0" i="0">
+                <a:solidFill>
+                  <a:srgbClr val="AFBECD"/>
                 </a:solidFill>
               </a:rPr>
-              <a:t>Helpline/Email replies — Zero response</a:t>
+              <a:t>Helpline replies — employeehelpdesk.ifms@rajasthan.gov.in</a:t>
             </a:r>
           </a:p>
         </p:txBody>
@@ -8408,8 +8402,8 @@
         </p:nvSpPr>
         <p:spPr>
           <a:xfrm>
-            <a:off x="274320" y="3575304"/>
-            <a:ext cx="2743200" cy="1234440"/>
+            <a:off x="274320" y="3355848"/>
+            <a:ext cx="2743200" cy="1188720"/>
           </a:xfrm>
           <a:prstGeom prst="rect">
             <a:avLst/>
@@ -8453,8 +8447,8 @@
         </p:nvSpPr>
         <p:spPr>
           <a:xfrm>
-            <a:off x="365760" y="3666744"/>
-            <a:ext cx="2560320" cy="640080"/>
+            <a:off x="347472" y="3429000"/>
+            <a:ext cx="2596896" cy="594360"/>
           </a:xfrm>
           <a:prstGeom prst="rect">
             <a:avLst/>
@@ -8469,12 +8463,12 @@
           <a:p>
             <a:pPr algn="ctr"/>
             <a:r>
-              <a:rPr sz="2200" b="1" i="0">
+              <a:rPr sz="2000" b="1" i="0">
                 <a:solidFill>
                   <a:srgbClr val="FFFFFF"/>
                 </a:solidFill>
               </a:rPr>
-              <a:t>DSC</a:t>
+              <a:t>90 Days</a:t>
             </a:r>
           </a:p>
         </p:txBody>
@@ -8487,8 +8481,8 @@
         </p:nvSpPr>
         <p:spPr>
           <a:xfrm>
-            <a:off x="365760" y="4261104"/>
-            <a:ext cx="2560320" cy="502920"/>
+            <a:off x="347472" y="4014215"/>
+            <a:ext cx="2596896" cy="475488"/>
           </a:xfrm>
           <a:prstGeom prst="rect">
             <a:avLst/>
@@ -8503,12 +8497,12 @@
           <a:p>
             <a:pPr algn="ctr"/>
             <a:r>
-              <a:rPr sz="850" b="0" i="0">
-                <a:solidFill>
-                  <a:srgbClr val="B4C3D2"/>
+              <a:rPr sz="800" b="0" i="0">
+                <a:solidFill>
+                  <a:srgbClr val="AFBECD"/>
                 </a:solidFill>
               </a:rPr>
-              <a:t>At computer centre — IT Act 66C violation</a:t>
+              <a:t>Time to build Recovery Portal — never done in 15 yrs</a:t>
             </a:r>
           </a:p>
         </p:txBody>
@@ -8633,8 +8627,8 @@
         </p:nvSpPr>
         <p:spPr>
           <a:xfrm>
-            <a:off x="274320" y="164592"/>
-            <a:ext cx="1005840" cy="411480"/>
+            <a:off x="274320" y="137160"/>
+            <a:ext cx="1005840" cy="402336"/>
           </a:xfrm>
           <a:prstGeom prst="rect">
             <a:avLst/>
@@ -8676,8 +8670,8 @@
         </p:nvSpPr>
         <p:spPr>
           <a:xfrm>
-            <a:off x="274320" y="164592"/>
-            <a:ext cx="1005840" cy="411480"/>
+            <a:off x="274320" y="137160"/>
+            <a:ext cx="1005840" cy="402336"/>
           </a:xfrm>
           <a:prstGeom prst="rect">
             <a:avLst/>
@@ -8692,7 +8686,7 @@
           <a:p>
             <a:pPr algn="ctr"/>
             <a:r>
-              <a:rPr sz="1100" b="1" i="0">
+              <a:rPr sz="1000" b="1" i="0">
                 <a:solidFill>
                   <a:srgbClr val="FFFFFF"/>
                 </a:solidFill>
@@ -8710,8 +8704,8 @@
         </p:nvSpPr>
         <p:spPr>
           <a:xfrm>
-            <a:off x="1417320" y="137160"/>
-            <a:ext cx="10424160" cy="548640"/>
+            <a:off x="1417320" y="109728"/>
+            <a:ext cx="10424160" cy="530352"/>
           </a:xfrm>
           <a:prstGeom prst="rect">
             <a:avLst/>
@@ -8726,7 +8720,7 @@
           <a:p>
             <a:pPr algn="l"/>
             <a:r>
-              <a:rPr sz="1800" b="1" i="0">
+              <a:rPr sz="1700" b="1" i="0">
                 <a:solidFill>
                   <a:srgbClr val="FFFFFF"/>
                 </a:solidFill>
@@ -8744,8 +8738,8 @@
         </p:nvSpPr>
         <p:spPr>
           <a:xfrm>
-            <a:off x="1417320" y="658368"/>
-            <a:ext cx="10424160" cy="411480"/>
+            <a:off x="1417320" y="612648"/>
+            <a:ext cx="10424160" cy="402336"/>
           </a:xfrm>
           <a:prstGeom prst="rect">
             <a:avLst/>
@@ -8760,7 +8754,7 @@
           <a:p>
             <a:pPr algn="l"/>
             <a:r>
-              <a:rPr sz="1200" b="1" i="0">
+              <a:rPr sz="1150" b="1" i="0">
                 <a:solidFill>
                   <a:srgbClr val="A0C8DC"/>
                 </a:solidFill>
@@ -8778,7 +8772,7 @@
         </p:nvSpPr>
         <p:spPr>
           <a:xfrm>
-            <a:off x="274320" y="1170432"/>
+            <a:off x="274320" y="1133856"/>
             <a:ext cx="11640312" cy="27432"/>
           </a:xfrm>
           <a:prstGeom prst="rect">
@@ -8821,8 +8815,8 @@
         </p:nvSpPr>
         <p:spPr>
           <a:xfrm>
-            <a:off x="274320" y="1280160"/>
-            <a:ext cx="5669280" cy="5029200"/>
+            <a:off x="274320" y="1234440"/>
+            <a:ext cx="5669280" cy="5120640"/>
           </a:xfrm>
           <a:prstGeom prst="rect">
             <a:avLst/>
@@ -8837,14 +8831,13 @@
           <a:p>
             <a:pPr algn="l"/>
             <a:r>
-              <a:rPr sz="1100" b="0" i="0">
-                <a:solidFill>
-                  <a:srgbClr val="DCE1E6"/>
+              <a:rPr sz="1050" b="0" i="0">
+                <a:solidFill>
+                  <a:srgbClr val="DAE0E6"/>
                 </a:solidFill>
               </a:rPr>
-              <a:t>वर्ष 2012 में राजस्थान सरकार ने PWD और Irrigation के ठेकेदारों के लिए WAM portal
-लॉन्च किया। 14 वर्षों तक यह प्रणाली — खामियों के बावजूद — काम करती रही। 6 July
-2026 तक सब संतोषजनक था।</a:t>
+              <a:t>2012 में WAM portal लॉन्च — PayManager integration। 14 वर्ष काम किया। आखिरी
+WAM payment: 6 July 2026।</a:t>
             </a:r>
           </a:p>
         </p:txBody>
@@ -8857,8 +8850,8 @@
         </p:nvSpPr>
         <p:spPr>
           <a:xfrm>
-            <a:off x="6217920" y="1280160"/>
-            <a:ext cx="5669280" cy="5029200"/>
+            <a:off x="6217920" y="1234440"/>
+            <a:ext cx="5669280" cy="5120640"/>
           </a:xfrm>
           <a:prstGeom prst="rect">
             <a:avLst/>
@@ -8873,14 +8866,14 @@
           <a:p>
             <a:pPr algn="l"/>
             <a:r>
-              <a:rPr sz="1050" b="0" i="1">
-                <a:solidFill>
-                  <a:srgbClr val="AAB9C3"/>
+              <a:rPr sz="1000" b="0" i="1">
+                <a:solidFill>
+                  <a:srgbClr val="A8B9C3"/>
                 </a:solidFill>
               </a:rPr>
-              <a:t>In 2012 Rajasthan launched wam.rajasthan.gov.in integrated with PayManager for
-direct contractor payments. For 14 years, despite flaws, the system functioned.
-Payments were processed. The last successful payment was 6 July 2026.</a:t>
+              <a:t>In 2012 Rajasthan launched WAM portal integrated with PayManager. For 14
+years, despite flaws, payments processed. Last successful WAM payment: 6 July
+2026.</a:t>
             </a:r>
           </a:p>
         </p:txBody>
@@ -8893,8 +8886,8 @@
         </p:nvSpPr>
         <p:spPr>
           <a:xfrm>
-            <a:off x="6035040" y="1280160"/>
-            <a:ext cx="27432" cy="5029200"/>
+            <a:off x="6035040" y="1234440"/>
+            <a:ext cx="27432" cy="5120640"/>
           </a:xfrm>
           <a:prstGeom prst="rect">
             <a:avLst/>
@@ -8936,8 +8929,8 @@
         </p:nvSpPr>
         <p:spPr>
           <a:xfrm>
-            <a:off x="10972800" y="6492240"/>
-            <a:ext cx="1097280" cy="274320"/>
+            <a:off x="10881360" y="6492240"/>
+            <a:ext cx="1188720" cy="274320"/>
           </a:xfrm>
           <a:prstGeom prst="rect">
             <a:avLst/>
@@ -8954,10 +8947,10 @@
             <a:r>
               <a:rPr sz="800" b="0" i="0">
                 <a:solidFill>
-                  <a:srgbClr val="64788C"/>
+                  <a:srgbClr val="647382"/>
                 </a:solidFill>
               </a:rPr>
-              <a:t>3 / 17</a:t>
+              <a:t>Slide 3 / 17</a:t>
             </a:r>
           </a:p>
         </p:txBody>
@@ -9082,8 +9075,8 @@
         </p:nvSpPr>
         <p:spPr>
           <a:xfrm>
-            <a:off x="274320" y="164592"/>
-            <a:ext cx="1005840" cy="411480"/>
+            <a:off x="274320" y="137160"/>
+            <a:ext cx="1005840" cy="402336"/>
           </a:xfrm>
           <a:prstGeom prst="rect">
             <a:avLst/>
@@ -9125,8 +9118,8 @@
         </p:nvSpPr>
         <p:spPr>
           <a:xfrm>
-            <a:off x="274320" y="164592"/>
-            <a:ext cx="1005840" cy="411480"/>
+            <a:off x="274320" y="137160"/>
+            <a:ext cx="1005840" cy="402336"/>
           </a:xfrm>
           <a:prstGeom prst="rect">
             <a:avLst/>
@@ -9141,7 +9134,7 @@
           <a:p>
             <a:pPr algn="ctr"/>
             <a:r>
-              <a:rPr sz="1100" b="1" i="0">
+              <a:rPr sz="1000" b="1" i="0">
                 <a:solidFill>
                   <a:srgbClr val="FFFFFF"/>
                 </a:solidFill>
@@ -9159,8 +9152,8 @@
         </p:nvSpPr>
         <p:spPr>
           <a:xfrm>
-            <a:off x="1417320" y="137160"/>
-            <a:ext cx="10424160" cy="548640"/>
+            <a:off x="1417320" y="109728"/>
+            <a:ext cx="10424160" cy="530352"/>
           </a:xfrm>
           <a:prstGeom prst="rect">
             <a:avLst/>
@@ -9175,7 +9168,7 @@
           <a:p>
             <a:pPr algn="l"/>
             <a:r>
-              <a:rPr sz="1800" b="1" i="0">
+              <a:rPr sz="1700" b="1" i="0">
                 <a:solidFill>
                   <a:srgbClr val="FFFFFF"/>
                 </a:solidFill>
@@ -9193,8 +9186,8 @@
         </p:nvSpPr>
         <p:spPr>
           <a:xfrm>
-            <a:off x="1417320" y="658368"/>
-            <a:ext cx="10424160" cy="411480"/>
+            <a:off x="1417320" y="612648"/>
+            <a:ext cx="10424160" cy="402336"/>
           </a:xfrm>
           <a:prstGeom prst="rect">
             <a:avLst/>
@@ -9209,7 +9202,7 @@
           <a:p>
             <a:pPr algn="l"/>
             <a:r>
-              <a:rPr sz="1200" b="1" i="0">
+              <a:rPr sz="1150" b="1" i="0">
                 <a:solidFill>
                   <a:srgbClr val="A0C8DC"/>
                 </a:solidFill>
@@ -9227,7 +9220,7 @@
         </p:nvSpPr>
         <p:spPr>
           <a:xfrm>
-            <a:off x="274320" y="1170432"/>
+            <a:off x="274320" y="1133856"/>
             <a:ext cx="11640312" cy="27432"/>
           </a:xfrm>
           <a:prstGeom prst="rect">
@@ -9270,8 +9263,8 @@
         </p:nvSpPr>
         <p:spPr>
           <a:xfrm>
-            <a:off x="274320" y="1280160"/>
-            <a:ext cx="5669280" cy="5029200"/>
+            <a:off x="274320" y="1234440"/>
+            <a:ext cx="5669280" cy="5120640"/>
           </a:xfrm>
           <a:prstGeom prst="rect">
             <a:avLst/>
@@ -9286,14 +9279,13 @@
           <a:p>
             <a:pPr algn="l"/>
             <a:r>
-              <a:rPr sz="1100" b="0" i="0">
-                <a:solidFill>
-                  <a:srgbClr val="DCE1E6"/>
+              <a:rPr sz="1050" b="0" i="0">
+                <a:solidFill>
+                  <a:srgbClr val="DAE0E6"/>
                 </a:solidFill>
               </a:rPr>
-              <a:t>खामी 1: Bill केवल कागज़ पर — contractors कभी खुद bill नहीं बनाते थे। खामी 2:
-पारदर्शिता शून्य — नागरिकों के लिए कोई window नहीं। ये खामियां IFMS 3.0 में भी
-जारी हैं।</a:t>
+              <a:t>खामी 1: Bill केवल कागज़ पर। खामी 2: Transparency शून्य। दोनों खामियाँ IFMS 3.0
+में भी जारी।</a:t>
             </a:r>
           </a:p>
         </p:txBody>
@@ -9306,8 +9298,8 @@
         </p:nvSpPr>
         <p:spPr>
           <a:xfrm>
-            <a:off x="6217920" y="1280160"/>
-            <a:ext cx="5669280" cy="5029200"/>
+            <a:off x="6217920" y="1234440"/>
+            <a:ext cx="5669280" cy="5120640"/>
           </a:xfrm>
           <a:prstGeom prst="rect">
             <a:avLst/>
@@ -9322,14 +9314,14 @@
           <a:p>
             <a:pPr algn="l"/>
             <a:r>
-              <a:rPr sz="1050" b="0" i="1">
-                <a:solidFill>
-                  <a:srgbClr val="AAB9C3"/>
+              <a:rPr sz="1000" b="0" i="1">
+                <a:solidFill>
+                  <a:srgbClr val="A8B9C3"/>
                 </a:solidFill>
               </a:rPr>
-              <a:t>Flaw 1: Bill Submission only on paper — contractors never self-submitted. Flaw
-2: Zero public transparency — no citizen window for bill status or payment
-history. Both flaws carried into IFMS 2.0 and 3.0.</a:t>
+              <a:t>Flaw 1: Bill submission only on paper — contractors never self-submitted. Flaw
+2: Zero public transparency — no citizen window. Both flaws carried unchanged
+into IFMS 3.0.</a:t>
             </a:r>
           </a:p>
         </p:txBody>
@@ -9342,8 +9334,8 @@
         </p:nvSpPr>
         <p:spPr>
           <a:xfrm>
-            <a:off x="6035040" y="1280160"/>
-            <a:ext cx="27432" cy="5029200"/>
+            <a:off x="6035040" y="1234440"/>
+            <a:ext cx="27432" cy="5120640"/>
           </a:xfrm>
           <a:prstGeom prst="rect">
             <a:avLst/>
@@ -9385,8 +9377,8 @@
         </p:nvSpPr>
         <p:spPr>
           <a:xfrm>
-            <a:off x="10972800" y="6492240"/>
-            <a:ext cx="1097280" cy="274320"/>
+            <a:off x="10881360" y="6492240"/>
+            <a:ext cx="1188720" cy="274320"/>
           </a:xfrm>
           <a:prstGeom prst="rect">
             <a:avLst/>
@@ -9403,10 +9395,10 @@
             <a:r>
               <a:rPr sz="800" b="0" i="0">
                 <a:solidFill>
-                  <a:srgbClr val="64788C"/>
+                  <a:srgbClr val="647382"/>
                 </a:solidFill>
               </a:rPr>
-              <a:t>4 / 17</a:t>
+              <a:t>Slide 4 / 17</a:t>
             </a:r>
           </a:p>
         </p:txBody>
@@ -9531,8 +9523,8 @@
         </p:nvSpPr>
         <p:spPr>
           <a:xfrm>
-            <a:off x="274320" y="164592"/>
-            <a:ext cx="1005840" cy="411480"/>
+            <a:off x="274320" y="137160"/>
+            <a:ext cx="1005840" cy="402336"/>
           </a:xfrm>
           <a:prstGeom prst="rect">
             <a:avLst/>
@@ -9574,8 +9566,8 @@
         </p:nvSpPr>
         <p:spPr>
           <a:xfrm>
-            <a:off x="274320" y="164592"/>
-            <a:ext cx="1005840" cy="411480"/>
+            <a:off x="274320" y="137160"/>
+            <a:ext cx="1005840" cy="402336"/>
           </a:xfrm>
           <a:prstGeom prst="rect">
             <a:avLst/>
@@ -9590,7 +9582,7 @@
           <a:p>
             <a:pPr algn="ctr"/>
             <a:r>
-              <a:rPr sz="1100" b="1" i="0">
+              <a:rPr sz="1000" b="1" i="0">
                 <a:solidFill>
                   <a:srgbClr val="FFFFFF"/>
                 </a:solidFill>
@@ -9608,8 +9600,8 @@
         </p:nvSpPr>
         <p:spPr>
           <a:xfrm>
-            <a:off x="1417320" y="137160"/>
-            <a:ext cx="10424160" cy="548640"/>
+            <a:off x="1417320" y="109728"/>
+            <a:ext cx="10424160" cy="530352"/>
           </a:xfrm>
           <a:prstGeom prst="rect">
             <a:avLst/>
@@ -9624,12 +9616,12 @@
           <a:p>
             <a:pPr algn="l"/>
             <a:r>
-              <a:rPr sz="1800" b="1" i="0">
+              <a:rPr sz="1700" b="1" i="0">
                 <a:solidFill>
                   <a:srgbClr val="FFFFFF"/>
                 </a:solidFill>
               </a:rPr>
-              <a:t>IFMS 2.0 — महत्वाकांक्षी सुधार, नई उलझनें</a:t>
+              <a:t>IFMS 2.0 — नई उलझनें (जनवरी 2025)</a:t>
             </a:r>
           </a:p>
         </p:txBody>
@@ -9642,8 +9634,8 @@
         </p:nvSpPr>
         <p:spPr>
           <a:xfrm>
-            <a:off x="1417320" y="658368"/>
-            <a:ext cx="10424160" cy="411480"/>
+            <a:off x="1417320" y="612648"/>
+            <a:ext cx="10424160" cy="402336"/>
           </a:xfrm>
           <a:prstGeom prst="rect">
             <a:avLst/>
@@ -9658,12 +9650,12 @@
           <a:p>
             <a:pPr algn="l"/>
             <a:r>
-              <a:rPr sz="1200" b="1" i="0">
+              <a:rPr sz="1150" b="1" i="0">
                 <a:solidFill>
                   <a:srgbClr val="A0C8DC"/>
                 </a:solidFill>
               </a:rPr>
-              <a:t>IFMS 2.0 — Ambitious Reform, New Entanglements (Jan 2025)</a:t>
+              <a:t>IFMS 2.0 — New Entanglements (Jan 2025)</a:t>
             </a:r>
           </a:p>
         </p:txBody>
@@ -9676,7 +9668,7 @@
         </p:nvSpPr>
         <p:spPr>
           <a:xfrm>
-            <a:off x="274320" y="1170432"/>
+            <a:off x="274320" y="1133856"/>
             <a:ext cx="11640312" cy="27432"/>
           </a:xfrm>
           <a:prstGeom prst="rect">
@@ -9719,8 +9711,8 @@
         </p:nvSpPr>
         <p:spPr>
           <a:xfrm>
-            <a:off x="274320" y="1280160"/>
-            <a:ext cx="5669280" cy="5029200"/>
+            <a:off x="274320" y="1234440"/>
+            <a:ext cx="5669280" cy="5120640"/>
           </a:xfrm>
           <a:prstGeom prst="rect">
             <a:avLst/>
@@ -9735,14 +9727,13 @@
           <a:p>
             <a:pPr algn="l"/>
             <a:r>
-              <a:rPr sz="1100" b="0" i="0">
-                <a:solidFill>
-                  <a:srgbClr val="DCE1E6"/>
+              <a:rPr sz="1050" b="0" i="0">
+                <a:solidFill>
+                  <a:srgbClr val="DAE0E6"/>
                 </a:solidFill>
               </a:rPr>
-              <a:t>जनवरी 2025 से 7 अनिवार्य IDs प्रति कार्य। तीन नई समस्याएं: Document overload,
-Electronic MB केवल कागज़ पर, Outsourcing विस्फोट — ₹20 लाख/Division/वर्ष, कुल
-नुकसान ₹40 करोड़+।</a:t>
+              <a:t>7 अनिवार्य IDs। तीन समस्याएं: Document overload, Electronic MB कागज़ पर,
+Outsourcing विस्फोट ₹40 Cr+ वार्षिक नुकसान।</a:t>
             </a:r>
           </a:p>
         </p:txBody>
@@ -9755,8 +9746,8 @@
         </p:nvSpPr>
         <p:spPr>
           <a:xfrm>
-            <a:off x="6217920" y="1280160"/>
-            <a:ext cx="5669280" cy="5029200"/>
+            <a:off x="6217920" y="1234440"/>
+            <a:ext cx="5669280" cy="5120640"/>
           </a:xfrm>
           <a:prstGeom prst="rect">
             <a:avLst/>
@@ -9771,15 +9762,14 @@
           <a:p>
             <a:pPr algn="l"/>
             <a:r>
-              <a:rPr sz="1050" b="0" i="1">
-                <a:solidFill>
-                  <a:srgbClr val="AAB9C3"/>
+              <a:rPr sz="1000" b="0" i="1">
+                <a:solidFill>
+                  <a:srgbClr val="A8B9C3"/>
                 </a:solidFill>
               </a:rPr>
-              <a:t>January 2025: 7 mandatory IDs per work (Work-ID, AS-ID, TS-ID, BOQ-ID, Package-
-ID, WO-ID, Abstract-ID). Electronic MB on mb.rajasthan.gov.in. Three new
-problems: Document overload, electronic MB remained on paper only, outsourcing
-explosion at ₹20L/Division/year totalling ₹40 Cr+ state-wide.</a:t>
+              <a:t>Jan 2025: 7 mandatory IDs per work. Three problems: Document overload,
+Electronic MB stayed on paper only, Outsourcing explosion ₹20L/Division/year =
+₹40 Cr+ statewide annual loss.</a:t>
             </a:r>
           </a:p>
         </p:txBody>
@@ -9792,8 +9782,8 @@
         </p:nvSpPr>
         <p:spPr>
           <a:xfrm>
-            <a:off x="6035040" y="1280160"/>
-            <a:ext cx="27432" cy="5029200"/>
+            <a:off x="6035040" y="1234440"/>
+            <a:ext cx="27432" cy="5120640"/>
           </a:xfrm>
           <a:prstGeom prst="rect">
             <a:avLst/>
@@ -9835,8 +9825,8 @@
         </p:nvSpPr>
         <p:spPr>
           <a:xfrm>
-            <a:off x="10972800" y="6492240"/>
-            <a:ext cx="1097280" cy="274320"/>
+            <a:off x="10881360" y="6492240"/>
+            <a:ext cx="1188720" cy="274320"/>
           </a:xfrm>
           <a:prstGeom prst="rect">
             <a:avLst/>
@@ -9853,10 +9843,10 @@
             <a:r>
               <a:rPr sz="800" b="0" i="0">
                 <a:solidFill>
-                  <a:srgbClr val="64788C"/>
+                  <a:srgbClr val="647382"/>
                 </a:solidFill>
               </a:rPr>
-              <a:t>5 / 17</a:t>
+              <a:t>Slide 5 / 17</a:t>
             </a:r>
           </a:p>
         </p:txBody>
@@ -9981,8 +9971,8 @@
         </p:nvSpPr>
         <p:spPr>
           <a:xfrm>
-            <a:off x="274320" y="164592"/>
-            <a:ext cx="1005840" cy="411480"/>
+            <a:off x="274320" y="137160"/>
+            <a:ext cx="1005840" cy="402336"/>
           </a:xfrm>
           <a:prstGeom prst="rect">
             <a:avLst/>
@@ -10024,8 +10014,8 @@
         </p:nvSpPr>
         <p:spPr>
           <a:xfrm>
-            <a:off x="274320" y="164592"/>
-            <a:ext cx="1005840" cy="411480"/>
+            <a:off x="274320" y="137160"/>
+            <a:ext cx="1005840" cy="402336"/>
           </a:xfrm>
           <a:prstGeom prst="rect">
             <a:avLst/>
@@ -10040,7 +10030,7 @@
           <a:p>
             <a:pPr algn="ctr"/>
             <a:r>
-              <a:rPr sz="1100" b="1" i="0">
+              <a:rPr sz="1000" b="1" i="0">
                 <a:solidFill>
                   <a:srgbClr val="FFFFFF"/>
                 </a:solidFill>
@@ -10058,8 +10048,8 @@
         </p:nvSpPr>
         <p:spPr>
           <a:xfrm>
-            <a:off x="1417320" y="137160"/>
-            <a:ext cx="10424160" cy="548640"/>
+            <a:off x="1417320" y="109728"/>
+            <a:ext cx="10424160" cy="530352"/>
           </a:xfrm>
           <a:prstGeom prst="rect">
             <a:avLst/>
@@ -10074,12 +10064,12 @@
           <a:p>
             <a:pPr algn="l"/>
             <a:r>
-              <a:rPr sz="1800" b="1" i="0">
+              <a:rPr sz="1700" b="1" i="0">
                 <a:solidFill>
                   <a:srgbClr val="FFFFFF"/>
                 </a:solidFill>
               </a:rPr>
-              <a:t>IFMS 2.0 का अंधेरा पहलू — Scam और Accountability का पतन</a:t>
+              <a:t>IFMS 2.0 — Morphed Photo Scam, OTP दुरुपयोग</a:t>
             </a:r>
           </a:p>
         </p:txBody>
@@ -10092,8 +10082,8 @@
         </p:nvSpPr>
         <p:spPr>
           <a:xfrm>
-            <a:off x="1417320" y="658368"/>
-            <a:ext cx="10424160" cy="411480"/>
+            <a:off x="1417320" y="612648"/>
+            <a:ext cx="10424160" cy="402336"/>
           </a:xfrm>
           <a:prstGeom prst="rect">
             <a:avLst/>
@@ -10108,12 +10098,12 @@
           <a:p>
             <a:pPr algn="l"/>
             <a:r>
-              <a:rPr sz="1200" b="1" i="0">
+              <a:rPr sz="1150" b="1" i="0">
                 <a:solidFill>
                   <a:srgbClr val="A0C8DC"/>
                 </a:solidFill>
               </a:rPr>
-              <a:t>IFMS 2.0 Dark Side — Scam &amp; Accountability Collapse</a:t>
+              <a:t>IFMS 2.0 Dark Side — Morphed Photos, OTP Abuse</a:t>
             </a:r>
           </a:p>
         </p:txBody>
@@ -10126,7 +10116,7 @@
         </p:nvSpPr>
         <p:spPr>
           <a:xfrm>
-            <a:off x="274320" y="1170432"/>
+            <a:off x="274320" y="1133856"/>
             <a:ext cx="11640312" cy="27432"/>
           </a:xfrm>
           <a:prstGeom prst="rect">
@@ -10169,8 +10159,8 @@
         </p:nvSpPr>
         <p:spPr>
           <a:xfrm>
-            <a:off x="274320" y="1280160"/>
-            <a:ext cx="5669280" cy="5029200"/>
+            <a:off x="274320" y="1234440"/>
+            <a:ext cx="5669280" cy="5120640"/>
           </a:xfrm>
           <a:prstGeom prst="rect">
             <a:avLst/>
@@ -10185,14 +10175,13 @@
           <a:p>
             <a:pPr algn="l"/>
             <a:r>
-              <a:rPr sz="1100" b="0" i="0">
-                <a:solidFill>
-                  <a:srgbClr val="DCE1E6"/>
+              <a:rPr sz="1050" b="0" i="0">
+                <a:solidFill>
+                  <a:srgbClr val="DAE0E6"/>
                 </a:solidFill>
               </a:rPr>
-              <a:t>Morphed Photo Scam: झूठी progress photos portal पर। OTP दुरुपयोग: Divisional
-Accountants ने OTP operators को दिए। सरकारी accountability पूरी तरह बाहरी हाथों
-में।</a:t>
+              <a:t>Morphed photos as progress proof। Divisional Accountants ने OTP operators को
+दिए। सरकारी accountability outsource।</a:t>
             </a:r>
           </a:p>
         </p:txBody>
@@ -10205,8 +10194,8 @@
         </p:nvSpPr>
         <p:spPr>
           <a:xfrm>
-            <a:off x="6217920" y="1280160"/>
-            <a:ext cx="5669280" cy="5029200"/>
+            <a:off x="6217920" y="1234440"/>
+            <a:ext cx="5669280" cy="5120640"/>
           </a:xfrm>
           <a:prstGeom prst="rect">
             <a:avLst/>
@@ -10221,15 +10210,14 @@
           <a:p>
             <a:pPr algn="l"/>
             <a:r>
-              <a:rPr sz="1050" b="0" i="1">
-                <a:solidFill>
-                  <a:srgbClr val="AAB9C3"/>
+              <a:rPr sz="1000" b="0" i="1">
+                <a:solidFill>
+                  <a:srgbClr val="A8B9C3"/>
                 </a:solidFill>
               </a:rPr>
-              <a:t>Morphed Photo Scam: Digitally edited photos uploaded as progress evidence — work
-not done on ground. OTP Abuse: Divisional Accountants gave their OTPs to
-computer operators. Government accountability fully outsourced to unqualified
-private parties.</a:t>
+              <a:t>Morphed Photo Scam: Digitally edited photos uploaded as progress proof — work
+not done on ground. OTP Abuse: Divisional Accountants handed OTPs to computer
+operators. Government accountability fully outsourced.</a:t>
             </a:r>
           </a:p>
         </p:txBody>
@@ -10242,8 +10230,8 @@
         </p:nvSpPr>
         <p:spPr>
           <a:xfrm>
-            <a:off x="6035040" y="1280160"/>
-            <a:ext cx="27432" cy="5029200"/>
+            <a:off x="6035040" y="1234440"/>
+            <a:ext cx="27432" cy="5120640"/>
           </a:xfrm>
           <a:prstGeom prst="rect">
             <a:avLst/>
@@ -10285,8 +10273,8 @@
         </p:nvSpPr>
         <p:spPr>
           <a:xfrm>
-            <a:off x="10972800" y="6492240"/>
-            <a:ext cx="1097280" cy="274320"/>
+            <a:off x="10881360" y="6492240"/>
+            <a:ext cx="1188720" cy="274320"/>
           </a:xfrm>
           <a:prstGeom prst="rect">
             <a:avLst/>
@@ -10303,10 +10291,10 @@
             <a:r>
               <a:rPr sz="800" b="0" i="0">
                 <a:solidFill>
-                  <a:srgbClr val="64788C"/>
+                  <a:srgbClr val="647382"/>
                 </a:solidFill>
               </a:rPr>
-              <a:t>6 / 17</a:t>
+              <a:t>Slide 6 / 17</a:t>
             </a:r>
           </a:p>
         </p:txBody>
@@ -10431,8 +10419,8 @@
         </p:nvSpPr>
         <p:spPr>
           <a:xfrm>
-            <a:off x="274320" y="164592"/>
-            <a:ext cx="1005840" cy="411480"/>
+            <a:off x="274320" y="137160"/>
+            <a:ext cx="1005840" cy="402336"/>
           </a:xfrm>
           <a:prstGeom prst="rect">
             <a:avLst/>
@@ -10474,8 +10462,8 @@
         </p:nvSpPr>
         <p:spPr>
           <a:xfrm>
-            <a:off x="274320" y="164592"/>
-            <a:ext cx="1005840" cy="411480"/>
+            <a:off x="274320" y="137160"/>
+            <a:ext cx="1005840" cy="402336"/>
           </a:xfrm>
           <a:prstGeom prst="rect">
             <a:avLst/>
@@ -10490,7 +10478,7 @@
           <a:p>
             <a:pPr algn="ctr"/>
             <a:r>
-              <a:rPr sz="1100" b="1" i="0">
+              <a:rPr sz="1000" b="1" i="0">
                 <a:solidFill>
                   <a:srgbClr val="FFFFFF"/>
                 </a:solidFill>
@@ -10508,8 +10496,8 @@
         </p:nvSpPr>
         <p:spPr>
           <a:xfrm>
-            <a:off x="1417320" y="137160"/>
-            <a:ext cx="10424160" cy="548640"/>
+            <a:off x="1417320" y="109728"/>
+            <a:ext cx="10424160" cy="530352"/>
           </a:xfrm>
           <a:prstGeom prst="rect">
             <a:avLst/>
@@ -10524,7 +10512,7 @@
           <a:p>
             <a:pPr algn="l"/>
             <a:r>
-              <a:rPr sz="1800" b="1" i="0">
+              <a:rPr sz="1700" b="1" i="0">
                 <a:solidFill>
                   <a:srgbClr val="FFFFFF"/>
                 </a:solidFill>
@@ -10542,8 +10530,8 @@
         </p:nvSpPr>
         <p:spPr>
           <a:xfrm>
-            <a:off x="1417320" y="658368"/>
-            <a:ext cx="10424160" cy="411480"/>
+            <a:off x="1417320" y="612648"/>
+            <a:ext cx="10424160" cy="402336"/>
           </a:xfrm>
           <a:prstGeom prst="rect">
             <a:avLst/>
@@ -10558,7 +10546,7 @@
           <a:p>
             <a:pPr algn="l"/>
             <a:r>
-              <a:rPr sz="1200" b="1" i="0">
+              <a:rPr sz="1150" b="1" i="0">
                 <a:solidFill>
                   <a:srgbClr val="A0C8DC"/>
                 </a:solidFill>
@@ -10576,7 +10564,7 @@
         </p:nvSpPr>
         <p:spPr>
           <a:xfrm>
-            <a:off x="274320" y="1170432"/>
+            <a:off x="274320" y="1133856"/>
             <a:ext cx="11640312" cy="27432"/>
           </a:xfrm>
           <a:prstGeom prst="rect">
@@ -10619,8 +10607,8 @@
         </p:nvSpPr>
         <p:spPr>
           <a:xfrm>
-            <a:off x="274320" y="1280160"/>
-            <a:ext cx="5669280" cy="5029200"/>
+            <a:off x="274320" y="1234440"/>
+            <a:ext cx="5669280" cy="5120640"/>
           </a:xfrm>
           <a:prstGeom prst="rect">
             <a:avLst/>
@@ -10635,15 +10623,14 @@
           <a:p>
             <a:pPr algn="l"/>
             <a:r>
-              <a:rPr sz="1100" b="0" i="0">
-                <a:solidFill>
-                  <a:srgbClr val="DCE1E6"/>
+              <a:rPr sz="1050" b="0" i="0">
+                <a:solidFill>
+                  <a:srgbClr val="DAE0E6"/>
                 </a:solidFill>
               </a:rPr>
-              <a:t>Physical AS/FS: Oct 2025। Tender: Jan 2026। पहला bill: Apr 2026 — FS-ID absent।
-Division staff पहली बार Apr 2026 में AS-ID बनाता है — 6 माह देरी से। Contractor
-को 'secret bytes' मिलते हैं। HO में रिश्वत। Operator HO credentials से FS-ID
-generate करता है। IP Audit Trail सब उजागर कर सकता है।</a:t>
+              <a:t>Physical AS/FS Oct 2025 — IFMS ID April 2026: 6 माह देरी। FS-ID key to
+treasury payment। Contractor को secret bytes — HO में रिश्वत। Operator HO
+credentials से instant FS-ID। IP Audit trail सब उजागर कर सकता है।</a:t>
             </a:r>
           </a:p>
         </p:txBody>
@@ -10656,8 +10643,8 @@
         </p:nvSpPr>
         <p:spPr>
           <a:xfrm>
-            <a:off x="6217920" y="1280160"/>
-            <a:ext cx="5669280" cy="5029200"/>
+            <a:off x="6217920" y="1234440"/>
+            <a:ext cx="5669280" cy="5120640"/>
           </a:xfrm>
           <a:prstGeom prst="rect">
             <a:avLst/>
@@ -10672,16 +10659,15 @@
           <a:p>
             <a:pPr algn="l"/>
             <a:r>
-              <a:rPr sz="1050" b="0" i="1">
-                <a:solidFill>
-                  <a:srgbClr val="AAB9C3"/>
+              <a:rPr sz="1000" b="0" i="1">
+                <a:solidFill>
+                  <a:srgbClr val="A8B9C3"/>
                 </a:solidFill>
               </a:rPr>
-              <a:t>Physical AS/FS issued Oct 2025. Tender Jan 2026. Work Order Jan last week. First
-bill Apr 2026 — FS-ID absent. Division staff creates AS-ID in April — 6 months
-late. Contractor gets 'secret bytes', approaches HO. Certain operators hold HO
-officer login credentials and generate FS-ID instantly for bribe. IP Login Audit
-can expose this trail.</a:t>
+              <a:t>Physical AS/FS: Oct 2025. Tender: Jan 2026. Work Order: Jan last week. First
+bill attempt: Apr 2026 — FS-ID absent. AS-ID applied 6 months late. Contractor
+gets secret bytes, approaches HO. Certain operators hold HO login credentials
+and generate FS-ID for bribe. IP Login Audit can expose this trail.</a:t>
             </a:r>
           </a:p>
         </p:txBody>
@@ -10694,8 +10680,8 @@
         </p:nvSpPr>
         <p:spPr>
           <a:xfrm>
-            <a:off x="6035040" y="1280160"/>
-            <a:ext cx="27432" cy="5029200"/>
+            <a:off x="6035040" y="1234440"/>
+            <a:ext cx="27432" cy="5120640"/>
           </a:xfrm>
           <a:prstGeom prst="rect">
             <a:avLst/>
@@ -10737,8 +10723,8 @@
         </p:nvSpPr>
         <p:spPr>
           <a:xfrm>
-            <a:off x="10972800" y="6492240"/>
-            <a:ext cx="1097280" cy="274320"/>
+            <a:off x="10881360" y="6492240"/>
+            <a:ext cx="1188720" cy="274320"/>
           </a:xfrm>
           <a:prstGeom prst="rect">
             <a:avLst/>
@@ -10755,10 +10741,10 @@
             <a:r>
               <a:rPr sz="800" b="0" i="0">
                 <a:solidFill>
-                  <a:srgbClr val="64788C"/>
+                  <a:srgbClr val="647382"/>
                 </a:solidFill>
               </a:rPr>
-              <a:t>7 / 17</a:t>
+              <a:t>Slide 7 / 17</a:t>
             </a:r>
           </a:p>
         </p:txBody>
@@ -10883,8 +10869,8 @@
         </p:nvSpPr>
         <p:spPr>
           <a:xfrm>
-            <a:off x="274320" y="164592"/>
-            <a:ext cx="1005840" cy="411480"/>
+            <a:off x="274320" y="137160"/>
+            <a:ext cx="1005840" cy="402336"/>
           </a:xfrm>
           <a:prstGeom prst="rect">
             <a:avLst/>
@@ -10926,8 +10912,8 @@
         </p:nvSpPr>
         <p:spPr>
           <a:xfrm>
-            <a:off x="274320" y="164592"/>
-            <a:ext cx="1005840" cy="411480"/>
+            <a:off x="274320" y="137160"/>
+            <a:ext cx="1005840" cy="402336"/>
           </a:xfrm>
           <a:prstGeom prst="rect">
             <a:avLst/>
@@ -10942,7 +10928,7 @@
           <a:p>
             <a:pPr algn="ctr"/>
             <a:r>
-              <a:rPr sz="1100" b="1" i="0">
+              <a:rPr sz="1000" b="1" i="0">
                 <a:solidFill>
                   <a:srgbClr val="FFFFFF"/>
                 </a:solidFill>
@@ -10960,8 +10946,8 @@
         </p:nvSpPr>
         <p:spPr>
           <a:xfrm>
-            <a:off x="1417320" y="137160"/>
-            <a:ext cx="10424160" cy="548640"/>
+            <a:off x="1417320" y="109728"/>
+            <a:ext cx="10424160" cy="530352"/>
           </a:xfrm>
           <a:prstGeom prst="rect">
             <a:avLst/>
@@ -10976,7 +10962,7 @@
           <a:p>
             <a:pPr algn="l"/>
             <a:r>
-              <a:rPr sz="1800" b="1" i="0">
+              <a:rPr sz="1700" b="1" i="0">
                 <a:solidFill>
                   <a:srgbClr val="FFFFFF"/>
                 </a:solidFill>
@@ -10994,8 +10980,8 @@
         </p:nvSpPr>
         <p:spPr>
           <a:xfrm>
-            <a:off x="1417320" y="658368"/>
-            <a:ext cx="10424160" cy="411480"/>
+            <a:off x="1417320" y="612648"/>
+            <a:ext cx="10424160" cy="402336"/>
           </a:xfrm>
           <a:prstGeom prst="rect">
             <a:avLst/>
@@ -11010,7 +10996,7 @@
           <a:p>
             <a:pPr algn="l"/>
             <a:r>
-              <a:rPr sz="1200" b="1" i="0">
+              <a:rPr sz="1150" b="1" i="0">
                 <a:solidFill>
                   <a:srgbClr val="A0C8DC"/>
                 </a:solidFill>
@@ -11028,7 +11014,7 @@
         </p:nvSpPr>
         <p:spPr>
           <a:xfrm>
-            <a:off x="274320" y="1170432"/>
+            <a:off x="274320" y="1133856"/>
             <a:ext cx="11640312" cy="27432"/>
           </a:xfrm>
           <a:prstGeom prst="rect">
@@ -11071,8 +11057,8 @@
         </p:nvSpPr>
         <p:spPr>
           <a:xfrm>
-            <a:off x="274320" y="1280160"/>
-            <a:ext cx="5669280" cy="5029200"/>
+            <a:off x="274320" y="1234440"/>
+            <a:ext cx="5669280" cy="5120640"/>
           </a:xfrm>
           <a:prstGeom prst="rect">
             <a:avLst/>
@@ -11087,14 +11073,13 @@
           <a:p>
             <a:pPr algn="l"/>
             <a:r>
-              <a:rPr sz="1100" b="0" i="0">
-                <a:solidFill>
-                  <a:srgbClr val="DCE1E6"/>
+              <a:rPr sz="1050" b="0" i="0">
+                <a:solidFill>
+                  <a:srgbClr val="DAE0E6"/>
                 </a:solidFill>
               </a:rPr>
-              <a:t>2 Jul: Training + IFMS 3.0 घोषणा। 6 Jul: WAM पर आखिरी payment। 10 Jul: WAM पूरी
-तरह बंद। 1 Aug: Portal टूटा — Vendor names गायब, Security deposits integrate
-नहीं, Bills ठप।</a:t>
+              <a:t>2 Jul: IFMS 3.0 घोषणा। 6 Jul: आखिरी WAM payment। 10 Jul: WAM बंद। 1 Aug:
+Portal टूटा — Vendors गायब, Security deposits नहीं, Bills ठप।</a:t>
             </a:r>
           </a:p>
         </p:txBody>
@@ -11107,8 +11092,8 @@
         </p:nvSpPr>
         <p:spPr>
           <a:xfrm>
-            <a:off x="6217920" y="1280160"/>
-            <a:ext cx="5669280" cy="5029200"/>
+            <a:off x="6217920" y="1234440"/>
+            <a:ext cx="5669280" cy="5120640"/>
           </a:xfrm>
           <a:prstGeom prst="rect">
             <a:avLst/>
@@ -11123,14 +11108,14 @@
           <a:p>
             <a:pPr algn="l"/>
             <a:r>
-              <a:rPr sz="1050" b="0" i="1">
-                <a:solidFill>
-                  <a:srgbClr val="AAB9C3"/>
+              <a:rPr sz="1000" b="0" i="1">
+                <a:solidFill>
+                  <a:srgbClr val="A8B9C3"/>
                 </a:solidFill>
               </a:rPr>
-              <a:t>2 Jul: Training given, IFMS 3.0 announced. 6 Jul: Last WAM payment. 10 Jul: WAM
-fully shut. 1 Aug: Portal still broken — vendor names missing, security deposits
-not integrated, bills completely stopped.</a:t>
+              <a:t>2 Jul: Training + IFMS 3.0 announced. 6 Jul: Last WAM payment. 10 Jul: WAM
+fully shutdown. 1 Aug 2026: Portal still broken — vendor names missing,
+security deposits not integrated, bills completely stopped.</a:t>
             </a:r>
           </a:p>
         </p:txBody>
@@ -11143,8 +11128,8 @@
         </p:nvSpPr>
         <p:spPr>
           <a:xfrm>
-            <a:off x="6035040" y="1280160"/>
-            <a:ext cx="27432" cy="5029200"/>
+            <a:off x="6035040" y="1234440"/>
+            <a:ext cx="27432" cy="5120640"/>
           </a:xfrm>
           <a:prstGeom prst="rect">
             <a:avLst/>
@@ -11186,8 +11171,8 @@
         </p:nvSpPr>
         <p:spPr>
           <a:xfrm>
-            <a:off x="10972800" y="6492240"/>
-            <a:ext cx="1097280" cy="274320"/>
+            <a:off x="10881360" y="6492240"/>
+            <a:ext cx="1188720" cy="274320"/>
           </a:xfrm>
           <a:prstGeom prst="rect">
             <a:avLst/>
@@ -11204,10 +11189,10 @@
             <a:r>
               <a:rPr sz="800" b="0" i="0">
                 <a:solidFill>
-                  <a:srgbClr val="64788C"/>
+                  <a:srgbClr val="647382"/>
                 </a:solidFill>
               </a:rPr>
-              <a:t>8 / 17</a:t>
+              <a:t>Slide 8 / 17</a:t>
             </a:r>
           </a:p>
         </p:txBody>
@@ -11332,8 +11317,8 @@
         </p:nvSpPr>
         <p:spPr>
           <a:xfrm>
-            <a:off x="274320" y="164592"/>
-            <a:ext cx="1005840" cy="411480"/>
+            <a:off x="274320" y="137160"/>
+            <a:ext cx="1005840" cy="402336"/>
           </a:xfrm>
           <a:prstGeom prst="rect">
             <a:avLst/>
@@ -11375,8 +11360,8 @@
         </p:nvSpPr>
         <p:spPr>
           <a:xfrm>
-            <a:off x="274320" y="164592"/>
-            <a:ext cx="1005840" cy="411480"/>
+            <a:off x="274320" y="137160"/>
+            <a:ext cx="1005840" cy="402336"/>
           </a:xfrm>
           <a:prstGeom prst="rect">
             <a:avLst/>
@@ -11391,7 +11376,7 @@
           <a:p>
             <a:pPr algn="ctr"/>
             <a:r>
-              <a:rPr sz="1100" b="1" i="0">
+              <a:rPr sz="1000" b="1" i="0">
                 <a:solidFill>
                   <a:srgbClr val="FFFFFF"/>
                 </a:solidFill>
@@ -11409,8 +11394,8 @@
         </p:nvSpPr>
         <p:spPr>
           <a:xfrm>
-            <a:off x="1417320" y="137160"/>
-            <a:ext cx="10424160" cy="548640"/>
+            <a:off x="1417320" y="109728"/>
+            <a:ext cx="10424160" cy="530352"/>
           </a:xfrm>
           <a:prstGeom prst="rect">
             <a:avLst/>
@@ -11425,7 +11410,7 @@
           <a:p>
             <a:pPr algn="l"/>
             <a:r>
-              <a:rPr sz="1800" b="1" i="0">
+              <a:rPr sz="1700" b="1" i="0">
                 <a:solidFill>
                   <a:srgbClr val="FFFFFF"/>
                 </a:solidFill>
@@ -11443,8 +11428,8 @@
         </p:nvSpPr>
         <p:spPr>
           <a:xfrm>
-            <a:off x="1417320" y="658368"/>
-            <a:ext cx="10424160" cy="411480"/>
+            <a:off x="1417320" y="612648"/>
+            <a:ext cx="10424160" cy="402336"/>
           </a:xfrm>
           <a:prstGeom prst="rect">
             <a:avLst/>
@@ -11459,7 +11444,7 @@
           <a:p>
             <a:pPr algn="l"/>
             <a:r>
-              <a:rPr sz="1200" b="1" i="0">
+              <a:rPr sz="1150" b="1" i="0">
                 <a:solidFill>
                   <a:srgbClr val="A0C8DC"/>
                 </a:solidFill>
@@ -11477,7 +11462,7 @@
         </p:nvSpPr>
         <p:spPr>
           <a:xfrm>
-            <a:off x="274320" y="1170432"/>
+            <a:off x="274320" y="1133856"/>
             <a:ext cx="11640312" cy="27432"/>
           </a:xfrm>
           <a:prstGeom prst="rect">
@@ -11520,8 +11505,8 @@
         </p:nvSpPr>
         <p:spPr>
           <a:xfrm>
-            <a:off x="274320" y="1280160"/>
-            <a:ext cx="5669280" cy="5029200"/>
+            <a:off x="274320" y="1234440"/>
+            <a:ext cx="5669280" cy="5120640"/>
           </a:xfrm>
           <a:prstGeom prst="rect">
             <a:avLst/>
@@ -11536,14 +11521,13 @@
           <a:p>
             <a:pPr algn="l"/>
             <a:r>
-              <a:rPr sz="1100" b="0" i="0">
-                <a:solidFill>
-                  <a:srgbClr val="DCE1E6"/>
+              <a:rPr sz="1050" b="0" i="0">
+                <a:solidFill>
+                  <a:srgbClr val="DAE0E6"/>
                 </a:solidFill>
               </a:rPr>
-              <a:t>सरकार का vision: Maker-Checker-Approver तीन-स्तरीय verification। ज़मीनी हकीकत:
-90% XEN IFMS portal का inbox तक login नहीं कर पाते। एक operator तीनों roles
-निभाता है।</a:t>
+              <a:t>Vision: Maker-Checker-Approver। Reality: 90% XEN login नहीं कर पाते। एक
+operator तीनों roles। तीन-स्तरीय जाँच की आत्मा नष्ट।</a:t>
             </a:r>
           </a:p>
         </p:txBody>
@@ -11556,8 +11540,8 @@
         </p:nvSpPr>
         <p:spPr>
           <a:xfrm>
-            <a:off x="6217920" y="1280160"/>
-            <a:ext cx="5669280" cy="5029200"/>
+            <a:off x="6217920" y="1234440"/>
+            <a:ext cx="5669280" cy="5120640"/>
           </a:xfrm>
           <a:prstGeom prst="rect">
             <a:avLst/>
@@ -11572,15 +11556,14 @@
           <a:p>
             <a:pPr algn="l"/>
             <a:r>
-              <a:rPr sz="1050" b="0" i="1">
-                <a:solidFill>
-                  <a:srgbClr val="AAB9C3"/>
+              <a:rPr sz="1000" b="0" i="1">
+                <a:solidFill>
+                  <a:srgbClr val="A8B9C3"/>
                 </a:solidFill>
               </a:rPr>
               <a:t>Government vision: Maker-Checker-Approver three-tier verification. Ground
-reality: 90% XEN cannot even login to IFMS portal inbox. Engineers handed OTPs
-to operators. One external operator performs Maker + Checker + Approver roles —
-three-tier verification soul destroyed.</a:t>
+reality: 90% XEN cannot login to IFMS inbox. OTPs given to operators. One
+external operator performs all three roles — the system's soul destroyed.</a:t>
             </a:r>
           </a:p>
         </p:txBody>
@@ -11593,8 +11576,8 @@
         </p:nvSpPr>
         <p:spPr>
           <a:xfrm>
-            <a:off x="6035040" y="1280160"/>
-            <a:ext cx="27432" cy="5029200"/>
+            <a:off x="6035040" y="1234440"/>
+            <a:ext cx="27432" cy="5120640"/>
           </a:xfrm>
           <a:prstGeom prst="rect">
             <a:avLst/>
@@ -11636,8 +11619,8 @@
         </p:nvSpPr>
         <p:spPr>
           <a:xfrm>
-            <a:off x="10972800" y="6492240"/>
-            <a:ext cx="1097280" cy="274320"/>
+            <a:off x="10881360" y="6492240"/>
+            <a:ext cx="1188720" cy="274320"/>
           </a:xfrm>
           <a:prstGeom prst="rect">
             <a:avLst/>
@@ -11654,10 +11637,10 @@
             <a:r>
               <a:rPr sz="800" b="0" i="0">
                 <a:solidFill>
-                  <a:srgbClr val="64788C"/>
+                  <a:srgbClr val="647382"/>
                 </a:solidFill>
               </a:rPr>
-              <a:t>9 / 17</a:t>
+              <a:t>Slide 9 / 17</a:t>
             </a:r>
           </a:p>
         </p:txBody>
